--- a/Final Presentation.pptx
+++ b/Final Presentation.pptx
@@ -13,8 +13,15 @@
     <p:sldId id="261" r:id="rId7"/>
     <p:sldId id="262" r:id="rId8"/>
     <p:sldId id="263" r:id="rId9"/>
-    <p:sldId id="264" r:id="rId10"/>
-    <p:sldId id="265" r:id="rId11"/>
+    <p:sldId id="266" r:id="rId10"/>
+    <p:sldId id="267" r:id="rId11"/>
+    <p:sldId id="268" r:id="rId12"/>
+    <p:sldId id="269" r:id="rId13"/>
+    <p:sldId id="270" r:id="rId14"/>
+    <p:sldId id="271" r:id="rId15"/>
+    <p:sldId id="272" r:id="rId16"/>
+    <p:sldId id="264" r:id="rId17"/>
+    <p:sldId id="265" r:id="rId18"/>
   </p:sldIdLst>
   <p:sldSz cx="12192000" cy="6858000"/>
   <p:notesSz cx="6858000" cy="9144000"/>
@@ -113,6 +120,11 @@
       </a:defRPr>
     </a:lvl9pPr>
   </p:defaultTextStyle>
+  <p:extLst>
+    <p:ext uri="{EFAFB233-063F-42B5-8137-9DF3F51BA10A}">
+      <p15:sldGuideLst xmlns:p15="http://schemas.microsoft.com/office/powerpoint/2012/main"/>
+    </p:ext>
+  </p:extLst>
 </p:presentation>
 </file>
 
@@ -1653,7 +1665,187 @@
 <dgm:dataModel xmlns:dgm="http://schemas.openxmlformats.org/drawingml/2006/diagram" xmlns:a="http://schemas.openxmlformats.org/drawingml/2006/main">
   <dgm:ptLst>
     <dgm:pt modelId="{82AB9D6D-FF8E-491B-93AF-00149F7BDBFE}" type="doc">
-      <dgm:prSet loTypeId="urn:microsoft.com/office/officeart/2005/8/layout/hierarchy1" loCatId="hierarchy" qsTypeId="urn:microsoft.com/office/officeart/2005/8/quickstyle/simple1" qsCatId="simple" csTypeId="urn:microsoft.com/office/officeart/2005/8/colors/colorful2" csCatId="colorful"/>
+      <dgm:prSet loTypeId="urn:microsoft.com/office/officeart/2005/8/layout/hierarchy1" loCatId="hierarchy" qsTypeId="urn:microsoft.com/office/officeart/2005/8/quickstyle/simple1" qsCatId="simple" csTypeId="urn:microsoft.com/office/officeart/2005/8/colors/colorful2" csCatId="colorful" phldr="1"/>
+      <dgm:spPr/>
+      <dgm:t>
+        <a:bodyPr/>
+        <a:lstStyle/>
+        <a:p>
+          <a:endParaRPr lang="en-US"/>
+        </a:p>
+      </dgm:t>
+    </dgm:pt>
+    <dgm:pt modelId="{61CEFE57-9409-4E6A-9817-B12B48DC0698}">
+      <dgm:prSet/>
+      <dgm:spPr/>
+      <dgm:t>
+        <a:bodyPr/>
+        <a:lstStyle/>
+        <a:p>
+          <a:pPr>
+            <a:buNone/>
+          </a:pPr>
+          <a:r>
+            <a:rPr lang="pt-PT" dirty="0" err="1"/>
+            <a:t>Once</a:t>
+          </a:r>
+          <a:r>
+            <a:rPr lang="pt-PT" dirty="0"/>
+            <a:t> </a:t>
+          </a:r>
+          <a:r>
+            <a:rPr lang="pt-PT" dirty="0" err="1"/>
+            <a:t>that’s</a:t>
+          </a:r>
+          <a:r>
+            <a:rPr lang="pt-PT" dirty="0"/>
+            <a:t> </a:t>
+          </a:r>
+          <a:r>
+            <a:rPr lang="pt-PT" dirty="0" err="1"/>
+            <a:t>done</a:t>
+          </a:r>
+          <a:r>
+            <a:rPr lang="pt-PT" dirty="0"/>
+            <a:t>, </a:t>
+          </a:r>
+          <a:r>
+            <a:rPr lang="pt-PT" dirty="0" err="1"/>
+            <a:t>we’ll</a:t>
+          </a:r>
+          <a:r>
+            <a:rPr lang="pt-PT" dirty="0"/>
+            <a:t> move </a:t>
+          </a:r>
+          <a:r>
+            <a:rPr lang="pt-PT" dirty="0" err="1"/>
+            <a:t>on</a:t>
+          </a:r>
+          <a:r>
+            <a:rPr lang="pt-PT" dirty="0"/>
+            <a:t> to </a:t>
+          </a:r>
+          <a:r>
+            <a:rPr lang="pt-PT" dirty="0" err="1"/>
+            <a:t>customizing</a:t>
+          </a:r>
+          <a:r>
+            <a:rPr lang="pt-PT" dirty="0"/>
+            <a:t> </a:t>
+          </a:r>
+          <a:r>
+            <a:rPr lang="pt-PT" dirty="0" err="1"/>
+            <a:t>the</a:t>
+          </a:r>
+          <a:r>
+            <a:rPr lang="pt-PT" dirty="0"/>
+            <a:t> </a:t>
+          </a:r>
+          <a:r>
+            <a:rPr lang="pt-PT" dirty="0" err="1"/>
+            <a:t>OutSystems</a:t>
+          </a:r>
+          <a:r>
+            <a:rPr lang="pt-PT" dirty="0"/>
+            <a:t> </a:t>
+          </a:r>
+          <a:r>
+            <a:rPr lang="pt-PT" dirty="0" err="1"/>
+            <a:t>widgets</a:t>
+          </a:r>
+          <a:r>
+            <a:rPr lang="pt-PT" dirty="0"/>
+            <a:t>, </a:t>
+          </a:r>
+          <a:r>
+            <a:rPr lang="pt-PT" dirty="0" err="1"/>
+            <a:t>styling</a:t>
+          </a:r>
+          <a:r>
+            <a:rPr lang="pt-PT" dirty="0"/>
+            <a:t> </a:t>
+          </a:r>
+          <a:r>
+            <a:rPr lang="pt-PT" dirty="0" err="1"/>
+            <a:t>them</a:t>
+          </a:r>
+          <a:r>
+            <a:rPr lang="pt-PT" dirty="0"/>
+            <a:t> as </a:t>
+          </a:r>
+          <a:r>
+            <a:rPr lang="pt-PT" dirty="0" err="1"/>
+            <a:t>shown</a:t>
+          </a:r>
+          <a:r>
+            <a:rPr lang="pt-PT" dirty="0"/>
+            <a:t> in </a:t>
+          </a:r>
+          <a:r>
+            <a:rPr lang="pt-PT" dirty="0" err="1"/>
+            <a:t>the</a:t>
+          </a:r>
+          <a:r>
+            <a:rPr lang="pt-PT" dirty="0"/>
+            <a:t> </a:t>
+          </a:r>
+          <a:r>
+            <a:rPr lang="pt-PT" dirty="0" err="1"/>
+            <a:t>style</a:t>
+          </a:r>
+          <a:r>
+            <a:rPr lang="pt-PT" dirty="0"/>
+            <a:t> </a:t>
+          </a:r>
+          <a:r>
+            <a:rPr lang="pt-PT" dirty="0" err="1"/>
+            <a:t>guide</a:t>
+          </a:r>
+          <a:r>
+            <a:rPr lang="pt-PT" dirty="0"/>
+            <a:t> (Customize </a:t>
+          </a:r>
+          <a:r>
+            <a:rPr lang="pt-PT" dirty="0" err="1"/>
+            <a:t>all</a:t>
+          </a:r>
+          <a:r>
+            <a:rPr lang="pt-PT" dirty="0"/>
+            <a:t> </a:t>
+          </a:r>
+          <a:r>
+            <a:rPr lang="pt-PT" dirty="0" err="1"/>
+            <a:t>Built</a:t>
+          </a:r>
+          <a:r>
+            <a:rPr lang="pt-PT" dirty="0"/>
+            <a:t>-in </a:t>
+          </a:r>
+          <a:r>
+            <a:rPr lang="pt-PT" dirty="0" err="1"/>
+            <a:t>Widgets</a:t>
+          </a:r>
+          <a:r>
+            <a:rPr lang="pt-PT" dirty="0"/>
+            <a:t>)</a:t>
+          </a:r>
+          <a:endParaRPr lang="en-US" dirty="0"/>
+        </a:p>
+      </dgm:t>
+    </dgm:pt>
+    <dgm:pt modelId="{6E628D4C-8D6A-4BA0-B40C-A3931D9D0C76}" type="parTrans" cxnId="{EE9CF51A-0258-4E00-8317-C25B27B2113E}">
+      <dgm:prSet/>
+      <dgm:spPr/>
+      <dgm:t>
+        <a:bodyPr/>
+        <a:lstStyle/>
+        <a:p>
+          <a:endParaRPr lang="en-US"/>
+        </a:p>
+      </dgm:t>
+    </dgm:pt>
+    <dgm:pt modelId="{52993E11-FBC2-456B-B030-FE6ECA6D054B}" type="sibTrans" cxnId="{EE9CF51A-0258-4E00-8317-C25B27B2113E}">
+      <dgm:prSet/>
       <dgm:spPr/>
       <dgm:t>
         <a:bodyPr/>
@@ -1670,9 +1862,152 @@
         <a:bodyPr/>
         <a:lstStyle/>
         <a:p>
+          <a:pPr>
+            <a:buNone/>
+          </a:pPr>
+          <a:r>
+            <a:rPr lang="pt-PT" dirty="0" err="1"/>
+            <a:t>Once</a:t>
+          </a:r>
           <a:r>
             <a:rPr lang="pt-PT" dirty="0"/>
-            <a:t>Após termos o sistema todo montado para começar a fazer as alterações para o cliente, comecei a desenvolver a minha </a:t>
+            <a:t> </a:t>
+          </a:r>
+          <a:r>
+            <a:rPr lang="pt-PT" dirty="0" err="1"/>
+            <a:t>we</a:t>
+          </a:r>
+          <a:r>
+            <a:rPr lang="pt-PT" dirty="0"/>
+            <a:t> </a:t>
+          </a:r>
+          <a:r>
+            <a:rPr lang="pt-PT" dirty="0" err="1"/>
+            <a:t>had</a:t>
+          </a:r>
+          <a:r>
+            <a:rPr lang="pt-PT" dirty="0"/>
+            <a:t> </a:t>
+          </a:r>
+          <a:r>
+            <a:rPr lang="pt-PT" dirty="0" err="1"/>
+            <a:t>the</a:t>
+          </a:r>
+          <a:r>
+            <a:rPr lang="pt-PT" dirty="0"/>
+            <a:t> </a:t>
+          </a:r>
+          <a:r>
+            <a:rPr lang="pt-PT" dirty="0" err="1"/>
+            <a:t>entire</a:t>
+          </a:r>
+          <a:r>
+            <a:rPr lang="pt-PT" dirty="0"/>
+            <a:t> </a:t>
+          </a:r>
+          <a:r>
+            <a:rPr lang="pt-PT" dirty="0" err="1"/>
+            <a:t>system</a:t>
+          </a:r>
+          <a:r>
+            <a:rPr lang="pt-PT" dirty="0"/>
+            <a:t> set </a:t>
+          </a:r>
+          <a:r>
+            <a:rPr lang="pt-PT" dirty="0" err="1"/>
+            <a:t>up</a:t>
+          </a:r>
+          <a:r>
+            <a:rPr lang="pt-PT" dirty="0"/>
+            <a:t> </a:t>
+          </a:r>
+          <a:r>
+            <a:rPr lang="pt-PT" dirty="0" err="1"/>
+            <a:t>and</a:t>
+          </a:r>
+          <a:r>
+            <a:rPr lang="pt-PT" dirty="0"/>
+            <a:t> </a:t>
+          </a:r>
+          <a:r>
+            <a:rPr lang="pt-PT" dirty="0" err="1"/>
+            <a:t>were</a:t>
+          </a:r>
+          <a:r>
+            <a:rPr lang="pt-PT" dirty="0"/>
+            <a:t> </a:t>
+          </a:r>
+          <a:r>
+            <a:rPr lang="pt-PT" dirty="0" err="1"/>
+            <a:t>ready</a:t>
+          </a:r>
+          <a:r>
+            <a:rPr lang="pt-PT" dirty="0"/>
+            <a:t> to </a:t>
+          </a:r>
+          <a:r>
+            <a:rPr lang="pt-PT" dirty="0" err="1"/>
+            <a:t>start</a:t>
+          </a:r>
+          <a:r>
+            <a:rPr lang="pt-PT" dirty="0"/>
+            <a:t> </a:t>
+          </a:r>
+          <a:r>
+            <a:rPr lang="pt-PT" dirty="0" err="1"/>
+            <a:t>making</a:t>
+          </a:r>
+          <a:r>
+            <a:rPr lang="pt-PT" dirty="0"/>
+            <a:t> </a:t>
+          </a:r>
+          <a:r>
+            <a:rPr lang="pt-PT" dirty="0" err="1"/>
+            <a:t>changes</a:t>
+          </a:r>
+          <a:r>
+            <a:rPr lang="pt-PT" dirty="0"/>
+            <a:t> for </a:t>
+          </a:r>
+          <a:r>
+            <a:rPr lang="pt-PT" dirty="0" err="1"/>
+            <a:t>the</a:t>
+          </a:r>
+          <a:r>
+            <a:rPr lang="pt-PT" dirty="0"/>
+            <a:t> </a:t>
+          </a:r>
+          <a:r>
+            <a:rPr lang="pt-PT" dirty="0" err="1"/>
+            <a:t>client</a:t>
+          </a:r>
+          <a:r>
+            <a:rPr lang="pt-PT" dirty="0"/>
+            <a:t>, I </a:t>
+          </a:r>
+          <a:r>
+            <a:rPr lang="pt-PT" dirty="0" err="1"/>
+            <a:t>began</a:t>
+          </a:r>
+          <a:r>
+            <a:rPr lang="pt-PT" dirty="0"/>
+            <a:t> </a:t>
+          </a:r>
+          <a:r>
+            <a:rPr lang="pt-PT" dirty="0" err="1"/>
+            <a:t>developing</a:t>
+          </a:r>
+          <a:r>
+            <a:rPr lang="pt-PT" dirty="0"/>
+            <a:t> </a:t>
+          </a:r>
+          <a:r>
+            <a:rPr lang="pt-PT" dirty="0" err="1"/>
+            <a:t>my</a:t>
+          </a:r>
+          <a:r>
+            <a:rPr lang="pt-PT" dirty="0"/>
+            <a:t> </a:t>
           </a:r>
           <a:r>
             <a:rPr lang="pt-PT" dirty="0" err="1"/>
@@ -1680,23 +2015,119 @@
           </a:r>
           <a:r>
             <a:rPr lang="pt-PT" dirty="0"/>
-            <a:t> e </a:t>
+            <a:t> </a:t>
           </a:r>
           <a:r>
             <a:rPr lang="pt-PT" dirty="0" err="1"/>
-            <a:t>usefull</a:t>
+            <a:t>and</a:t>
           </a:r>
           <a:r>
             <a:rPr lang="pt-PT" dirty="0"/>
-            <a:t> classes analisando o </a:t>
+            <a:t> </a:t>
           </a:r>
           <a:r>
             <a:rPr lang="pt-PT" dirty="0" err="1"/>
-            <a:t>figma</a:t>
+            <a:t>utility</a:t>
           </a:r>
           <a:r>
             <a:rPr lang="pt-PT" dirty="0"/>
-            <a:t>, só adicionando e trocando o estritamente necessário (</a:t>
+            <a:t> classes </a:t>
+          </a:r>
+          <a:r>
+            <a:rPr lang="pt-PT" dirty="0" err="1"/>
+            <a:t>by</a:t>
+          </a:r>
+          <a:r>
+            <a:rPr lang="pt-PT" dirty="0"/>
+            <a:t> </a:t>
+          </a:r>
+          <a:r>
+            <a:rPr lang="pt-PT" dirty="0" err="1"/>
+            <a:t>analyzing</a:t>
+          </a:r>
+          <a:r>
+            <a:rPr lang="pt-PT" dirty="0"/>
+            <a:t> </a:t>
+          </a:r>
+          <a:r>
+            <a:rPr lang="pt-PT" dirty="0" err="1"/>
+            <a:t>the</a:t>
+          </a:r>
+          <a:r>
+            <a:rPr lang="pt-PT" dirty="0"/>
+            <a:t> </a:t>
+          </a:r>
+          <a:r>
+            <a:rPr lang="pt-PT" dirty="0" err="1"/>
+            <a:t>Figma</a:t>
+          </a:r>
+          <a:r>
+            <a:rPr lang="pt-PT" dirty="0"/>
+            <a:t> files, </a:t>
+          </a:r>
+          <a:r>
+            <a:rPr lang="pt-PT" dirty="0" err="1"/>
+            <a:t>adding</a:t>
+          </a:r>
+          <a:r>
+            <a:rPr lang="pt-PT" dirty="0"/>
+            <a:t> </a:t>
+          </a:r>
+          <a:r>
+            <a:rPr lang="pt-PT" dirty="0" err="1"/>
+            <a:t>and</a:t>
+          </a:r>
+          <a:r>
+            <a:rPr lang="pt-PT" dirty="0"/>
+            <a:t> </a:t>
+          </a:r>
+          <a:r>
+            <a:rPr lang="pt-PT" dirty="0" err="1"/>
+            <a:t>modifying</a:t>
+          </a:r>
+          <a:r>
+            <a:rPr lang="pt-PT" dirty="0"/>
+            <a:t> </a:t>
+          </a:r>
+          <a:r>
+            <a:rPr lang="pt-PT" dirty="0" err="1"/>
+            <a:t>only</a:t>
+          </a:r>
+          <a:r>
+            <a:rPr lang="pt-PT" dirty="0"/>
+            <a:t> </a:t>
+          </a:r>
+          <a:r>
+            <a:rPr lang="pt-PT" dirty="0" err="1"/>
+            <a:t>what</a:t>
+          </a:r>
+          <a:r>
+            <a:rPr lang="pt-PT" dirty="0"/>
+            <a:t> </a:t>
+          </a:r>
+          <a:r>
+            <a:rPr lang="pt-PT" dirty="0" err="1"/>
+            <a:t>was</a:t>
+          </a:r>
+          <a:r>
+            <a:rPr lang="pt-PT" dirty="0"/>
+            <a:t> </a:t>
+          </a:r>
+          <a:r>
+            <a:rPr lang="pt-PT" dirty="0" err="1"/>
+            <a:t>strictly</a:t>
+          </a:r>
+          <a:r>
+            <a:rPr lang="pt-PT" dirty="0"/>
+            <a:t> </a:t>
+          </a:r>
+          <a:r>
+            <a:rPr lang="pt-PT" dirty="0" err="1"/>
+            <a:t>necessary</a:t>
+          </a:r>
+          <a:r>
+            <a:rPr lang="pt-PT" dirty="0"/>
+            <a:t> (</a:t>
           </a:r>
           <a:r>
             <a:rPr lang="pt-PT" dirty="0" err="1"/>
@@ -1707,17 +2138,6 @@
             <a:t>).</a:t>
           </a:r>
           <a:endParaRPr lang="en-US" dirty="0"/>
-        </a:p>
-      </dgm:t>
-    </dgm:pt>
-    <dgm:pt modelId="{6449DF40-E57E-416E-B98D-FEBFA3630F33}" type="parTrans" cxnId="{77B8ABA0-AB61-4558-8D78-9947AC1D3CAC}">
-      <dgm:prSet/>
-      <dgm:spPr/>
-      <dgm:t>
-        <a:bodyPr/>
-        <a:lstStyle/>
-        <a:p>
-          <a:endParaRPr lang="en-US"/>
         </a:p>
       </dgm:t>
     </dgm:pt>
@@ -1732,33 +2152,7 @@
         </a:p>
       </dgm:t>
     </dgm:pt>
-    <dgm:pt modelId="{61CEFE57-9409-4E6A-9817-B12B48DC0698}">
-      <dgm:prSet/>
-      <dgm:spPr/>
-      <dgm:t>
-        <a:bodyPr/>
-        <a:lstStyle/>
-        <a:p>
-          <a:r>
-            <a:rPr lang="pt-PT"/>
-            <a:t>Uma vez efetuado, passamos para alterar os widgets de outsysteams, estilizando-os como está no figma (Customize all Built-in Widgets).</a:t>
-          </a:r>
-          <a:endParaRPr lang="en-US"/>
-        </a:p>
-      </dgm:t>
-    </dgm:pt>
-    <dgm:pt modelId="{6E628D4C-8D6A-4BA0-B40C-A3931D9D0C76}" type="parTrans" cxnId="{EE9CF51A-0258-4E00-8317-C25B27B2113E}">
-      <dgm:prSet/>
-      <dgm:spPr/>
-      <dgm:t>
-        <a:bodyPr/>
-        <a:lstStyle/>
-        <a:p>
-          <a:endParaRPr lang="en-US"/>
-        </a:p>
-      </dgm:t>
-    </dgm:pt>
-    <dgm:pt modelId="{52993E11-FBC2-456B-B030-FE6ECA6D054B}" type="sibTrans" cxnId="{EE9CF51A-0258-4E00-8317-C25B27B2113E}">
+    <dgm:pt modelId="{6449DF40-E57E-416E-B98D-FEBFA3630F33}" type="parTrans" cxnId="{77B8ABA0-AB61-4558-8D78-9947AC1D3CAC}">
       <dgm:prSet/>
       <dgm:spPr/>
       <dgm:t>
@@ -1887,10 +2281,86 @@
         <a:lstStyle/>
         <a:p>
           <a:r>
-            <a:rPr lang="pt-PT"/>
-            <a:t>Para duvidas falei com o meu TeamLider André Henriques e com o meu mentor Diogo Miranda;</a:t>
-          </a:r>
-          <a:endParaRPr lang="en-US"/>
+            <a:rPr lang="pt-PT" dirty="0" err="1"/>
+            <a:t>If</a:t>
+          </a:r>
+          <a:r>
+            <a:rPr lang="pt-PT" dirty="0"/>
+            <a:t> i </a:t>
+          </a:r>
+          <a:r>
+            <a:rPr lang="pt-PT" dirty="0" err="1"/>
+            <a:t>have</a:t>
+          </a:r>
+          <a:r>
+            <a:rPr lang="pt-PT" dirty="0"/>
+            <a:t> </a:t>
+          </a:r>
+          <a:r>
+            <a:rPr lang="pt-PT" dirty="0" err="1"/>
+            <a:t>any</a:t>
+          </a:r>
+          <a:r>
+            <a:rPr lang="pt-PT" dirty="0"/>
+            <a:t> </a:t>
+          </a:r>
+          <a:r>
+            <a:rPr lang="pt-PT" dirty="0" err="1"/>
+            <a:t>questions</a:t>
+          </a:r>
+          <a:r>
+            <a:rPr lang="pt-PT" dirty="0"/>
+            <a:t>, I </a:t>
+          </a:r>
+          <a:r>
+            <a:rPr lang="pt-PT" dirty="0" err="1"/>
+            <a:t>spoke</a:t>
+          </a:r>
+          <a:r>
+            <a:rPr lang="pt-PT" dirty="0"/>
+            <a:t> </a:t>
+          </a:r>
+          <a:r>
+            <a:rPr lang="pt-PT" dirty="0" err="1"/>
+            <a:t>with</a:t>
+          </a:r>
+          <a:r>
+            <a:rPr lang="pt-PT" dirty="0"/>
+            <a:t> </a:t>
+          </a:r>
+          <a:r>
+            <a:rPr lang="pt-PT" dirty="0" err="1"/>
+            <a:t>my</a:t>
+          </a:r>
+          <a:r>
+            <a:rPr lang="pt-PT" dirty="0"/>
+            <a:t> team leader, André Henriques, </a:t>
+          </a:r>
+          <a:r>
+            <a:rPr lang="pt-PT" dirty="0" err="1"/>
+            <a:t>and</a:t>
+          </a:r>
+          <a:r>
+            <a:rPr lang="pt-PT" dirty="0"/>
+            <a:t> </a:t>
+          </a:r>
+          <a:r>
+            <a:rPr lang="pt-PT" dirty="0" err="1"/>
+            <a:t>with</a:t>
+          </a:r>
+          <a:r>
+            <a:rPr lang="pt-PT" dirty="0"/>
+            <a:t> Diogo Miranda, </a:t>
+          </a:r>
+          <a:r>
+            <a:rPr lang="pt-PT" dirty="0" err="1"/>
+            <a:t>the</a:t>
+          </a:r>
+          <a:r>
+            <a:rPr lang="pt-PT" dirty="0"/>
+            <a:t> mentor.</a:t>
+          </a:r>
+          <a:endParaRPr lang="en-US" dirty="0"/>
         </a:p>
       </dgm:t>
     </dgm:pt>
@@ -1917,9 +2387,10 @@
         <a:lstStyle/>
         <a:p>
           <a:r>
-            <a:rPr lang="en-US" dirty="0"/>
+            <a:rPr lang="en-US"/>
             <a:t>1</a:t>
           </a:r>
+          <a:endParaRPr lang="en-US" dirty="0"/>
         </a:p>
       </dgm:t>
     </dgm:pt>
@@ -1931,10 +2402,30 @@
         <a:lstStyle/>
         <a:p>
           <a:r>
-            <a:rPr lang="pt-PT"/>
-            <a:t>https://doitlean-dev.outsystemscloud.com/RocketUI/</a:t>
-          </a:r>
-          <a:endParaRPr lang="en-US"/>
+            <a:rPr lang="pt-PT" dirty="0" err="1"/>
+            <a:t>https</a:t>
+          </a:r>
+          <a:r>
+            <a:rPr lang="pt-PT" dirty="0"/>
+            <a:t>://</a:t>
+          </a:r>
+          <a:r>
+            <a:rPr lang="pt-PT" dirty="0" err="1"/>
+            <a:t>doitlean-dev.outsystemscloud.com</a:t>
+          </a:r>
+          <a:r>
+            <a:rPr lang="pt-PT" dirty="0"/>
+            <a:t>/</a:t>
+          </a:r>
+          <a:r>
+            <a:rPr lang="pt-PT" dirty="0" err="1"/>
+            <a:t>RocketUI</a:t>
+          </a:r>
+          <a:r>
+            <a:rPr lang="pt-PT" dirty="0"/>
+            <a:t>/</a:t>
+          </a:r>
+          <a:endParaRPr lang="en-US" dirty="0"/>
         </a:p>
       </dgm:t>
     </dgm:pt>
@@ -2579,8 +3070,148 @@
             <a:buNone/>
           </a:pPr>
           <a:r>
+            <a:rPr lang="pt-PT" sz="2400" kern="1200" dirty="0" err="1"/>
+            <a:t>Once</a:t>
+          </a:r>
+          <a:r>
             <a:rPr lang="pt-PT" sz="2400" kern="1200" dirty="0"/>
-            <a:t>Após termos o sistema todo montado para começar a fazer as alterações para o cliente, comecei a desenvolver a minha </a:t>
+            <a:t> </a:t>
+          </a:r>
+          <a:r>
+            <a:rPr lang="pt-PT" sz="2400" kern="1200" dirty="0" err="1"/>
+            <a:t>we</a:t>
+          </a:r>
+          <a:r>
+            <a:rPr lang="pt-PT" sz="2400" kern="1200" dirty="0"/>
+            <a:t> </a:t>
+          </a:r>
+          <a:r>
+            <a:rPr lang="pt-PT" sz="2400" kern="1200" dirty="0" err="1"/>
+            <a:t>had</a:t>
+          </a:r>
+          <a:r>
+            <a:rPr lang="pt-PT" sz="2400" kern="1200" dirty="0"/>
+            <a:t> </a:t>
+          </a:r>
+          <a:r>
+            <a:rPr lang="pt-PT" sz="2400" kern="1200" dirty="0" err="1"/>
+            <a:t>the</a:t>
+          </a:r>
+          <a:r>
+            <a:rPr lang="pt-PT" sz="2400" kern="1200" dirty="0"/>
+            <a:t> </a:t>
+          </a:r>
+          <a:r>
+            <a:rPr lang="pt-PT" sz="2400" kern="1200" dirty="0" err="1"/>
+            <a:t>entire</a:t>
+          </a:r>
+          <a:r>
+            <a:rPr lang="pt-PT" sz="2400" kern="1200" dirty="0"/>
+            <a:t> </a:t>
+          </a:r>
+          <a:r>
+            <a:rPr lang="pt-PT" sz="2400" kern="1200" dirty="0" err="1"/>
+            <a:t>system</a:t>
+          </a:r>
+          <a:r>
+            <a:rPr lang="pt-PT" sz="2400" kern="1200" dirty="0"/>
+            <a:t> set </a:t>
+          </a:r>
+          <a:r>
+            <a:rPr lang="pt-PT" sz="2400" kern="1200" dirty="0" err="1"/>
+            <a:t>up</a:t>
+          </a:r>
+          <a:r>
+            <a:rPr lang="pt-PT" sz="2400" kern="1200" dirty="0"/>
+            <a:t> </a:t>
+          </a:r>
+          <a:r>
+            <a:rPr lang="pt-PT" sz="2400" kern="1200" dirty="0" err="1"/>
+            <a:t>and</a:t>
+          </a:r>
+          <a:r>
+            <a:rPr lang="pt-PT" sz="2400" kern="1200" dirty="0"/>
+            <a:t> </a:t>
+          </a:r>
+          <a:r>
+            <a:rPr lang="pt-PT" sz="2400" kern="1200" dirty="0" err="1"/>
+            <a:t>were</a:t>
+          </a:r>
+          <a:r>
+            <a:rPr lang="pt-PT" sz="2400" kern="1200" dirty="0"/>
+            <a:t> </a:t>
+          </a:r>
+          <a:r>
+            <a:rPr lang="pt-PT" sz="2400" kern="1200" dirty="0" err="1"/>
+            <a:t>ready</a:t>
+          </a:r>
+          <a:r>
+            <a:rPr lang="pt-PT" sz="2400" kern="1200" dirty="0"/>
+            <a:t> to </a:t>
+          </a:r>
+          <a:r>
+            <a:rPr lang="pt-PT" sz="2400" kern="1200" dirty="0" err="1"/>
+            <a:t>start</a:t>
+          </a:r>
+          <a:r>
+            <a:rPr lang="pt-PT" sz="2400" kern="1200" dirty="0"/>
+            <a:t> </a:t>
+          </a:r>
+          <a:r>
+            <a:rPr lang="pt-PT" sz="2400" kern="1200" dirty="0" err="1"/>
+            <a:t>making</a:t>
+          </a:r>
+          <a:r>
+            <a:rPr lang="pt-PT" sz="2400" kern="1200" dirty="0"/>
+            <a:t> </a:t>
+          </a:r>
+          <a:r>
+            <a:rPr lang="pt-PT" sz="2400" kern="1200" dirty="0" err="1"/>
+            <a:t>changes</a:t>
+          </a:r>
+          <a:r>
+            <a:rPr lang="pt-PT" sz="2400" kern="1200" dirty="0"/>
+            <a:t> for </a:t>
+          </a:r>
+          <a:r>
+            <a:rPr lang="pt-PT" sz="2400" kern="1200" dirty="0" err="1"/>
+            <a:t>the</a:t>
+          </a:r>
+          <a:r>
+            <a:rPr lang="pt-PT" sz="2400" kern="1200" dirty="0"/>
+            <a:t> </a:t>
+          </a:r>
+          <a:r>
+            <a:rPr lang="pt-PT" sz="2400" kern="1200" dirty="0" err="1"/>
+            <a:t>client</a:t>
+          </a:r>
+          <a:r>
+            <a:rPr lang="pt-PT" sz="2400" kern="1200" dirty="0"/>
+            <a:t>, I </a:t>
+          </a:r>
+          <a:r>
+            <a:rPr lang="pt-PT" sz="2400" kern="1200" dirty="0" err="1"/>
+            <a:t>began</a:t>
+          </a:r>
+          <a:r>
+            <a:rPr lang="pt-PT" sz="2400" kern="1200" dirty="0"/>
+            <a:t> </a:t>
+          </a:r>
+          <a:r>
+            <a:rPr lang="pt-PT" sz="2400" kern="1200" dirty="0" err="1"/>
+            <a:t>developing</a:t>
+          </a:r>
+          <a:r>
+            <a:rPr lang="pt-PT" sz="2400" kern="1200" dirty="0"/>
+            <a:t> </a:t>
+          </a:r>
+          <a:r>
+            <a:rPr lang="pt-PT" sz="2400" kern="1200" dirty="0" err="1"/>
+            <a:t>my</a:t>
+          </a:r>
+          <a:r>
+            <a:rPr lang="pt-PT" sz="2400" kern="1200" dirty="0"/>
+            <a:t> </a:t>
           </a:r>
           <a:r>
             <a:rPr lang="pt-PT" sz="2400" kern="1200" dirty="0" err="1"/>
@@ -2588,23 +3219,119 @@
           </a:r>
           <a:r>
             <a:rPr lang="pt-PT" sz="2400" kern="1200" dirty="0"/>
-            <a:t> e </a:t>
+            <a:t> </a:t>
           </a:r>
           <a:r>
             <a:rPr lang="pt-PT" sz="2400" kern="1200" dirty="0" err="1"/>
-            <a:t>usefull</a:t>
+            <a:t>and</a:t>
           </a:r>
           <a:r>
             <a:rPr lang="pt-PT" sz="2400" kern="1200" dirty="0"/>
-            <a:t> classes analisando o </a:t>
+            <a:t> </a:t>
           </a:r>
           <a:r>
             <a:rPr lang="pt-PT" sz="2400" kern="1200" dirty="0" err="1"/>
-            <a:t>figma</a:t>
+            <a:t>utility</a:t>
           </a:r>
           <a:r>
             <a:rPr lang="pt-PT" sz="2400" kern="1200" dirty="0"/>
-            <a:t>, só adicionando e trocando o estritamente necessário (</a:t>
+            <a:t> classes </a:t>
+          </a:r>
+          <a:r>
+            <a:rPr lang="pt-PT" sz="2400" kern="1200" dirty="0" err="1"/>
+            <a:t>by</a:t>
+          </a:r>
+          <a:r>
+            <a:rPr lang="pt-PT" sz="2400" kern="1200" dirty="0"/>
+            <a:t> </a:t>
+          </a:r>
+          <a:r>
+            <a:rPr lang="pt-PT" sz="2400" kern="1200" dirty="0" err="1"/>
+            <a:t>analyzing</a:t>
+          </a:r>
+          <a:r>
+            <a:rPr lang="pt-PT" sz="2400" kern="1200" dirty="0"/>
+            <a:t> </a:t>
+          </a:r>
+          <a:r>
+            <a:rPr lang="pt-PT" sz="2400" kern="1200" dirty="0" err="1"/>
+            <a:t>the</a:t>
+          </a:r>
+          <a:r>
+            <a:rPr lang="pt-PT" sz="2400" kern="1200" dirty="0"/>
+            <a:t> </a:t>
+          </a:r>
+          <a:r>
+            <a:rPr lang="pt-PT" sz="2400" kern="1200" dirty="0" err="1"/>
+            <a:t>Figma</a:t>
+          </a:r>
+          <a:r>
+            <a:rPr lang="pt-PT" sz="2400" kern="1200" dirty="0"/>
+            <a:t> files, </a:t>
+          </a:r>
+          <a:r>
+            <a:rPr lang="pt-PT" sz="2400" kern="1200" dirty="0" err="1"/>
+            <a:t>adding</a:t>
+          </a:r>
+          <a:r>
+            <a:rPr lang="pt-PT" sz="2400" kern="1200" dirty="0"/>
+            <a:t> </a:t>
+          </a:r>
+          <a:r>
+            <a:rPr lang="pt-PT" sz="2400" kern="1200" dirty="0" err="1"/>
+            <a:t>and</a:t>
+          </a:r>
+          <a:r>
+            <a:rPr lang="pt-PT" sz="2400" kern="1200" dirty="0"/>
+            <a:t> </a:t>
+          </a:r>
+          <a:r>
+            <a:rPr lang="pt-PT" sz="2400" kern="1200" dirty="0" err="1"/>
+            <a:t>modifying</a:t>
+          </a:r>
+          <a:r>
+            <a:rPr lang="pt-PT" sz="2400" kern="1200" dirty="0"/>
+            <a:t> </a:t>
+          </a:r>
+          <a:r>
+            <a:rPr lang="pt-PT" sz="2400" kern="1200" dirty="0" err="1"/>
+            <a:t>only</a:t>
+          </a:r>
+          <a:r>
+            <a:rPr lang="pt-PT" sz="2400" kern="1200" dirty="0"/>
+            <a:t> </a:t>
+          </a:r>
+          <a:r>
+            <a:rPr lang="pt-PT" sz="2400" kern="1200" dirty="0" err="1"/>
+            <a:t>what</a:t>
+          </a:r>
+          <a:r>
+            <a:rPr lang="pt-PT" sz="2400" kern="1200" dirty="0"/>
+            <a:t> </a:t>
+          </a:r>
+          <a:r>
+            <a:rPr lang="pt-PT" sz="2400" kern="1200" dirty="0" err="1"/>
+            <a:t>was</a:t>
+          </a:r>
+          <a:r>
+            <a:rPr lang="pt-PT" sz="2400" kern="1200" dirty="0"/>
+            <a:t> </a:t>
+          </a:r>
+          <a:r>
+            <a:rPr lang="pt-PT" sz="2400" kern="1200" dirty="0" err="1"/>
+            <a:t>strictly</a:t>
+          </a:r>
+          <a:r>
+            <a:rPr lang="pt-PT" sz="2400" kern="1200" dirty="0"/>
+            <a:t> </a:t>
+          </a:r>
+          <a:r>
+            <a:rPr lang="pt-PT" sz="2400" kern="1200" dirty="0" err="1"/>
+            <a:t>necessary</a:t>
+          </a:r>
+          <a:r>
+            <a:rPr lang="pt-PT" sz="2400" kern="1200" dirty="0"/>
+            <a:t> (</a:t>
           </a:r>
           <a:r>
             <a:rPr lang="pt-PT" sz="2400" kern="1200" dirty="0" err="1"/>
@@ -2738,10 +3465,150 @@
             <a:buNone/>
           </a:pPr>
           <a:r>
-            <a:rPr lang="pt-PT" sz="2400" kern="1200"/>
-            <a:t>Uma vez efetuado, passamos para alterar os widgets de outsysteams, estilizando-os como está no figma (Customize all Built-in Widgets).</a:t>
-          </a:r>
-          <a:endParaRPr lang="en-US" sz="2400" kern="1200"/>
+            <a:rPr lang="pt-PT" sz="2400" kern="1200" dirty="0" err="1"/>
+            <a:t>Once</a:t>
+          </a:r>
+          <a:r>
+            <a:rPr lang="pt-PT" sz="2400" kern="1200" dirty="0"/>
+            <a:t> </a:t>
+          </a:r>
+          <a:r>
+            <a:rPr lang="pt-PT" sz="2400" kern="1200" dirty="0" err="1"/>
+            <a:t>that’s</a:t>
+          </a:r>
+          <a:r>
+            <a:rPr lang="pt-PT" sz="2400" kern="1200" dirty="0"/>
+            <a:t> </a:t>
+          </a:r>
+          <a:r>
+            <a:rPr lang="pt-PT" sz="2400" kern="1200" dirty="0" err="1"/>
+            <a:t>done</a:t>
+          </a:r>
+          <a:r>
+            <a:rPr lang="pt-PT" sz="2400" kern="1200" dirty="0"/>
+            <a:t>, </a:t>
+          </a:r>
+          <a:r>
+            <a:rPr lang="pt-PT" sz="2400" kern="1200" dirty="0" err="1"/>
+            <a:t>we’ll</a:t>
+          </a:r>
+          <a:r>
+            <a:rPr lang="pt-PT" sz="2400" kern="1200" dirty="0"/>
+            <a:t> move </a:t>
+          </a:r>
+          <a:r>
+            <a:rPr lang="pt-PT" sz="2400" kern="1200" dirty="0" err="1"/>
+            <a:t>on</a:t>
+          </a:r>
+          <a:r>
+            <a:rPr lang="pt-PT" sz="2400" kern="1200" dirty="0"/>
+            <a:t> to </a:t>
+          </a:r>
+          <a:r>
+            <a:rPr lang="pt-PT" sz="2400" kern="1200" dirty="0" err="1"/>
+            <a:t>customizing</a:t>
+          </a:r>
+          <a:r>
+            <a:rPr lang="pt-PT" sz="2400" kern="1200" dirty="0"/>
+            <a:t> </a:t>
+          </a:r>
+          <a:r>
+            <a:rPr lang="pt-PT" sz="2400" kern="1200" dirty="0" err="1"/>
+            <a:t>the</a:t>
+          </a:r>
+          <a:r>
+            <a:rPr lang="pt-PT" sz="2400" kern="1200" dirty="0"/>
+            <a:t> </a:t>
+          </a:r>
+          <a:r>
+            <a:rPr lang="pt-PT" sz="2400" kern="1200" dirty="0" err="1"/>
+            <a:t>OutSystems</a:t>
+          </a:r>
+          <a:r>
+            <a:rPr lang="pt-PT" sz="2400" kern="1200" dirty="0"/>
+            <a:t> </a:t>
+          </a:r>
+          <a:r>
+            <a:rPr lang="pt-PT" sz="2400" kern="1200" dirty="0" err="1"/>
+            <a:t>widgets</a:t>
+          </a:r>
+          <a:r>
+            <a:rPr lang="pt-PT" sz="2400" kern="1200" dirty="0"/>
+            <a:t>, </a:t>
+          </a:r>
+          <a:r>
+            <a:rPr lang="pt-PT" sz="2400" kern="1200" dirty="0" err="1"/>
+            <a:t>styling</a:t>
+          </a:r>
+          <a:r>
+            <a:rPr lang="pt-PT" sz="2400" kern="1200" dirty="0"/>
+            <a:t> </a:t>
+          </a:r>
+          <a:r>
+            <a:rPr lang="pt-PT" sz="2400" kern="1200" dirty="0" err="1"/>
+            <a:t>them</a:t>
+          </a:r>
+          <a:r>
+            <a:rPr lang="pt-PT" sz="2400" kern="1200" dirty="0"/>
+            <a:t> as </a:t>
+          </a:r>
+          <a:r>
+            <a:rPr lang="pt-PT" sz="2400" kern="1200" dirty="0" err="1"/>
+            <a:t>shown</a:t>
+          </a:r>
+          <a:r>
+            <a:rPr lang="pt-PT" sz="2400" kern="1200" dirty="0"/>
+            <a:t> in </a:t>
+          </a:r>
+          <a:r>
+            <a:rPr lang="pt-PT" sz="2400" kern="1200" dirty="0" err="1"/>
+            <a:t>the</a:t>
+          </a:r>
+          <a:r>
+            <a:rPr lang="pt-PT" sz="2400" kern="1200" dirty="0"/>
+            <a:t> </a:t>
+          </a:r>
+          <a:r>
+            <a:rPr lang="pt-PT" sz="2400" kern="1200" dirty="0" err="1"/>
+            <a:t>style</a:t>
+          </a:r>
+          <a:r>
+            <a:rPr lang="pt-PT" sz="2400" kern="1200" dirty="0"/>
+            <a:t> </a:t>
+          </a:r>
+          <a:r>
+            <a:rPr lang="pt-PT" sz="2400" kern="1200" dirty="0" err="1"/>
+            <a:t>guide</a:t>
+          </a:r>
+          <a:r>
+            <a:rPr lang="pt-PT" sz="2400" kern="1200" dirty="0"/>
+            <a:t> (Customize </a:t>
+          </a:r>
+          <a:r>
+            <a:rPr lang="pt-PT" sz="2400" kern="1200" dirty="0" err="1"/>
+            <a:t>all</a:t>
+          </a:r>
+          <a:r>
+            <a:rPr lang="pt-PT" sz="2400" kern="1200" dirty="0"/>
+            <a:t> </a:t>
+          </a:r>
+          <a:r>
+            <a:rPr lang="pt-PT" sz="2400" kern="1200" dirty="0" err="1"/>
+            <a:t>Built</a:t>
+          </a:r>
+          <a:r>
+            <a:rPr lang="pt-PT" sz="2400" kern="1200" dirty="0"/>
+            <a:t>-in </a:t>
+          </a:r>
+          <a:r>
+            <a:rPr lang="pt-PT" sz="2400" kern="1200" dirty="0" err="1"/>
+            <a:t>Widgets</a:t>
+          </a:r>
+          <a:r>
+            <a:rPr lang="pt-PT" sz="2400" kern="1200" dirty="0"/>
+            <a:t>)</a:t>
+          </a:r>
+          <a:endParaRPr lang="en-US" sz="2400" kern="1200" dirty="0"/>
         </a:p>
       </dsp:txBody>
       <dsp:txXfrm>
@@ -2930,9 +3797,10 @@
             <a:buNone/>
           </a:pPr>
           <a:r>
-            <a:rPr lang="en-US" sz="4000" kern="1200" dirty="0"/>
+            <a:rPr lang="en-US" sz="4000" kern="1200"/>
             <a:t>1</a:t>
           </a:r>
+          <a:endParaRPr lang="en-US" sz="4000" kern="1200" dirty="0"/>
         </a:p>
       </dsp:txBody>
       <dsp:txXfrm>
@@ -3015,10 +3883,86 @@
             <a:buNone/>
           </a:pPr>
           <a:r>
-            <a:rPr lang="pt-PT" sz="1100" kern="1200"/>
-            <a:t>Para duvidas falei com o meu TeamLider André Henriques e com o meu mentor Diogo Miranda;</a:t>
-          </a:r>
-          <a:endParaRPr lang="en-US" sz="1100" kern="1200"/>
+            <a:rPr lang="pt-PT" sz="1100" kern="1200" dirty="0" err="1"/>
+            <a:t>If</a:t>
+          </a:r>
+          <a:r>
+            <a:rPr lang="pt-PT" sz="1100" kern="1200" dirty="0"/>
+            <a:t> i </a:t>
+          </a:r>
+          <a:r>
+            <a:rPr lang="pt-PT" sz="1100" kern="1200" dirty="0" err="1"/>
+            <a:t>have</a:t>
+          </a:r>
+          <a:r>
+            <a:rPr lang="pt-PT" sz="1100" kern="1200" dirty="0"/>
+            <a:t> </a:t>
+          </a:r>
+          <a:r>
+            <a:rPr lang="pt-PT" sz="1100" kern="1200" dirty="0" err="1"/>
+            <a:t>any</a:t>
+          </a:r>
+          <a:r>
+            <a:rPr lang="pt-PT" sz="1100" kern="1200" dirty="0"/>
+            <a:t> </a:t>
+          </a:r>
+          <a:r>
+            <a:rPr lang="pt-PT" sz="1100" kern="1200" dirty="0" err="1"/>
+            <a:t>questions</a:t>
+          </a:r>
+          <a:r>
+            <a:rPr lang="pt-PT" sz="1100" kern="1200" dirty="0"/>
+            <a:t>, I </a:t>
+          </a:r>
+          <a:r>
+            <a:rPr lang="pt-PT" sz="1100" kern="1200" dirty="0" err="1"/>
+            <a:t>spoke</a:t>
+          </a:r>
+          <a:r>
+            <a:rPr lang="pt-PT" sz="1100" kern="1200" dirty="0"/>
+            <a:t> </a:t>
+          </a:r>
+          <a:r>
+            <a:rPr lang="pt-PT" sz="1100" kern="1200" dirty="0" err="1"/>
+            <a:t>with</a:t>
+          </a:r>
+          <a:r>
+            <a:rPr lang="pt-PT" sz="1100" kern="1200" dirty="0"/>
+            <a:t> </a:t>
+          </a:r>
+          <a:r>
+            <a:rPr lang="pt-PT" sz="1100" kern="1200" dirty="0" err="1"/>
+            <a:t>my</a:t>
+          </a:r>
+          <a:r>
+            <a:rPr lang="pt-PT" sz="1100" kern="1200" dirty="0"/>
+            <a:t> team leader, André Henriques, </a:t>
+          </a:r>
+          <a:r>
+            <a:rPr lang="pt-PT" sz="1100" kern="1200" dirty="0" err="1"/>
+            <a:t>and</a:t>
+          </a:r>
+          <a:r>
+            <a:rPr lang="pt-PT" sz="1100" kern="1200" dirty="0"/>
+            <a:t> </a:t>
+          </a:r>
+          <a:r>
+            <a:rPr lang="pt-PT" sz="1100" kern="1200" dirty="0" err="1"/>
+            <a:t>with</a:t>
+          </a:r>
+          <a:r>
+            <a:rPr lang="pt-PT" sz="1100" kern="1200" dirty="0"/>
+            <a:t> Diogo Miranda, </a:t>
+          </a:r>
+          <a:r>
+            <a:rPr lang="pt-PT" sz="1100" kern="1200" dirty="0" err="1"/>
+            <a:t>the</a:t>
+          </a:r>
+          <a:r>
+            <a:rPr lang="pt-PT" sz="1100" kern="1200" dirty="0"/>
+            <a:t> mentor.</a:t>
+          </a:r>
+          <a:endParaRPr lang="en-US" sz="1100" kern="1200" dirty="0"/>
         </a:p>
       </dsp:txBody>
       <dsp:txXfrm>
@@ -3280,10 +4224,30 @@
             <a:buNone/>
           </a:pPr>
           <a:r>
-            <a:rPr lang="pt-PT" sz="1100" kern="1200"/>
-            <a:t>https://doitlean-dev.outsystemscloud.com/RocketUI/</a:t>
-          </a:r>
-          <a:endParaRPr lang="en-US" sz="1100" kern="1200"/>
+            <a:rPr lang="pt-PT" sz="1100" kern="1200" dirty="0" err="1"/>
+            <a:t>https</a:t>
+          </a:r>
+          <a:r>
+            <a:rPr lang="pt-PT" sz="1100" kern="1200" dirty="0"/>
+            <a:t>://</a:t>
+          </a:r>
+          <a:r>
+            <a:rPr lang="pt-PT" sz="1100" kern="1200" dirty="0" err="1"/>
+            <a:t>doitlean-dev.outsystemscloud.com</a:t>
+          </a:r>
+          <a:r>
+            <a:rPr lang="pt-PT" sz="1100" kern="1200" dirty="0"/>
+            <a:t>/</a:t>
+          </a:r>
+          <a:r>
+            <a:rPr lang="pt-PT" sz="1100" kern="1200" dirty="0" err="1"/>
+            <a:t>RocketUI</a:t>
+          </a:r>
+          <a:r>
+            <a:rPr lang="pt-PT" sz="1100" kern="1200" dirty="0"/>
+            <a:t>/</a:t>
+          </a:r>
+          <a:endParaRPr lang="en-US" sz="1100" kern="1200" dirty="0"/>
         </a:p>
       </dsp:txBody>
       <dsp:txXfrm>
@@ -7273,7 +8237,7 @@
           <a:p>
             <a:fld id="{D1D1EADE-8E88-4C7C-8AC5-FB148DE4940E}" type="datetime1">
               <a:rPr lang="en-US" smtClean="0"/>
-              <a:t>3/27/26</a:t>
+              <a:t>3/30/26</a:t>
             </a:fld>
             <a:endParaRPr lang="en-US"/>
           </a:p>
@@ -7473,7 +8437,7 @@
           <a:p>
             <a:fld id="{EC3C8B9C-477D-492A-96AD-1FC2CC997A73}" type="datetime1">
               <a:rPr lang="en-US" smtClean="0"/>
-              <a:t>3/27/26</a:t>
+              <a:t>3/30/26</a:t>
             </a:fld>
             <a:endParaRPr lang="en-US"/>
           </a:p>
@@ -7683,7 +8647,7 @@
           <a:p>
             <a:fld id="{42D3AED5-E26D-4E29-B1B3-7847B6779594}" type="datetime1">
               <a:rPr lang="en-US" smtClean="0"/>
-              <a:t>3/27/26</a:t>
+              <a:t>3/30/26</a:t>
             </a:fld>
             <a:endParaRPr lang="en-US"/>
           </a:p>
@@ -7883,7 +8847,7 @@
           <a:p>
             <a:fld id="{157B6794-849E-4626-908B-D15793550EFB}" type="datetime1">
               <a:rPr lang="en-US" smtClean="0"/>
-              <a:t>3/27/26</a:t>
+              <a:t>3/30/26</a:t>
             </a:fld>
             <a:endParaRPr lang="en-US"/>
           </a:p>
@@ -8159,7 +9123,7 @@
           <a:p>
             <a:fld id="{63DB64E7-5594-42A3-ADBF-E95A7ACEAD64}" type="datetime1">
               <a:rPr lang="en-US" smtClean="0"/>
-              <a:t>3/27/26</a:t>
+              <a:t>3/30/26</a:t>
             </a:fld>
             <a:endParaRPr lang="en-US"/>
           </a:p>
@@ -8432,7 +9396,7 @@
           <a:p>
             <a:fld id="{18462B0B-D248-4FFB-8695-AD7FA4B1284A}" type="datetime1">
               <a:rPr lang="en-US" smtClean="0"/>
-              <a:t>3/27/26</a:t>
+              <a:t>3/30/26</a:t>
             </a:fld>
             <a:endParaRPr lang="en-US"/>
           </a:p>
@@ -8855,7 +9819,7 @@
           <a:p>
             <a:fld id="{D0378EFB-9159-4510-B73F-4F0409ADE937}" type="datetime1">
               <a:rPr lang="en-US" smtClean="0"/>
-              <a:t>3/27/26</a:t>
+              <a:t>3/30/26</a:t>
             </a:fld>
             <a:endParaRPr lang="en-US"/>
           </a:p>
@@ -8997,7 +9961,7 @@
           <a:p>
             <a:fld id="{89BC9412-2452-4BED-A324-9D8C115361AD}" type="datetime1">
               <a:rPr lang="en-US" smtClean="0"/>
-              <a:t>3/27/26</a:t>
+              <a:t>3/30/26</a:t>
             </a:fld>
             <a:endParaRPr lang="en-US"/>
           </a:p>
@@ -9110,7 +10074,7 @@
           <a:p>
             <a:fld id="{F5318F62-D251-40E8-A23C-F4CFE9FEAB41}" type="datetime1">
               <a:rPr lang="en-US" smtClean="0"/>
-              <a:t>3/27/26</a:t>
+              <a:t>3/30/26</a:t>
             </a:fld>
             <a:endParaRPr lang="en-US"/>
           </a:p>
@@ -9423,7 +10387,7 @@
           <a:p>
             <a:fld id="{44F76144-149E-4874-93A5-554A0357CF82}" type="datetime1">
               <a:rPr lang="en-US" smtClean="0"/>
-              <a:t>3/27/26</a:t>
+              <a:t>3/30/26</a:t>
             </a:fld>
             <a:endParaRPr lang="en-US"/>
           </a:p>
@@ -9716,7 +10680,7 @@
           <a:p>
             <a:fld id="{50BA65D8-0540-4835-AE5C-25D29DBA01BE}" type="datetime1">
               <a:rPr lang="en-US" smtClean="0"/>
-              <a:t>3/27/26</a:t>
+              <a:t>3/30/26</a:t>
             </a:fld>
             <a:endParaRPr lang="en-US"/>
           </a:p>
@@ -9958,7 +10922,7 @@
           <a:p>
             <a:fld id="{E31BA835-12AC-4E8F-955A-EA3F4DE2791F}" type="datetime1">
               <a:rPr lang="en-US" smtClean="0"/>
-              <a:t>3/27/26</a:t>
+              <a:t>3/30/26</a:t>
             </a:fld>
             <a:endParaRPr lang="en-US"/>
           </a:p>
@@ -10881,6 +11845,2572 @@
           <a:chExt cx="0" cy="0"/>
         </a:xfrm>
       </p:grpSpPr>
+      <p:cxnSp>
+        <p:nvCxnSpPr>
+          <p:cNvPr id="21" name="Straight Connector 20">
+            <a:extLst>
+              <a:ext uri="{FF2B5EF4-FFF2-40B4-BE49-F238E27FC236}">
+                <a16:creationId xmlns:a16="http://schemas.microsoft.com/office/drawing/2014/main" id="{F64F9B95-9045-48D2-B9F3-2927E98F54AA}"/>
+              </a:ext>
+              <a:ext uri="{C183D7F6-B498-43B3-948B-1728B52AA6E4}">
+                <adec:decorative xmlns:adec="http://schemas.microsoft.com/office/drawing/2017/decorative" val="1"/>
+              </a:ext>
+            </a:extLst>
+          </p:cNvPr>
+          <p:cNvCxnSpPr>
+            <a:cxnSpLocks noGrp="1" noRot="1" noChangeAspect="1" noMove="1" noResize="1" noEditPoints="1" noAdjustHandles="1" noChangeArrowheads="1" noChangeShapeType="1"/>
+          </p:cNvCxnSpPr>
+          <p:nvPr>
+            <p:extLst>
+              <p:ext uri="{386F3935-93C4-4BCD-93E2-E3B085C9AB24}">
+                <p16:designElem xmlns:p16="http://schemas.microsoft.com/office/powerpoint/2015/main" val="1"/>
+              </p:ext>
+            </p:extLst>
+          </p:nvPr>
+        </p:nvCxnSpPr>
+        <p:spPr>
+          <a:xfrm>
+            <a:off x="800100" y="723900"/>
+            <a:ext cx="10591800" cy="0"/>
+          </a:xfrm>
+          <a:prstGeom prst="line">
+            <a:avLst/>
+          </a:prstGeom>
+          <a:ln w="44450">
+            <a:solidFill>
+              <a:schemeClr val="tx1"/>
+            </a:solidFill>
+          </a:ln>
+        </p:spPr>
+        <p:style>
+          <a:lnRef idx="1">
+            <a:schemeClr val="accent1"/>
+          </a:lnRef>
+          <a:fillRef idx="0">
+            <a:schemeClr val="accent1"/>
+          </a:fillRef>
+          <a:effectRef idx="0">
+            <a:schemeClr val="accent1"/>
+          </a:effectRef>
+          <a:fontRef idx="minor">
+            <a:schemeClr val="tx1"/>
+          </a:fontRef>
+        </p:style>
+      </p:cxnSp>
+      <p:cxnSp>
+        <p:nvCxnSpPr>
+          <p:cNvPr id="23" name="Straight Connector 22">
+            <a:extLst>
+              <a:ext uri="{FF2B5EF4-FFF2-40B4-BE49-F238E27FC236}">
+                <a16:creationId xmlns:a16="http://schemas.microsoft.com/office/drawing/2014/main" id="{085AA86F-6A4D-4BCB-A045-D992CDC2959B}"/>
+              </a:ext>
+              <a:ext uri="{C183D7F6-B498-43B3-948B-1728B52AA6E4}">
+                <adec:decorative xmlns:adec="http://schemas.microsoft.com/office/drawing/2017/decorative" val="1"/>
+              </a:ext>
+            </a:extLst>
+          </p:cNvPr>
+          <p:cNvCxnSpPr>
+            <a:cxnSpLocks noGrp="1" noRot="1" noChangeAspect="1" noMove="1" noResize="1" noEditPoints="1" noAdjustHandles="1" noChangeArrowheads="1" noChangeShapeType="1"/>
+          </p:cNvCxnSpPr>
+          <p:nvPr>
+            <p:extLst>
+              <p:ext uri="{386F3935-93C4-4BCD-93E2-E3B085C9AB24}">
+                <p16:designElem xmlns:p16="http://schemas.microsoft.com/office/powerpoint/2015/main" val="1"/>
+              </p:ext>
+            </p:extLst>
+          </p:nvPr>
+        </p:nvCxnSpPr>
+        <p:spPr>
+          <a:xfrm>
+            <a:off x="800100" y="6142781"/>
+            <a:ext cx="10591800" cy="0"/>
+          </a:xfrm>
+          <a:prstGeom prst="line">
+            <a:avLst/>
+          </a:prstGeom>
+          <a:ln w="12700">
+            <a:solidFill>
+              <a:schemeClr val="tx1"/>
+            </a:solidFill>
+          </a:ln>
+        </p:spPr>
+        <p:style>
+          <a:lnRef idx="1">
+            <a:schemeClr val="accent1"/>
+          </a:lnRef>
+          <a:fillRef idx="0">
+            <a:schemeClr val="accent1"/>
+          </a:fillRef>
+          <a:effectRef idx="0">
+            <a:schemeClr val="accent1"/>
+          </a:effectRef>
+          <a:fontRef idx="minor">
+            <a:schemeClr val="tx1"/>
+          </a:fontRef>
+        </p:style>
+      </p:cxnSp>
+      <p:sp useBgFill="1">
+        <p:nvSpPr>
+          <p:cNvPr id="25" name="Rectangle 24">
+            <a:extLst>
+              <a:ext uri="{FF2B5EF4-FFF2-40B4-BE49-F238E27FC236}">
+                <a16:creationId xmlns:a16="http://schemas.microsoft.com/office/drawing/2014/main" id="{33E93247-6229-44AB-A550-739E971E690B}"/>
+              </a:ext>
+              <a:ext uri="{C183D7F6-B498-43B3-948B-1728B52AA6E4}">
+                <adec:decorative xmlns:adec="http://schemas.microsoft.com/office/drawing/2017/decorative" val="1"/>
+              </a:ext>
+            </a:extLst>
+          </p:cNvPr>
+          <p:cNvSpPr>
+            <a:spLocks noGrp="1" noRot="1" noChangeAspect="1" noMove="1" noResize="1" noEditPoints="1" noAdjustHandles="1" noChangeArrowheads="1" noChangeShapeType="1" noTextEdit="1"/>
+          </p:cNvSpPr>
+          <p:nvPr>
+            <p:extLst>
+              <p:ext uri="{386F3935-93C4-4BCD-93E2-E3B085C9AB24}">
+                <p16:designElem xmlns:p16="http://schemas.microsoft.com/office/powerpoint/2015/main" val="1"/>
+              </p:ext>
+            </p:extLst>
+          </p:nvPr>
+        </p:nvSpPr>
+        <p:spPr>
+          <a:xfrm>
+            <a:off x="0" y="0"/>
+            <a:ext cx="12192000" cy="6858000"/>
+          </a:xfrm>
+          <a:prstGeom prst="rect">
+            <a:avLst/>
+          </a:prstGeom>
+          <a:ln w="12700" cap="flat" cmpd="sng" algn="ctr">
+            <a:noFill/>
+            <a:prstDash val="solid"/>
+            <a:miter lim="800000"/>
+          </a:ln>
+          <a:effectLst/>
+          <a:extLst>
+            <a:ext uri="{91240B29-F687-4F45-9708-019B960494DF}">
+              <a14:hiddenLine xmlns:a14="http://schemas.microsoft.com/office/drawing/2010/main" w="12700" cap="flat" cmpd="sng" algn="ctr">
+                <a:solidFill>
+                  <a:schemeClr val="accent1">
+                    <a:shade val="50000"/>
+                  </a:schemeClr>
+                </a:solidFill>
+                <a:prstDash val="solid"/>
+                <a:miter lim="800000"/>
+              </a14:hiddenLine>
+            </a:ext>
+          </a:extLst>
+        </p:spPr>
+        <p:style>
+          <a:lnRef idx="2">
+            <a:schemeClr val="accent1">
+              <a:shade val="50000"/>
+            </a:schemeClr>
+          </a:lnRef>
+          <a:fillRef idx="1">
+            <a:schemeClr val="accent1"/>
+          </a:fillRef>
+          <a:effectRef idx="0">
+            <a:schemeClr val="accent1"/>
+          </a:effectRef>
+          <a:fontRef idx="minor">
+            <a:schemeClr val="lt1"/>
+          </a:fontRef>
+        </p:style>
+        <p:txBody>
+          <a:bodyPr rtlCol="0" anchor="ctr"/>
+          <a:lstStyle/>
+          <a:p>
+            <a:pPr algn="ctr"/>
+            <a:endParaRPr lang="en-US"/>
+          </a:p>
+        </p:txBody>
+      </p:sp>
+      <p:sp>
+        <p:nvSpPr>
+          <p:cNvPr id="2" name="Título 1">
+            <a:extLst>
+              <a:ext uri="{FF2B5EF4-FFF2-40B4-BE49-F238E27FC236}">
+                <a16:creationId xmlns:a16="http://schemas.microsoft.com/office/drawing/2014/main" id="{D31B7A62-C2CA-3397-DAF2-6CCA1A466B69}"/>
+              </a:ext>
+            </a:extLst>
+          </p:cNvPr>
+          <p:cNvSpPr>
+            <a:spLocks noGrp="1"/>
+          </p:cNvSpPr>
+          <p:nvPr>
+            <p:ph type="title"/>
+          </p:nvPr>
+        </p:nvSpPr>
+        <p:spPr>
+          <a:xfrm>
+            <a:off x="685800" y="899024"/>
+            <a:ext cx="3076032" cy="3914947"/>
+          </a:xfrm>
+        </p:spPr>
+        <p:txBody>
+          <a:bodyPr vert="horz" lIns="91440" tIns="45720" rIns="91440" bIns="45720" rtlCol="0" anchor="t">
+            <a:normAutofit/>
+          </a:bodyPr>
+          <a:lstStyle/>
+          <a:p>
+            <a:r>
+              <a:rPr lang="en-US"/>
+              <a:t>Assembly</a:t>
+            </a:r>
+            <a:endParaRPr lang="en-US" dirty="0"/>
+          </a:p>
+        </p:txBody>
+      </p:sp>
+      <p:sp>
+        <p:nvSpPr>
+          <p:cNvPr id="3" name="Marcador de Posição de Conteúdo 2">
+            <a:extLst>
+              <a:ext uri="{FF2B5EF4-FFF2-40B4-BE49-F238E27FC236}">
+                <a16:creationId xmlns:a16="http://schemas.microsoft.com/office/drawing/2014/main" id="{5664BEB6-DF3A-BC26-E0D2-72E68938694C}"/>
+              </a:ext>
+            </a:extLst>
+          </p:cNvPr>
+          <p:cNvSpPr>
+            <a:spLocks noGrp="1"/>
+          </p:cNvSpPr>
+          <p:nvPr>
+            <p:ph idx="1"/>
+          </p:nvPr>
+        </p:nvSpPr>
+        <p:spPr>
+          <a:xfrm>
+            <a:off x="729624" y="4914199"/>
+            <a:ext cx="2703583" cy="965440"/>
+          </a:xfrm>
+        </p:spPr>
+        <p:txBody>
+          <a:bodyPr vert="horz" lIns="91440" tIns="45720" rIns="91440" bIns="45720" rtlCol="0" anchor="b">
+            <a:normAutofit/>
+          </a:bodyPr>
+          <a:lstStyle/>
+          <a:p>
+            <a:pPr marL="0" indent="0">
+              <a:buNone/>
+            </a:pPr>
+            <a:r>
+              <a:rPr lang="en-US" sz="1800"/>
+              <a:t>Employess</a:t>
+            </a:r>
+            <a:r>
+              <a:rPr lang="en-US" sz="1800" dirty="0"/>
+              <a:t> Gallery:</a:t>
+            </a:r>
+          </a:p>
+        </p:txBody>
+      </p:sp>
+      <p:cxnSp>
+        <p:nvCxnSpPr>
+          <p:cNvPr id="27" name="Straight Connector 26">
+            <a:extLst>
+              <a:ext uri="{FF2B5EF4-FFF2-40B4-BE49-F238E27FC236}">
+                <a16:creationId xmlns:a16="http://schemas.microsoft.com/office/drawing/2014/main" id="{EE2E603F-4A95-4FE8-BB06-211DFD75DBEF}"/>
+              </a:ext>
+              <a:ext uri="{C183D7F6-B498-43B3-948B-1728B52AA6E4}">
+                <adec:decorative xmlns:adec="http://schemas.microsoft.com/office/drawing/2017/decorative" val="1"/>
+              </a:ext>
+            </a:extLst>
+          </p:cNvPr>
+          <p:cNvCxnSpPr>
+            <a:cxnSpLocks noGrp="1" noRot="1" noChangeAspect="1" noMove="1" noResize="1" noEditPoints="1" noAdjustHandles="1" noChangeArrowheads="1" noChangeShapeType="1"/>
+          </p:cNvCxnSpPr>
+          <p:nvPr>
+            <p:extLst>
+              <p:ext uri="{386F3935-93C4-4BCD-93E2-E3B085C9AB24}">
+                <p16:designElem xmlns:p16="http://schemas.microsoft.com/office/powerpoint/2015/main" val="1"/>
+              </p:ext>
+            </p:extLst>
+          </p:nvPr>
+        </p:nvCxnSpPr>
+        <p:spPr>
+          <a:xfrm>
+            <a:off x="800100" y="723900"/>
+            <a:ext cx="1371600" cy="0"/>
+          </a:xfrm>
+          <a:prstGeom prst="line">
+            <a:avLst/>
+          </a:prstGeom>
+          <a:ln w="44450">
+            <a:solidFill>
+              <a:schemeClr val="tx1"/>
+            </a:solidFill>
+          </a:ln>
+        </p:spPr>
+        <p:style>
+          <a:lnRef idx="1">
+            <a:schemeClr val="accent1"/>
+          </a:lnRef>
+          <a:fillRef idx="0">
+            <a:schemeClr val="accent1"/>
+          </a:fillRef>
+          <a:effectRef idx="0">
+            <a:schemeClr val="accent1"/>
+          </a:effectRef>
+          <a:fontRef idx="minor">
+            <a:schemeClr val="tx1"/>
+          </a:fontRef>
+        </p:style>
+      </p:cxnSp>
+      <p:pic>
+        <p:nvPicPr>
+          <p:cNvPr id="6" name="Imagem 5">
+            <a:extLst>
+              <a:ext uri="{FF2B5EF4-FFF2-40B4-BE49-F238E27FC236}">
+                <a16:creationId xmlns:a16="http://schemas.microsoft.com/office/drawing/2014/main" id="{B83EE66D-B408-D182-F82F-5F2250E84F43}"/>
+              </a:ext>
+            </a:extLst>
+          </p:cNvPr>
+          <p:cNvPicPr>
+            <a:picLocks noChangeAspect="1"/>
+          </p:cNvPicPr>
+          <p:nvPr/>
+        </p:nvPicPr>
+        <p:blipFill>
+          <a:blip r:embed="rId2"/>
+          <a:stretch>
+            <a:fillRect/>
+          </a:stretch>
+        </p:blipFill>
+        <p:spPr>
+          <a:xfrm>
+            <a:off x="4038600" y="809389"/>
+            <a:ext cx="7353299" cy="5239224"/>
+          </a:xfrm>
+          <a:prstGeom prst="rect">
+            <a:avLst/>
+          </a:prstGeom>
+        </p:spPr>
+      </p:pic>
+    </p:spTree>
+    <p:extLst>
+      <p:ext uri="{BB962C8B-B14F-4D97-AF65-F5344CB8AC3E}">
+        <p14:creationId xmlns:p14="http://schemas.microsoft.com/office/powerpoint/2010/main" val="2359401408"/>
+      </p:ext>
+    </p:extLst>
+  </p:cSld>
+  <p:clrMapOvr>
+    <a:masterClrMapping/>
+  </p:clrMapOvr>
+</p:sld>
+</file>
+
+<file path=ppt/slides/slide11.xml><?xml version="1.0" encoding="utf-8"?>
+<p:sld xmlns:a="http://schemas.openxmlformats.org/drawingml/2006/main" xmlns:r="http://schemas.openxmlformats.org/officeDocument/2006/relationships" xmlns:p="http://schemas.openxmlformats.org/presentationml/2006/main">
+  <p:cSld>
+    <p:bg>
+      <p:bgPr>
+        <a:solidFill>
+          <a:schemeClr val="bg1"/>
+        </a:solidFill>
+        <a:effectLst/>
+      </p:bgPr>
+    </p:bg>
+    <p:spTree>
+      <p:nvGrpSpPr>
+        <p:cNvPr id="1" name=""/>
+        <p:cNvGrpSpPr/>
+        <p:nvPr/>
+      </p:nvGrpSpPr>
+      <p:grpSpPr>
+        <a:xfrm>
+          <a:off x="0" y="0"/>
+          <a:ext cx="0" cy="0"/>
+          <a:chOff x="0" y="0"/>
+          <a:chExt cx="0" cy="0"/>
+        </a:xfrm>
+      </p:grpSpPr>
+      <p:cxnSp>
+        <p:nvCxnSpPr>
+          <p:cNvPr id="23" name="Straight Connector 22">
+            <a:extLst>
+              <a:ext uri="{FF2B5EF4-FFF2-40B4-BE49-F238E27FC236}">
+                <a16:creationId xmlns:a16="http://schemas.microsoft.com/office/drawing/2014/main" id="{F64F9B95-9045-48D2-B9F3-2927E98F54AA}"/>
+              </a:ext>
+              <a:ext uri="{C183D7F6-B498-43B3-948B-1728B52AA6E4}">
+                <adec:decorative xmlns:adec="http://schemas.microsoft.com/office/drawing/2017/decorative" val="1"/>
+              </a:ext>
+            </a:extLst>
+          </p:cNvPr>
+          <p:cNvCxnSpPr>
+            <a:cxnSpLocks noGrp="1" noRot="1" noChangeAspect="1" noMove="1" noResize="1" noEditPoints="1" noAdjustHandles="1" noChangeArrowheads="1" noChangeShapeType="1"/>
+          </p:cNvCxnSpPr>
+          <p:nvPr>
+            <p:extLst>
+              <p:ext uri="{386F3935-93C4-4BCD-93E2-E3B085C9AB24}">
+                <p16:designElem xmlns:p16="http://schemas.microsoft.com/office/powerpoint/2015/main" val="1"/>
+              </p:ext>
+            </p:extLst>
+          </p:nvPr>
+        </p:nvCxnSpPr>
+        <p:spPr>
+          <a:xfrm>
+            <a:off x="800100" y="723900"/>
+            <a:ext cx="10591800" cy="0"/>
+          </a:xfrm>
+          <a:prstGeom prst="line">
+            <a:avLst/>
+          </a:prstGeom>
+          <a:ln w="44450">
+            <a:solidFill>
+              <a:schemeClr val="tx1"/>
+            </a:solidFill>
+          </a:ln>
+        </p:spPr>
+        <p:style>
+          <a:lnRef idx="1">
+            <a:schemeClr val="accent1"/>
+          </a:lnRef>
+          <a:fillRef idx="0">
+            <a:schemeClr val="accent1"/>
+          </a:fillRef>
+          <a:effectRef idx="0">
+            <a:schemeClr val="accent1"/>
+          </a:effectRef>
+          <a:fontRef idx="minor">
+            <a:schemeClr val="tx1"/>
+          </a:fontRef>
+        </p:style>
+      </p:cxnSp>
+      <p:cxnSp>
+        <p:nvCxnSpPr>
+          <p:cNvPr id="25" name="Straight Connector 24">
+            <a:extLst>
+              <a:ext uri="{FF2B5EF4-FFF2-40B4-BE49-F238E27FC236}">
+                <a16:creationId xmlns:a16="http://schemas.microsoft.com/office/drawing/2014/main" id="{085AA86F-6A4D-4BCB-A045-D992CDC2959B}"/>
+              </a:ext>
+              <a:ext uri="{C183D7F6-B498-43B3-948B-1728B52AA6E4}">
+                <adec:decorative xmlns:adec="http://schemas.microsoft.com/office/drawing/2017/decorative" val="1"/>
+              </a:ext>
+            </a:extLst>
+          </p:cNvPr>
+          <p:cNvCxnSpPr>
+            <a:cxnSpLocks noGrp="1" noRot="1" noChangeAspect="1" noMove="1" noResize="1" noEditPoints="1" noAdjustHandles="1" noChangeArrowheads="1" noChangeShapeType="1"/>
+          </p:cNvCxnSpPr>
+          <p:nvPr>
+            <p:extLst>
+              <p:ext uri="{386F3935-93C4-4BCD-93E2-E3B085C9AB24}">
+                <p16:designElem xmlns:p16="http://schemas.microsoft.com/office/powerpoint/2015/main" val="1"/>
+              </p:ext>
+            </p:extLst>
+          </p:nvPr>
+        </p:nvCxnSpPr>
+        <p:spPr>
+          <a:xfrm>
+            <a:off x="800100" y="6142781"/>
+            <a:ext cx="10591800" cy="0"/>
+          </a:xfrm>
+          <a:prstGeom prst="line">
+            <a:avLst/>
+          </a:prstGeom>
+          <a:ln w="12700">
+            <a:solidFill>
+              <a:schemeClr val="tx1"/>
+            </a:solidFill>
+          </a:ln>
+        </p:spPr>
+        <p:style>
+          <a:lnRef idx="1">
+            <a:schemeClr val="accent1"/>
+          </a:lnRef>
+          <a:fillRef idx="0">
+            <a:schemeClr val="accent1"/>
+          </a:fillRef>
+          <a:effectRef idx="0">
+            <a:schemeClr val="accent1"/>
+          </a:effectRef>
+          <a:fontRef idx="minor">
+            <a:schemeClr val="tx1"/>
+          </a:fontRef>
+        </p:style>
+      </p:cxnSp>
+      <p:sp useBgFill="1">
+        <p:nvSpPr>
+          <p:cNvPr id="27" name="Rectangle 26">
+            <a:extLst>
+              <a:ext uri="{FF2B5EF4-FFF2-40B4-BE49-F238E27FC236}">
+                <a16:creationId xmlns:a16="http://schemas.microsoft.com/office/drawing/2014/main" id="{33E93247-6229-44AB-A550-739E971E690B}"/>
+              </a:ext>
+              <a:ext uri="{C183D7F6-B498-43B3-948B-1728B52AA6E4}">
+                <adec:decorative xmlns:adec="http://schemas.microsoft.com/office/drawing/2017/decorative" val="1"/>
+              </a:ext>
+            </a:extLst>
+          </p:cNvPr>
+          <p:cNvSpPr>
+            <a:spLocks noGrp="1" noRot="1" noChangeAspect="1" noMove="1" noResize="1" noEditPoints="1" noAdjustHandles="1" noChangeArrowheads="1" noChangeShapeType="1" noTextEdit="1"/>
+          </p:cNvSpPr>
+          <p:nvPr>
+            <p:extLst>
+              <p:ext uri="{386F3935-93C4-4BCD-93E2-E3B085C9AB24}">
+                <p16:designElem xmlns:p16="http://schemas.microsoft.com/office/powerpoint/2015/main" val="1"/>
+              </p:ext>
+            </p:extLst>
+          </p:nvPr>
+        </p:nvSpPr>
+        <p:spPr>
+          <a:xfrm>
+            <a:off x="0" y="0"/>
+            <a:ext cx="12192000" cy="6858000"/>
+          </a:xfrm>
+          <a:prstGeom prst="rect">
+            <a:avLst/>
+          </a:prstGeom>
+          <a:ln w="12700" cap="flat" cmpd="sng" algn="ctr">
+            <a:noFill/>
+            <a:prstDash val="solid"/>
+            <a:miter lim="800000"/>
+          </a:ln>
+          <a:effectLst/>
+          <a:extLst>
+            <a:ext uri="{91240B29-F687-4F45-9708-019B960494DF}">
+              <a14:hiddenLine xmlns:a14="http://schemas.microsoft.com/office/drawing/2010/main" w="12700" cap="flat" cmpd="sng" algn="ctr">
+                <a:solidFill>
+                  <a:schemeClr val="accent1">
+                    <a:shade val="50000"/>
+                  </a:schemeClr>
+                </a:solidFill>
+                <a:prstDash val="solid"/>
+                <a:miter lim="800000"/>
+              </a14:hiddenLine>
+            </a:ext>
+          </a:extLst>
+        </p:spPr>
+        <p:style>
+          <a:lnRef idx="2">
+            <a:schemeClr val="accent1">
+              <a:shade val="50000"/>
+            </a:schemeClr>
+          </a:lnRef>
+          <a:fillRef idx="1">
+            <a:schemeClr val="accent1"/>
+          </a:fillRef>
+          <a:effectRef idx="0">
+            <a:schemeClr val="accent1"/>
+          </a:effectRef>
+          <a:fontRef idx="minor">
+            <a:schemeClr val="lt1"/>
+          </a:fontRef>
+        </p:style>
+        <p:txBody>
+          <a:bodyPr rtlCol="0" anchor="ctr"/>
+          <a:lstStyle/>
+          <a:p>
+            <a:pPr algn="ctr"/>
+            <a:endParaRPr lang="en-US"/>
+          </a:p>
+        </p:txBody>
+      </p:sp>
+      <p:sp>
+        <p:nvSpPr>
+          <p:cNvPr id="2" name="Título 1">
+            <a:extLst>
+              <a:ext uri="{FF2B5EF4-FFF2-40B4-BE49-F238E27FC236}">
+                <a16:creationId xmlns:a16="http://schemas.microsoft.com/office/drawing/2014/main" id="{A0AFDB18-76F6-4D47-4694-6F58A1A1ED89}"/>
+              </a:ext>
+            </a:extLst>
+          </p:cNvPr>
+          <p:cNvSpPr>
+            <a:spLocks noGrp="1"/>
+          </p:cNvSpPr>
+          <p:nvPr>
+            <p:ph type="title"/>
+          </p:nvPr>
+        </p:nvSpPr>
+        <p:spPr>
+          <a:xfrm>
+            <a:off x="685800" y="899024"/>
+            <a:ext cx="3076032" cy="3914947"/>
+          </a:xfrm>
+        </p:spPr>
+        <p:txBody>
+          <a:bodyPr vert="horz" lIns="91440" tIns="45720" rIns="91440" bIns="45720" rtlCol="0" anchor="t">
+            <a:normAutofit/>
+          </a:bodyPr>
+          <a:lstStyle/>
+          <a:p>
+            <a:r>
+              <a:rPr lang="en-US"/>
+              <a:t>Assembly</a:t>
+            </a:r>
+            <a:endParaRPr lang="en-US" dirty="0"/>
+          </a:p>
+        </p:txBody>
+      </p:sp>
+      <p:sp>
+        <p:nvSpPr>
+          <p:cNvPr id="3" name="Marcador de Posição de Conteúdo 2">
+            <a:extLst>
+              <a:ext uri="{FF2B5EF4-FFF2-40B4-BE49-F238E27FC236}">
+                <a16:creationId xmlns:a16="http://schemas.microsoft.com/office/drawing/2014/main" id="{7F11B517-3E46-0FE2-DD5F-E151CB9EB069}"/>
+              </a:ext>
+            </a:extLst>
+          </p:cNvPr>
+          <p:cNvSpPr>
+            <a:spLocks noGrp="1"/>
+          </p:cNvSpPr>
+          <p:nvPr>
+            <p:ph idx="1"/>
+          </p:nvPr>
+        </p:nvSpPr>
+        <p:spPr>
+          <a:xfrm>
+            <a:off x="729624" y="4914199"/>
+            <a:ext cx="2703583" cy="965440"/>
+          </a:xfrm>
+        </p:spPr>
+        <p:txBody>
+          <a:bodyPr vert="horz" lIns="91440" tIns="45720" rIns="91440" bIns="45720" rtlCol="0" anchor="b">
+            <a:normAutofit/>
+          </a:bodyPr>
+          <a:lstStyle/>
+          <a:p>
+            <a:pPr marL="0" indent="0">
+              <a:buNone/>
+            </a:pPr>
+            <a:r>
+              <a:rPr lang="en-US" sz="1800"/>
+              <a:t>Employess List:</a:t>
+            </a:r>
+          </a:p>
+        </p:txBody>
+      </p:sp>
+      <p:cxnSp>
+        <p:nvCxnSpPr>
+          <p:cNvPr id="29" name="Straight Connector 28">
+            <a:extLst>
+              <a:ext uri="{FF2B5EF4-FFF2-40B4-BE49-F238E27FC236}">
+                <a16:creationId xmlns:a16="http://schemas.microsoft.com/office/drawing/2014/main" id="{EE2E603F-4A95-4FE8-BB06-211DFD75DBEF}"/>
+              </a:ext>
+              <a:ext uri="{C183D7F6-B498-43B3-948B-1728B52AA6E4}">
+                <adec:decorative xmlns:adec="http://schemas.microsoft.com/office/drawing/2017/decorative" val="1"/>
+              </a:ext>
+            </a:extLst>
+          </p:cNvPr>
+          <p:cNvCxnSpPr>
+            <a:cxnSpLocks noGrp="1" noRot="1" noChangeAspect="1" noMove="1" noResize="1" noEditPoints="1" noAdjustHandles="1" noChangeArrowheads="1" noChangeShapeType="1"/>
+          </p:cNvCxnSpPr>
+          <p:nvPr>
+            <p:extLst>
+              <p:ext uri="{386F3935-93C4-4BCD-93E2-E3B085C9AB24}">
+                <p16:designElem xmlns:p16="http://schemas.microsoft.com/office/powerpoint/2015/main" val="1"/>
+              </p:ext>
+            </p:extLst>
+          </p:nvPr>
+        </p:nvCxnSpPr>
+        <p:spPr>
+          <a:xfrm>
+            <a:off x="800100" y="723900"/>
+            <a:ext cx="1371600" cy="0"/>
+          </a:xfrm>
+          <a:prstGeom prst="line">
+            <a:avLst/>
+          </a:prstGeom>
+          <a:ln w="44450">
+            <a:solidFill>
+              <a:schemeClr val="tx1"/>
+            </a:solidFill>
+          </a:ln>
+        </p:spPr>
+        <p:style>
+          <a:lnRef idx="1">
+            <a:schemeClr val="accent1"/>
+          </a:lnRef>
+          <a:fillRef idx="0">
+            <a:schemeClr val="accent1"/>
+          </a:fillRef>
+          <a:effectRef idx="0">
+            <a:schemeClr val="accent1"/>
+          </a:effectRef>
+          <a:fontRef idx="minor">
+            <a:schemeClr val="tx1"/>
+          </a:fontRef>
+        </p:style>
+      </p:cxnSp>
+      <p:pic>
+        <p:nvPicPr>
+          <p:cNvPr id="5" name="Imagem 4">
+            <a:extLst>
+              <a:ext uri="{FF2B5EF4-FFF2-40B4-BE49-F238E27FC236}">
+                <a16:creationId xmlns:a16="http://schemas.microsoft.com/office/drawing/2014/main" id="{0F3904E4-68E6-FCC3-A07E-2296DA248599}"/>
+              </a:ext>
+            </a:extLst>
+          </p:cNvPr>
+          <p:cNvPicPr>
+            <a:picLocks noChangeAspect="1"/>
+          </p:cNvPicPr>
+          <p:nvPr/>
+        </p:nvPicPr>
+        <p:blipFill>
+          <a:blip r:embed="rId2"/>
+          <a:stretch>
+            <a:fillRect/>
+          </a:stretch>
+        </p:blipFill>
+        <p:spPr>
+          <a:xfrm>
+            <a:off x="4038600" y="800198"/>
+            <a:ext cx="7353299" cy="5257606"/>
+          </a:xfrm>
+          <a:prstGeom prst="rect">
+            <a:avLst/>
+          </a:prstGeom>
+        </p:spPr>
+      </p:pic>
+    </p:spTree>
+    <p:extLst>
+      <p:ext uri="{BB962C8B-B14F-4D97-AF65-F5344CB8AC3E}">
+        <p14:creationId xmlns:p14="http://schemas.microsoft.com/office/powerpoint/2010/main" val="1178379411"/>
+      </p:ext>
+    </p:extLst>
+  </p:cSld>
+  <p:clrMapOvr>
+    <a:masterClrMapping/>
+  </p:clrMapOvr>
+</p:sld>
+</file>
+
+<file path=ppt/slides/slide12.xml><?xml version="1.0" encoding="utf-8"?>
+<p:sld xmlns:a="http://schemas.openxmlformats.org/drawingml/2006/main" xmlns:r="http://schemas.openxmlformats.org/officeDocument/2006/relationships" xmlns:p="http://schemas.openxmlformats.org/presentationml/2006/main">
+  <p:cSld>
+    <p:bg>
+      <p:bgPr>
+        <a:solidFill>
+          <a:schemeClr val="bg1"/>
+        </a:solidFill>
+        <a:effectLst/>
+      </p:bgPr>
+    </p:bg>
+    <p:spTree>
+      <p:nvGrpSpPr>
+        <p:cNvPr id="1" name=""/>
+        <p:cNvGrpSpPr/>
+        <p:nvPr/>
+      </p:nvGrpSpPr>
+      <p:grpSpPr>
+        <a:xfrm>
+          <a:off x="0" y="0"/>
+          <a:ext cx="0" cy="0"/>
+          <a:chOff x="0" y="0"/>
+          <a:chExt cx="0" cy="0"/>
+        </a:xfrm>
+      </p:grpSpPr>
+      <p:cxnSp>
+        <p:nvCxnSpPr>
+          <p:cNvPr id="21" name="Straight Connector 20">
+            <a:extLst>
+              <a:ext uri="{FF2B5EF4-FFF2-40B4-BE49-F238E27FC236}">
+                <a16:creationId xmlns:a16="http://schemas.microsoft.com/office/drawing/2014/main" id="{F64F9B95-9045-48D2-B9F3-2927E98F54AA}"/>
+              </a:ext>
+              <a:ext uri="{C183D7F6-B498-43B3-948B-1728B52AA6E4}">
+                <adec:decorative xmlns:adec="http://schemas.microsoft.com/office/drawing/2017/decorative" val="1"/>
+              </a:ext>
+            </a:extLst>
+          </p:cNvPr>
+          <p:cNvCxnSpPr>
+            <a:cxnSpLocks noGrp="1" noRot="1" noChangeAspect="1" noMove="1" noResize="1" noEditPoints="1" noAdjustHandles="1" noChangeArrowheads="1" noChangeShapeType="1"/>
+          </p:cNvCxnSpPr>
+          <p:nvPr>
+            <p:extLst>
+              <p:ext uri="{386F3935-93C4-4BCD-93E2-E3B085C9AB24}">
+                <p16:designElem xmlns:p16="http://schemas.microsoft.com/office/powerpoint/2015/main" val="1"/>
+              </p:ext>
+            </p:extLst>
+          </p:nvPr>
+        </p:nvCxnSpPr>
+        <p:spPr>
+          <a:xfrm>
+            <a:off x="800100" y="723900"/>
+            <a:ext cx="10591800" cy="0"/>
+          </a:xfrm>
+          <a:prstGeom prst="line">
+            <a:avLst/>
+          </a:prstGeom>
+          <a:ln w="44450">
+            <a:solidFill>
+              <a:schemeClr val="tx1"/>
+            </a:solidFill>
+          </a:ln>
+        </p:spPr>
+        <p:style>
+          <a:lnRef idx="1">
+            <a:schemeClr val="accent1"/>
+          </a:lnRef>
+          <a:fillRef idx="0">
+            <a:schemeClr val="accent1"/>
+          </a:fillRef>
+          <a:effectRef idx="0">
+            <a:schemeClr val="accent1"/>
+          </a:effectRef>
+          <a:fontRef idx="minor">
+            <a:schemeClr val="tx1"/>
+          </a:fontRef>
+        </p:style>
+      </p:cxnSp>
+      <p:cxnSp>
+        <p:nvCxnSpPr>
+          <p:cNvPr id="23" name="Straight Connector 22">
+            <a:extLst>
+              <a:ext uri="{FF2B5EF4-FFF2-40B4-BE49-F238E27FC236}">
+                <a16:creationId xmlns:a16="http://schemas.microsoft.com/office/drawing/2014/main" id="{085AA86F-6A4D-4BCB-A045-D992CDC2959B}"/>
+              </a:ext>
+              <a:ext uri="{C183D7F6-B498-43B3-948B-1728B52AA6E4}">
+                <adec:decorative xmlns:adec="http://schemas.microsoft.com/office/drawing/2017/decorative" val="1"/>
+              </a:ext>
+            </a:extLst>
+          </p:cNvPr>
+          <p:cNvCxnSpPr>
+            <a:cxnSpLocks noGrp="1" noRot="1" noChangeAspect="1" noMove="1" noResize="1" noEditPoints="1" noAdjustHandles="1" noChangeArrowheads="1" noChangeShapeType="1"/>
+          </p:cNvCxnSpPr>
+          <p:nvPr>
+            <p:extLst>
+              <p:ext uri="{386F3935-93C4-4BCD-93E2-E3B085C9AB24}">
+                <p16:designElem xmlns:p16="http://schemas.microsoft.com/office/powerpoint/2015/main" val="1"/>
+              </p:ext>
+            </p:extLst>
+          </p:nvPr>
+        </p:nvCxnSpPr>
+        <p:spPr>
+          <a:xfrm>
+            <a:off x="800100" y="6142781"/>
+            <a:ext cx="10591800" cy="0"/>
+          </a:xfrm>
+          <a:prstGeom prst="line">
+            <a:avLst/>
+          </a:prstGeom>
+          <a:ln w="12700">
+            <a:solidFill>
+              <a:schemeClr val="tx1"/>
+            </a:solidFill>
+          </a:ln>
+        </p:spPr>
+        <p:style>
+          <a:lnRef idx="1">
+            <a:schemeClr val="accent1"/>
+          </a:lnRef>
+          <a:fillRef idx="0">
+            <a:schemeClr val="accent1"/>
+          </a:fillRef>
+          <a:effectRef idx="0">
+            <a:schemeClr val="accent1"/>
+          </a:effectRef>
+          <a:fontRef idx="minor">
+            <a:schemeClr val="tx1"/>
+          </a:fontRef>
+        </p:style>
+      </p:cxnSp>
+      <p:sp useBgFill="1">
+        <p:nvSpPr>
+          <p:cNvPr id="25" name="Rectangle 24">
+            <a:extLst>
+              <a:ext uri="{FF2B5EF4-FFF2-40B4-BE49-F238E27FC236}">
+                <a16:creationId xmlns:a16="http://schemas.microsoft.com/office/drawing/2014/main" id="{33E93247-6229-44AB-A550-739E971E690B}"/>
+              </a:ext>
+              <a:ext uri="{C183D7F6-B498-43B3-948B-1728B52AA6E4}">
+                <adec:decorative xmlns:adec="http://schemas.microsoft.com/office/drawing/2017/decorative" val="1"/>
+              </a:ext>
+            </a:extLst>
+          </p:cNvPr>
+          <p:cNvSpPr>
+            <a:spLocks noGrp="1" noRot="1" noChangeAspect="1" noMove="1" noResize="1" noEditPoints="1" noAdjustHandles="1" noChangeArrowheads="1" noChangeShapeType="1" noTextEdit="1"/>
+          </p:cNvSpPr>
+          <p:nvPr>
+            <p:extLst>
+              <p:ext uri="{386F3935-93C4-4BCD-93E2-E3B085C9AB24}">
+                <p16:designElem xmlns:p16="http://schemas.microsoft.com/office/powerpoint/2015/main" val="1"/>
+              </p:ext>
+            </p:extLst>
+          </p:nvPr>
+        </p:nvSpPr>
+        <p:spPr>
+          <a:xfrm>
+            <a:off x="0" y="0"/>
+            <a:ext cx="12192000" cy="6858000"/>
+          </a:xfrm>
+          <a:prstGeom prst="rect">
+            <a:avLst/>
+          </a:prstGeom>
+          <a:ln w="12700" cap="flat" cmpd="sng" algn="ctr">
+            <a:noFill/>
+            <a:prstDash val="solid"/>
+            <a:miter lim="800000"/>
+          </a:ln>
+          <a:effectLst/>
+          <a:extLst>
+            <a:ext uri="{91240B29-F687-4F45-9708-019B960494DF}">
+              <a14:hiddenLine xmlns:a14="http://schemas.microsoft.com/office/drawing/2010/main" w="12700" cap="flat" cmpd="sng" algn="ctr">
+                <a:solidFill>
+                  <a:schemeClr val="accent1">
+                    <a:shade val="50000"/>
+                  </a:schemeClr>
+                </a:solidFill>
+                <a:prstDash val="solid"/>
+                <a:miter lim="800000"/>
+              </a14:hiddenLine>
+            </a:ext>
+          </a:extLst>
+        </p:spPr>
+        <p:style>
+          <a:lnRef idx="2">
+            <a:schemeClr val="accent1">
+              <a:shade val="50000"/>
+            </a:schemeClr>
+          </a:lnRef>
+          <a:fillRef idx="1">
+            <a:schemeClr val="accent1"/>
+          </a:fillRef>
+          <a:effectRef idx="0">
+            <a:schemeClr val="accent1"/>
+          </a:effectRef>
+          <a:fontRef idx="minor">
+            <a:schemeClr val="lt1"/>
+          </a:fontRef>
+        </p:style>
+        <p:txBody>
+          <a:bodyPr rtlCol="0" anchor="ctr"/>
+          <a:lstStyle/>
+          <a:p>
+            <a:pPr algn="ctr"/>
+            <a:endParaRPr lang="en-US"/>
+          </a:p>
+        </p:txBody>
+      </p:sp>
+      <p:sp>
+        <p:nvSpPr>
+          <p:cNvPr id="2" name="Título 1">
+            <a:extLst>
+              <a:ext uri="{FF2B5EF4-FFF2-40B4-BE49-F238E27FC236}">
+                <a16:creationId xmlns:a16="http://schemas.microsoft.com/office/drawing/2014/main" id="{8188F316-EE5E-FD69-749F-0841F8173B48}"/>
+              </a:ext>
+            </a:extLst>
+          </p:cNvPr>
+          <p:cNvSpPr>
+            <a:spLocks noGrp="1"/>
+          </p:cNvSpPr>
+          <p:nvPr>
+            <p:ph type="title"/>
+          </p:nvPr>
+        </p:nvSpPr>
+        <p:spPr>
+          <a:xfrm>
+            <a:off x="685800" y="899024"/>
+            <a:ext cx="3076032" cy="3914947"/>
+          </a:xfrm>
+        </p:spPr>
+        <p:txBody>
+          <a:bodyPr vert="horz" lIns="91440" tIns="45720" rIns="91440" bIns="45720" rtlCol="0" anchor="t">
+            <a:normAutofit/>
+          </a:bodyPr>
+          <a:lstStyle/>
+          <a:p>
+            <a:r>
+              <a:rPr lang="en-US"/>
+              <a:t>Assembly</a:t>
+            </a:r>
+            <a:endParaRPr lang="en-US" dirty="0"/>
+          </a:p>
+        </p:txBody>
+      </p:sp>
+      <p:sp>
+        <p:nvSpPr>
+          <p:cNvPr id="3" name="Marcador de Posição de Conteúdo 2">
+            <a:extLst>
+              <a:ext uri="{FF2B5EF4-FFF2-40B4-BE49-F238E27FC236}">
+                <a16:creationId xmlns:a16="http://schemas.microsoft.com/office/drawing/2014/main" id="{68E267BD-F3FA-B056-D45C-9B39859AD1A5}"/>
+              </a:ext>
+            </a:extLst>
+          </p:cNvPr>
+          <p:cNvSpPr>
+            <a:spLocks noGrp="1"/>
+          </p:cNvSpPr>
+          <p:nvPr>
+            <p:ph idx="1"/>
+          </p:nvPr>
+        </p:nvSpPr>
+        <p:spPr>
+          <a:xfrm>
+            <a:off x="729624" y="4914199"/>
+            <a:ext cx="2703583" cy="965440"/>
+          </a:xfrm>
+        </p:spPr>
+        <p:txBody>
+          <a:bodyPr vert="horz" lIns="91440" tIns="45720" rIns="91440" bIns="45720" rtlCol="0" anchor="b">
+            <a:normAutofit/>
+          </a:bodyPr>
+          <a:lstStyle/>
+          <a:p>
+            <a:pPr marL="0" indent="0">
+              <a:buNone/>
+            </a:pPr>
+            <a:r>
+              <a:rPr lang="en-US" sz="1800"/>
+              <a:t>Employess</a:t>
+            </a:r>
+            <a:r>
+              <a:rPr lang="en-US" sz="1800" dirty="0"/>
+              <a:t> Card:</a:t>
+            </a:r>
+          </a:p>
+        </p:txBody>
+      </p:sp>
+      <p:cxnSp>
+        <p:nvCxnSpPr>
+          <p:cNvPr id="27" name="Straight Connector 26">
+            <a:extLst>
+              <a:ext uri="{FF2B5EF4-FFF2-40B4-BE49-F238E27FC236}">
+                <a16:creationId xmlns:a16="http://schemas.microsoft.com/office/drawing/2014/main" id="{EE2E603F-4A95-4FE8-BB06-211DFD75DBEF}"/>
+              </a:ext>
+              <a:ext uri="{C183D7F6-B498-43B3-948B-1728B52AA6E4}">
+                <adec:decorative xmlns:adec="http://schemas.microsoft.com/office/drawing/2017/decorative" val="1"/>
+              </a:ext>
+            </a:extLst>
+          </p:cNvPr>
+          <p:cNvCxnSpPr>
+            <a:cxnSpLocks noGrp="1" noRot="1" noChangeAspect="1" noMove="1" noResize="1" noEditPoints="1" noAdjustHandles="1" noChangeArrowheads="1" noChangeShapeType="1"/>
+          </p:cNvCxnSpPr>
+          <p:nvPr>
+            <p:extLst>
+              <p:ext uri="{386F3935-93C4-4BCD-93E2-E3B085C9AB24}">
+                <p16:designElem xmlns:p16="http://schemas.microsoft.com/office/powerpoint/2015/main" val="1"/>
+              </p:ext>
+            </p:extLst>
+          </p:nvPr>
+        </p:nvCxnSpPr>
+        <p:spPr>
+          <a:xfrm>
+            <a:off x="800100" y="723900"/>
+            <a:ext cx="1371600" cy="0"/>
+          </a:xfrm>
+          <a:prstGeom prst="line">
+            <a:avLst/>
+          </a:prstGeom>
+          <a:ln w="44450">
+            <a:solidFill>
+              <a:schemeClr val="tx1"/>
+            </a:solidFill>
+          </a:ln>
+        </p:spPr>
+        <p:style>
+          <a:lnRef idx="1">
+            <a:schemeClr val="accent1"/>
+          </a:lnRef>
+          <a:fillRef idx="0">
+            <a:schemeClr val="accent1"/>
+          </a:fillRef>
+          <a:effectRef idx="0">
+            <a:schemeClr val="accent1"/>
+          </a:effectRef>
+          <a:fontRef idx="minor">
+            <a:schemeClr val="tx1"/>
+          </a:fontRef>
+        </p:style>
+      </p:cxnSp>
+      <p:pic>
+        <p:nvPicPr>
+          <p:cNvPr id="6" name="Imagem 5">
+            <a:extLst>
+              <a:ext uri="{FF2B5EF4-FFF2-40B4-BE49-F238E27FC236}">
+                <a16:creationId xmlns:a16="http://schemas.microsoft.com/office/drawing/2014/main" id="{3ADC594E-F1F6-4B89-9CA8-D7ECC02D8864}"/>
+              </a:ext>
+            </a:extLst>
+          </p:cNvPr>
+          <p:cNvPicPr>
+            <a:picLocks noChangeAspect="1"/>
+          </p:cNvPicPr>
+          <p:nvPr/>
+        </p:nvPicPr>
+        <p:blipFill>
+          <a:blip r:embed="rId2"/>
+          <a:stretch>
+            <a:fillRect/>
+          </a:stretch>
+        </p:blipFill>
+        <p:spPr>
+          <a:xfrm>
+            <a:off x="4038600" y="800198"/>
+            <a:ext cx="7353299" cy="5257606"/>
+          </a:xfrm>
+          <a:prstGeom prst="rect">
+            <a:avLst/>
+          </a:prstGeom>
+        </p:spPr>
+      </p:pic>
+    </p:spTree>
+    <p:extLst>
+      <p:ext uri="{BB962C8B-B14F-4D97-AF65-F5344CB8AC3E}">
+        <p14:creationId xmlns:p14="http://schemas.microsoft.com/office/powerpoint/2010/main" val="3799295754"/>
+      </p:ext>
+    </p:extLst>
+  </p:cSld>
+  <p:clrMapOvr>
+    <a:masterClrMapping/>
+  </p:clrMapOvr>
+</p:sld>
+</file>
+
+<file path=ppt/slides/slide13.xml><?xml version="1.0" encoding="utf-8"?>
+<p:sld xmlns:a="http://schemas.openxmlformats.org/drawingml/2006/main" xmlns:r="http://schemas.openxmlformats.org/officeDocument/2006/relationships" xmlns:p="http://schemas.openxmlformats.org/presentationml/2006/main">
+  <p:cSld>
+    <p:bg>
+      <p:bgPr>
+        <a:solidFill>
+          <a:schemeClr val="bg1"/>
+        </a:solidFill>
+        <a:effectLst/>
+      </p:bgPr>
+    </p:bg>
+    <p:spTree>
+      <p:nvGrpSpPr>
+        <p:cNvPr id="1" name=""/>
+        <p:cNvGrpSpPr/>
+        <p:nvPr/>
+      </p:nvGrpSpPr>
+      <p:grpSpPr>
+        <a:xfrm>
+          <a:off x="0" y="0"/>
+          <a:ext cx="0" cy="0"/>
+          <a:chOff x="0" y="0"/>
+          <a:chExt cx="0" cy="0"/>
+        </a:xfrm>
+      </p:grpSpPr>
+      <p:cxnSp>
+        <p:nvCxnSpPr>
+          <p:cNvPr id="12" name="Straight Connector 11">
+            <a:extLst>
+              <a:ext uri="{FF2B5EF4-FFF2-40B4-BE49-F238E27FC236}">
+                <a16:creationId xmlns:a16="http://schemas.microsoft.com/office/drawing/2014/main" id="{F64F9B95-9045-48D2-B9F3-2927E98F54AA}"/>
+              </a:ext>
+              <a:ext uri="{C183D7F6-B498-43B3-948B-1728B52AA6E4}">
+                <adec:decorative xmlns:adec="http://schemas.microsoft.com/office/drawing/2017/decorative" val="1"/>
+              </a:ext>
+            </a:extLst>
+          </p:cNvPr>
+          <p:cNvCxnSpPr>
+            <a:cxnSpLocks noGrp="1" noRot="1" noChangeAspect="1" noMove="1" noResize="1" noEditPoints="1" noAdjustHandles="1" noChangeArrowheads="1" noChangeShapeType="1"/>
+          </p:cNvCxnSpPr>
+          <p:nvPr>
+            <p:extLst>
+              <p:ext uri="{386F3935-93C4-4BCD-93E2-E3B085C9AB24}">
+                <p16:designElem xmlns:p16="http://schemas.microsoft.com/office/powerpoint/2015/main" val="1"/>
+              </p:ext>
+            </p:extLst>
+          </p:nvPr>
+        </p:nvCxnSpPr>
+        <p:spPr>
+          <a:xfrm>
+            <a:off x="800100" y="723900"/>
+            <a:ext cx="10591800" cy="0"/>
+          </a:xfrm>
+          <a:prstGeom prst="line">
+            <a:avLst/>
+          </a:prstGeom>
+          <a:ln w="44450">
+            <a:solidFill>
+              <a:schemeClr val="tx1"/>
+            </a:solidFill>
+          </a:ln>
+        </p:spPr>
+        <p:style>
+          <a:lnRef idx="1">
+            <a:schemeClr val="accent1"/>
+          </a:lnRef>
+          <a:fillRef idx="0">
+            <a:schemeClr val="accent1"/>
+          </a:fillRef>
+          <a:effectRef idx="0">
+            <a:schemeClr val="accent1"/>
+          </a:effectRef>
+          <a:fontRef idx="minor">
+            <a:schemeClr val="tx1"/>
+          </a:fontRef>
+        </p:style>
+      </p:cxnSp>
+      <p:cxnSp>
+        <p:nvCxnSpPr>
+          <p:cNvPr id="14" name="Straight Connector 13">
+            <a:extLst>
+              <a:ext uri="{FF2B5EF4-FFF2-40B4-BE49-F238E27FC236}">
+                <a16:creationId xmlns:a16="http://schemas.microsoft.com/office/drawing/2014/main" id="{085AA86F-6A4D-4BCB-A045-D992CDC2959B}"/>
+              </a:ext>
+              <a:ext uri="{C183D7F6-B498-43B3-948B-1728B52AA6E4}">
+                <adec:decorative xmlns:adec="http://schemas.microsoft.com/office/drawing/2017/decorative" val="1"/>
+              </a:ext>
+            </a:extLst>
+          </p:cNvPr>
+          <p:cNvCxnSpPr>
+            <a:cxnSpLocks noGrp="1" noRot="1" noChangeAspect="1" noMove="1" noResize="1" noEditPoints="1" noAdjustHandles="1" noChangeArrowheads="1" noChangeShapeType="1"/>
+          </p:cNvCxnSpPr>
+          <p:nvPr>
+            <p:extLst>
+              <p:ext uri="{386F3935-93C4-4BCD-93E2-E3B085C9AB24}">
+                <p16:designElem xmlns:p16="http://schemas.microsoft.com/office/powerpoint/2015/main" val="1"/>
+              </p:ext>
+            </p:extLst>
+          </p:nvPr>
+        </p:nvCxnSpPr>
+        <p:spPr>
+          <a:xfrm>
+            <a:off x="800100" y="6142781"/>
+            <a:ext cx="10591800" cy="0"/>
+          </a:xfrm>
+          <a:prstGeom prst="line">
+            <a:avLst/>
+          </a:prstGeom>
+          <a:ln w="12700">
+            <a:solidFill>
+              <a:schemeClr val="tx1"/>
+            </a:solidFill>
+          </a:ln>
+        </p:spPr>
+        <p:style>
+          <a:lnRef idx="1">
+            <a:schemeClr val="accent1"/>
+          </a:lnRef>
+          <a:fillRef idx="0">
+            <a:schemeClr val="accent1"/>
+          </a:fillRef>
+          <a:effectRef idx="0">
+            <a:schemeClr val="accent1"/>
+          </a:effectRef>
+          <a:fontRef idx="minor">
+            <a:schemeClr val="tx1"/>
+          </a:fontRef>
+        </p:style>
+      </p:cxnSp>
+      <p:sp useBgFill="1">
+        <p:nvSpPr>
+          <p:cNvPr id="16" name="Rectangle 15">
+            <a:extLst>
+              <a:ext uri="{FF2B5EF4-FFF2-40B4-BE49-F238E27FC236}">
+                <a16:creationId xmlns:a16="http://schemas.microsoft.com/office/drawing/2014/main" id="{341BFA31-6544-45C2-9DA0-9E1C5E0B1959}"/>
+              </a:ext>
+              <a:ext uri="{C183D7F6-B498-43B3-948B-1728B52AA6E4}">
+                <adec:decorative xmlns:adec="http://schemas.microsoft.com/office/drawing/2017/decorative" val="1"/>
+              </a:ext>
+            </a:extLst>
+          </p:cNvPr>
+          <p:cNvSpPr>
+            <a:spLocks noGrp="1" noRot="1" noChangeAspect="1" noMove="1" noResize="1" noEditPoints="1" noAdjustHandles="1" noChangeArrowheads="1" noChangeShapeType="1" noTextEdit="1"/>
+          </p:cNvSpPr>
+          <p:nvPr>
+            <p:extLst>
+              <p:ext uri="{386F3935-93C4-4BCD-93E2-E3B085C9AB24}">
+                <p16:designElem xmlns:p16="http://schemas.microsoft.com/office/powerpoint/2015/main" val="1"/>
+              </p:ext>
+            </p:extLst>
+          </p:nvPr>
+        </p:nvSpPr>
+        <p:spPr>
+          <a:xfrm>
+            <a:off x="0" y="0"/>
+            <a:ext cx="12192000" cy="6858000"/>
+          </a:xfrm>
+          <a:prstGeom prst="rect">
+            <a:avLst/>
+          </a:prstGeom>
+          <a:ln w="12700" cap="flat" cmpd="sng" algn="ctr">
+            <a:noFill/>
+            <a:prstDash val="solid"/>
+            <a:miter lim="800000"/>
+          </a:ln>
+          <a:effectLst/>
+          <a:extLst>
+            <a:ext uri="{91240B29-F687-4F45-9708-019B960494DF}">
+              <a14:hiddenLine xmlns:a14="http://schemas.microsoft.com/office/drawing/2010/main" w="12700" cap="flat" cmpd="sng" algn="ctr">
+                <a:solidFill>
+                  <a:schemeClr val="accent1">
+                    <a:shade val="50000"/>
+                  </a:schemeClr>
+                </a:solidFill>
+                <a:prstDash val="solid"/>
+                <a:miter lim="800000"/>
+              </a14:hiddenLine>
+            </a:ext>
+          </a:extLst>
+        </p:spPr>
+        <p:style>
+          <a:lnRef idx="2">
+            <a:schemeClr val="accent1">
+              <a:shade val="50000"/>
+            </a:schemeClr>
+          </a:lnRef>
+          <a:fillRef idx="1">
+            <a:schemeClr val="accent1"/>
+          </a:fillRef>
+          <a:effectRef idx="0">
+            <a:schemeClr val="accent1"/>
+          </a:effectRef>
+          <a:fontRef idx="minor">
+            <a:schemeClr val="lt1"/>
+          </a:fontRef>
+        </p:style>
+        <p:txBody>
+          <a:bodyPr rtlCol="0" anchor="ctr"/>
+          <a:lstStyle/>
+          <a:p>
+            <a:pPr algn="ctr"/>
+            <a:endParaRPr lang="en-US"/>
+          </a:p>
+        </p:txBody>
+      </p:sp>
+      <p:sp>
+        <p:nvSpPr>
+          <p:cNvPr id="2" name="Título 1">
+            <a:extLst>
+              <a:ext uri="{FF2B5EF4-FFF2-40B4-BE49-F238E27FC236}">
+                <a16:creationId xmlns:a16="http://schemas.microsoft.com/office/drawing/2014/main" id="{F5E51D76-AC64-1FE2-2115-9B067144D313}"/>
+              </a:ext>
+            </a:extLst>
+          </p:cNvPr>
+          <p:cNvSpPr>
+            <a:spLocks noGrp="1"/>
+          </p:cNvSpPr>
+          <p:nvPr>
+            <p:ph type="title"/>
+          </p:nvPr>
+        </p:nvSpPr>
+        <p:spPr>
+          <a:xfrm>
+            <a:off x="800100" y="529049"/>
+            <a:ext cx="10791266" cy="1163206"/>
+          </a:xfrm>
+        </p:spPr>
+        <p:txBody>
+          <a:bodyPr vert="horz" lIns="91440" tIns="45720" rIns="91440" bIns="45720" rtlCol="0" anchor="b">
+            <a:normAutofit/>
+          </a:bodyPr>
+          <a:lstStyle/>
+          <a:p>
+            <a:pPr algn="ctr"/>
+            <a:r>
+              <a:rPr lang="pt-PT" sz="5400" dirty="0" err="1"/>
+              <a:t>Assembly</a:t>
+            </a:r>
+            <a:endParaRPr lang="en-US" sz="5400" dirty="0"/>
+          </a:p>
+        </p:txBody>
+      </p:sp>
+      <p:sp>
+        <p:nvSpPr>
+          <p:cNvPr id="3" name="Marcador de Posição de Conteúdo 2">
+            <a:extLst>
+              <a:ext uri="{FF2B5EF4-FFF2-40B4-BE49-F238E27FC236}">
+                <a16:creationId xmlns:a16="http://schemas.microsoft.com/office/drawing/2014/main" id="{A8380A37-FFEF-D48C-8F90-1F0CE65F7312}"/>
+              </a:ext>
+            </a:extLst>
+          </p:cNvPr>
+          <p:cNvSpPr>
+            <a:spLocks noGrp="1"/>
+          </p:cNvSpPr>
+          <p:nvPr>
+            <p:ph idx="1"/>
+          </p:nvPr>
+        </p:nvSpPr>
+        <p:spPr>
+          <a:xfrm>
+            <a:off x="800100" y="1771217"/>
+            <a:ext cx="10791266" cy="440654"/>
+          </a:xfrm>
+        </p:spPr>
+        <p:txBody>
+          <a:bodyPr vert="horz" lIns="91440" tIns="45720" rIns="91440" bIns="45720" rtlCol="0" anchor="t">
+            <a:normAutofit/>
+          </a:bodyPr>
+          <a:lstStyle/>
+          <a:p>
+            <a:pPr marL="0" indent="0" algn="ctr">
+              <a:buNone/>
+            </a:pPr>
+            <a:r>
+              <a:rPr lang="en-US" sz="1800"/>
+              <a:t>Sides open/closed :</a:t>
+            </a:r>
+          </a:p>
+        </p:txBody>
+      </p:sp>
+      <p:cxnSp>
+        <p:nvCxnSpPr>
+          <p:cNvPr id="18" name="Straight Connector 17">
+            <a:extLst>
+              <a:ext uri="{FF2B5EF4-FFF2-40B4-BE49-F238E27FC236}">
+                <a16:creationId xmlns:a16="http://schemas.microsoft.com/office/drawing/2014/main" id="{DC36F877-5419-44C1-A2CD-376BDDDC3E41}"/>
+              </a:ext>
+              <a:ext uri="{C183D7F6-B498-43B3-948B-1728B52AA6E4}">
+                <adec:decorative xmlns:adec="http://schemas.microsoft.com/office/drawing/2017/decorative" val="1"/>
+              </a:ext>
+            </a:extLst>
+          </p:cNvPr>
+          <p:cNvCxnSpPr>
+            <a:cxnSpLocks noGrp="1" noRot="1" noChangeAspect="1" noMove="1" noResize="1" noEditPoints="1" noAdjustHandles="1" noChangeArrowheads="1" noChangeShapeType="1"/>
+          </p:cNvCxnSpPr>
+          <p:nvPr>
+            <p:extLst>
+              <p:ext uri="{386F3935-93C4-4BCD-93E2-E3B085C9AB24}">
+                <p16:designElem xmlns:p16="http://schemas.microsoft.com/office/powerpoint/2015/main" val="1"/>
+              </p:ext>
+            </p:extLst>
+          </p:nvPr>
+        </p:nvCxnSpPr>
+        <p:spPr>
+          <a:xfrm>
+            <a:off x="5358817" y="2454085"/>
+            <a:ext cx="1638300" cy="0"/>
+          </a:xfrm>
+          <a:prstGeom prst="line">
+            <a:avLst/>
+          </a:prstGeom>
+          <a:ln w="44450">
+            <a:solidFill>
+              <a:schemeClr val="tx1"/>
+            </a:solidFill>
+          </a:ln>
+        </p:spPr>
+        <p:style>
+          <a:lnRef idx="1">
+            <a:schemeClr val="accent1"/>
+          </a:lnRef>
+          <a:fillRef idx="0">
+            <a:schemeClr val="accent1"/>
+          </a:fillRef>
+          <a:effectRef idx="0">
+            <a:schemeClr val="accent1"/>
+          </a:effectRef>
+          <a:fontRef idx="minor">
+            <a:schemeClr val="tx1"/>
+          </a:fontRef>
+        </p:style>
+      </p:cxnSp>
+      <p:pic>
+        <p:nvPicPr>
+          <p:cNvPr id="5" name="Imagem 4">
+            <a:extLst>
+              <a:ext uri="{FF2B5EF4-FFF2-40B4-BE49-F238E27FC236}">
+                <a16:creationId xmlns:a16="http://schemas.microsoft.com/office/drawing/2014/main" id="{89CC19F0-3AC7-600A-4085-C81B26F123D5}"/>
+              </a:ext>
+            </a:extLst>
+          </p:cNvPr>
+          <p:cNvPicPr>
+            <a:picLocks noChangeAspect="1"/>
+          </p:cNvPicPr>
+          <p:nvPr/>
+        </p:nvPicPr>
+        <p:blipFill>
+          <a:blip r:embed="rId2"/>
+          <a:stretch>
+            <a:fillRect/>
+          </a:stretch>
+        </p:blipFill>
+        <p:spPr>
+          <a:xfrm>
+            <a:off x="1324579" y="2696300"/>
+            <a:ext cx="4771420" cy="3435422"/>
+          </a:xfrm>
+          <a:prstGeom prst="rect">
+            <a:avLst/>
+          </a:prstGeom>
+        </p:spPr>
+      </p:pic>
+      <p:pic>
+        <p:nvPicPr>
+          <p:cNvPr id="7" name="Imagem 6">
+            <a:extLst>
+              <a:ext uri="{FF2B5EF4-FFF2-40B4-BE49-F238E27FC236}">
+                <a16:creationId xmlns:a16="http://schemas.microsoft.com/office/drawing/2014/main" id="{DF629BF0-D26A-2EB7-4D3A-3260999A6044}"/>
+              </a:ext>
+            </a:extLst>
+          </p:cNvPr>
+          <p:cNvPicPr>
+            <a:picLocks noChangeAspect="1"/>
+          </p:cNvPicPr>
+          <p:nvPr/>
+        </p:nvPicPr>
+        <p:blipFill>
+          <a:blip r:embed="rId3"/>
+          <a:stretch>
+            <a:fillRect/>
+          </a:stretch>
+        </p:blipFill>
+        <p:spPr>
+          <a:xfrm>
+            <a:off x="6259934" y="2696300"/>
+            <a:ext cx="4838622" cy="3435422"/>
+          </a:xfrm>
+          <a:prstGeom prst="rect">
+            <a:avLst/>
+          </a:prstGeom>
+        </p:spPr>
+      </p:pic>
+    </p:spTree>
+    <p:extLst>
+      <p:ext uri="{BB962C8B-B14F-4D97-AF65-F5344CB8AC3E}">
+        <p14:creationId xmlns:p14="http://schemas.microsoft.com/office/powerpoint/2010/main" val="3948259543"/>
+      </p:ext>
+    </p:extLst>
+  </p:cSld>
+  <p:clrMapOvr>
+    <a:masterClrMapping/>
+  </p:clrMapOvr>
+</p:sld>
+</file>
+
+<file path=ppt/slides/slide14.xml><?xml version="1.0" encoding="utf-8"?>
+<p:sld xmlns:a="http://schemas.openxmlformats.org/drawingml/2006/main" xmlns:r="http://schemas.openxmlformats.org/officeDocument/2006/relationships" xmlns:p="http://schemas.openxmlformats.org/presentationml/2006/main">
+  <p:cSld>
+    <p:bg>
+      <p:bgPr>
+        <a:solidFill>
+          <a:schemeClr val="bg1"/>
+        </a:solidFill>
+        <a:effectLst/>
+      </p:bgPr>
+    </p:bg>
+    <p:spTree>
+      <p:nvGrpSpPr>
+        <p:cNvPr id="1" name=""/>
+        <p:cNvGrpSpPr/>
+        <p:nvPr/>
+      </p:nvGrpSpPr>
+      <p:grpSpPr>
+        <a:xfrm>
+          <a:off x="0" y="0"/>
+          <a:ext cx="0" cy="0"/>
+          <a:chOff x="0" y="0"/>
+          <a:chExt cx="0" cy="0"/>
+        </a:xfrm>
+      </p:grpSpPr>
+      <p:cxnSp>
+        <p:nvCxnSpPr>
+          <p:cNvPr id="10" name="Straight Connector 9">
+            <a:extLst>
+              <a:ext uri="{FF2B5EF4-FFF2-40B4-BE49-F238E27FC236}">
+                <a16:creationId xmlns:a16="http://schemas.microsoft.com/office/drawing/2014/main" id="{F64F9B95-9045-48D2-B9F3-2927E98F54AA}"/>
+              </a:ext>
+              <a:ext uri="{C183D7F6-B498-43B3-948B-1728B52AA6E4}">
+                <adec:decorative xmlns:adec="http://schemas.microsoft.com/office/drawing/2017/decorative" val="1"/>
+              </a:ext>
+            </a:extLst>
+          </p:cNvPr>
+          <p:cNvCxnSpPr>
+            <a:cxnSpLocks noGrp="1" noRot="1" noChangeAspect="1" noMove="1" noResize="1" noEditPoints="1" noAdjustHandles="1" noChangeArrowheads="1" noChangeShapeType="1"/>
+          </p:cNvCxnSpPr>
+          <p:nvPr>
+            <p:extLst>
+              <p:ext uri="{386F3935-93C4-4BCD-93E2-E3B085C9AB24}">
+                <p16:designElem xmlns:p16="http://schemas.microsoft.com/office/powerpoint/2015/main" val="1"/>
+              </p:ext>
+            </p:extLst>
+          </p:nvPr>
+        </p:nvCxnSpPr>
+        <p:spPr>
+          <a:xfrm>
+            <a:off x="800100" y="723900"/>
+            <a:ext cx="10591800" cy="0"/>
+          </a:xfrm>
+          <a:prstGeom prst="line">
+            <a:avLst/>
+          </a:prstGeom>
+          <a:ln w="44450">
+            <a:solidFill>
+              <a:schemeClr val="tx1"/>
+            </a:solidFill>
+          </a:ln>
+        </p:spPr>
+        <p:style>
+          <a:lnRef idx="1">
+            <a:schemeClr val="accent1"/>
+          </a:lnRef>
+          <a:fillRef idx="0">
+            <a:schemeClr val="accent1"/>
+          </a:fillRef>
+          <a:effectRef idx="0">
+            <a:schemeClr val="accent1"/>
+          </a:effectRef>
+          <a:fontRef idx="minor">
+            <a:schemeClr val="tx1"/>
+          </a:fontRef>
+        </p:style>
+      </p:cxnSp>
+      <p:cxnSp>
+        <p:nvCxnSpPr>
+          <p:cNvPr id="12" name="Straight Connector 11">
+            <a:extLst>
+              <a:ext uri="{FF2B5EF4-FFF2-40B4-BE49-F238E27FC236}">
+                <a16:creationId xmlns:a16="http://schemas.microsoft.com/office/drawing/2014/main" id="{085AA86F-6A4D-4BCB-A045-D992CDC2959B}"/>
+              </a:ext>
+              <a:ext uri="{C183D7F6-B498-43B3-948B-1728B52AA6E4}">
+                <adec:decorative xmlns:adec="http://schemas.microsoft.com/office/drawing/2017/decorative" val="1"/>
+              </a:ext>
+            </a:extLst>
+          </p:cNvPr>
+          <p:cNvCxnSpPr>
+            <a:cxnSpLocks noGrp="1" noRot="1" noChangeAspect="1" noMove="1" noResize="1" noEditPoints="1" noAdjustHandles="1" noChangeArrowheads="1" noChangeShapeType="1"/>
+          </p:cNvCxnSpPr>
+          <p:nvPr>
+            <p:extLst>
+              <p:ext uri="{386F3935-93C4-4BCD-93E2-E3B085C9AB24}">
+                <p16:designElem xmlns:p16="http://schemas.microsoft.com/office/powerpoint/2015/main" val="1"/>
+              </p:ext>
+            </p:extLst>
+          </p:nvPr>
+        </p:nvCxnSpPr>
+        <p:spPr>
+          <a:xfrm>
+            <a:off x="800100" y="6142781"/>
+            <a:ext cx="10591800" cy="0"/>
+          </a:xfrm>
+          <a:prstGeom prst="line">
+            <a:avLst/>
+          </a:prstGeom>
+          <a:ln w="12700">
+            <a:solidFill>
+              <a:schemeClr val="tx1"/>
+            </a:solidFill>
+          </a:ln>
+        </p:spPr>
+        <p:style>
+          <a:lnRef idx="1">
+            <a:schemeClr val="accent1"/>
+          </a:lnRef>
+          <a:fillRef idx="0">
+            <a:schemeClr val="accent1"/>
+          </a:fillRef>
+          <a:effectRef idx="0">
+            <a:schemeClr val="accent1"/>
+          </a:effectRef>
+          <a:fontRef idx="minor">
+            <a:schemeClr val="tx1"/>
+          </a:fontRef>
+        </p:style>
+      </p:cxnSp>
+      <p:sp useBgFill="1">
+        <p:nvSpPr>
+          <p:cNvPr id="14" name="Rectangle 13">
+            <a:extLst>
+              <a:ext uri="{FF2B5EF4-FFF2-40B4-BE49-F238E27FC236}">
+                <a16:creationId xmlns:a16="http://schemas.microsoft.com/office/drawing/2014/main" id="{33E93247-6229-44AB-A550-739E971E690B}"/>
+              </a:ext>
+              <a:ext uri="{C183D7F6-B498-43B3-948B-1728B52AA6E4}">
+                <adec:decorative xmlns:adec="http://schemas.microsoft.com/office/drawing/2017/decorative" val="1"/>
+              </a:ext>
+            </a:extLst>
+          </p:cNvPr>
+          <p:cNvSpPr>
+            <a:spLocks noGrp="1" noRot="1" noChangeAspect="1" noMove="1" noResize="1" noEditPoints="1" noAdjustHandles="1" noChangeArrowheads="1" noChangeShapeType="1" noTextEdit="1"/>
+          </p:cNvSpPr>
+          <p:nvPr>
+            <p:extLst>
+              <p:ext uri="{386F3935-93C4-4BCD-93E2-E3B085C9AB24}">
+                <p16:designElem xmlns:p16="http://schemas.microsoft.com/office/powerpoint/2015/main" val="1"/>
+              </p:ext>
+            </p:extLst>
+          </p:nvPr>
+        </p:nvSpPr>
+        <p:spPr>
+          <a:xfrm>
+            <a:off x="0" y="0"/>
+            <a:ext cx="12192000" cy="6858000"/>
+          </a:xfrm>
+          <a:prstGeom prst="rect">
+            <a:avLst/>
+          </a:prstGeom>
+          <a:ln w="12700" cap="flat" cmpd="sng" algn="ctr">
+            <a:noFill/>
+            <a:prstDash val="solid"/>
+            <a:miter lim="800000"/>
+          </a:ln>
+          <a:effectLst/>
+          <a:extLst>
+            <a:ext uri="{91240B29-F687-4F45-9708-019B960494DF}">
+              <a14:hiddenLine xmlns:a14="http://schemas.microsoft.com/office/drawing/2010/main" w="12700" cap="flat" cmpd="sng" algn="ctr">
+                <a:solidFill>
+                  <a:schemeClr val="accent1">
+                    <a:shade val="50000"/>
+                  </a:schemeClr>
+                </a:solidFill>
+                <a:prstDash val="solid"/>
+                <a:miter lim="800000"/>
+              </a14:hiddenLine>
+            </a:ext>
+          </a:extLst>
+        </p:spPr>
+        <p:style>
+          <a:lnRef idx="2">
+            <a:schemeClr val="accent1">
+              <a:shade val="50000"/>
+            </a:schemeClr>
+          </a:lnRef>
+          <a:fillRef idx="1">
+            <a:schemeClr val="accent1"/>
+          </a:fillRef>
+          <a:effectRef idx="0">
+            <a:schemeClr val="accent1"/>
+          </a:effectRef>
+          <a:fontRef idx="minor">
+            <a:schemeClr val="lt1"/>
+          </a:fontRef>
+        </p:style>
+        <p:txBody>
+          <a:bodyPr rtlCol="0" anchor="ctr"/>
+          <a:lstStyle/>
+          <a:p>
+            <a:pPr algn="ctr"/>
+            <a:endParaRPr lang="en-US"/>
+          </a:p>
+        </p:txBody>
+      </p:sp>
+      <p:sp>
+        <p:nvSpPr>
+          <p:cNvPr id="2" name="Título 1">
+            <a:extLst>
+              <a:ext uri="{FF2B5EF4-FFF2-40B4-BE49-F238E27FC236}">
+                <a16:creationId xmlns:a16="http://schemas.microsoft.com/office/drawing/2014/main" id="{931D7F7F-E66C-529E-428A-D03936CE9C8A}"/>
+              </a:ext>
+            </a:extLst>
+          </p:cNvPr>
+          <p:cNvSpPr>
+            <a:spLocks noGrp="1"/>
+          </p:cNvSpPr>
+          <p:nvPr>
+            <p:ph type="title"/>
+          </p:nvPr>
+        </p:nvSpPr>
+        <p:spPr>
+          <a:xfrm>
+            <a:off x="685800" y="899024"/>
+            <a:ext cx="3076032" cy="3914947"/>
+          </a:xfrm>
+        </p:spPr>
+        <p:txBody>
+          <a:bodyPr vert="horz" lIns="91440" tIns="45720" rIns="91440" bIns="45720" rtlCol="0" anchor="t">
+            <a:normAutofit/>
+          </a:bodyPr>
+          <a:lstStyle/>
+          <a:p>
+            <a:r>
+              <a:rPr lang="en-US" dirty="0"/>
+              <a:t>Template</a:t>
+            </a:r>
+          </a:p>
+        </p:txBody>
+      </p:sp>
+      <p:sp>
+        <p:nvSpPr>
+          <p:cNvPr id="3" name="Marcador de Posição de Conteúdo 2">
+            <a:extLst>
+              <a:ext uri="{FF2B5EF4-FFF2-40B4-BE49-F238E27FC236}">
+                <a16:creationId xmlns:a16="http://schemas.microsoft.com/office/drawing/2014/main" id="{78B0CA2A-7DEC-B269-475E-8F9B20B7F6A9}"/>
+              </a:ext>
+            </a:extLst>
+          </p:cNvPr>
+          <p:cNvSpPr>
+            <a:spLocks noGrp="1"/>
+          </p:cNvSpPr>
+          <p:nvPr>
+            <p:ph idx="1"/>
+          </p:nvPr>
+        </p:nvSpPr>
+        <p:spPr>
+          <a:xfrm>
+            <a:off x="729624" y="4914199"/>
+            <a:ext cx="2703583" cy="965440"/>
+          </a:xfrm>
+        </p:spPr>
+        <p:txBody>
+          <a:bodyPr vert="horz" lIns="91440" tIns="45720" rIns="91440" bIns="45720" rtlCol="0" anchor="b">
+            <a:normAutofit/>
+          </a:bodyPr>
+          <a:lstStyle/>
+          <a:p>
+            <a:pPr marL="0" indent="0">
+              <a:buNone/>
+            </a:pPr>
+            <a:r>
+              <a:rPr lang="en-US" sz="1800" dirty="0"/>
+              <a:t>Side nav + sidebar Template</a:t>
+            </a:r>
+          </a:p>
+        </p:txBody>
+      </p:sp>
+      <p:cxnSp>
+        <p:nvCxnSpPr>
+          <p:cNvPr id="16" name="Straight Connector 15">
+            <a:extLst>
+              <a:ext uri="{FF2B5EF4-FFF2-40B4-BE49-F238E27FC236}">
+                <a16:creationId xmlns:a16="http://schemas.microsoft.com/office/drawing/2014/main" id="{EE2E603F-4A95-4FE8-BB06-211DFD75DBEF}"/>
+              </a:ext>
+              <a:ext uri="{C183D7F6-B498-43B3-948B-1728B52AA6E4}">
+                <adec:decorative xmlns:adec="http://schemas.microsoft.com/office/drawing/2017/decorative" val="1"/>
+              </a:ext>
+            </a:extLst>
+          </p:cNvPr>
+          <p:cNvCxnSpPr>
+            <a:cxnSpLocks noGrp="1" noRot="1" noChangeAspect="1" noMove="1" noResize="1" noEditPoints="1" noAdjustHandles="1" noChangeArrowheads="1" noChangeShapeType="1"/>
+          </p:cNvCxnSpPr>
+          <p:nvPr>
+            <p:extLst>
+              <p:ext uri="{386F3935-93C4-4BCD-93E2-E3B085C9AB24}">
+                <p16:designElem xmlns:p16="http://schemas.microsoft.com/office/powerpoint/2015/main" val="1"/>
+              </p:ext>
+            </p:extLst>
+          </p:nvPr>
+        </p:nvCxnSpPr>
+        <p:spPr>
+          <a:xfrm>
+            <a:off x="800100" y="723900"/>
+            <a:ext cx="1371600" cy="0"/>
+          </a:xfrm>
+          <a:prstGeom prst="line">
+            <a:avLst/>
+          </a:prstGeom>
+          <a:ln w="44450">
+            <a:solidFill>
+              <a:schemeClr val="tx1"/>
+            </a:solidFill>
+          </a:ln>
+        </p:spPr>
+        <p:style>
+          <a:lnRef idx="1">
+            <a:schemeClr val="accent1"/>
+          </a:lnRef>
+          <a:fillRef idx="0">
+            <a:schemeClr val="accent1"/>
+          </a:fillRef>
+          <a:effectRef idx="0">
+            <a:schemeClr val="accent1"/>
+          </a:effectRef>
+          <a:fontRef idx="minor">
+            <a:schemeClr val="tx1"/>
+          </a:fontRef>
+        </p:style>
+      </p:cxnSp>
+      <p:pic>
+        <p:nvPicPr>
+          <p:cNvPr id="5" name="Imagem 4">
+            <a:extLst>
+              <a:ext uri="{FF2B5EF4-FFF2-40B4-BE49-F238E27FC236}">
+                <a16:creationId xmlns:a16="http://schemas.microsoft.com/office/drawing/2014/main" id="{EAEEF490-FE39-3513-55C8-176D303B9A8B}"/>
+              </a:ext>
+            </a:extLst>
+          </p:cNvPr>
+          <p:cNvPicPr>
+            <a:picLocks noChangeAspect="1"/>
+          </p:cNvPicPr>
+          <p:nvPr/>
+        </p:nvPicPr>
+        <p:blipFill>
+          <a:blip r:embed="rId2"/>
+          <a:stretch>
+            <a:fillRect/>
+          </a:stretch>
+        </p:blipFill>
+        <p:spPr>
+          <a:xfrm>
+            <a:off x="4038600" y="800198"/>
+            <a:ext cx="7353299" cy="5257606"/>
+          </a:xfrm>
+          <a:prstGeom prst="rect">
+            <a:avLst/>
+          </a:prstGeom>
+        </p:spPr>
+      </p:pic>
+    </p:spTree>
+    <p:extLst>
+      <p:ext uri="{BB962C8B-B14F-4D97-AF65-F5344CB8AC3E}">
+        <p14:creationId xmlns:p14="http://schemas.microsoft.com/office/powerpoint/2010/main" val="4097988789"/>
+      </p:ext>
+    </p:extLst>
+  </p:cSld>
+  <p:clrMapOvr>
+    <a:masterClrMapping/>
+  </p:clrMapOvr>
+</p:sld>
+</file>
+
+<file path=ppt/slides/slide15.xml><?xml version="1.0" encoding="utf-8"?>
+<p:sld xmlns:a="http://schemas.openxmlformats.org/drawingml/2006/main" xmlns:r="http://schemas.openxmlformats.org/officeDocument/2006/relationships" xmlns:p="http://schemas.openxmlformats.org/presentationml/2006/main">
+  <p:cSld>
+    <p:bg>
+      <p:bgPr>
+        <a:solidFill>
+          <a:schemeClr val="bg1"/>
+        </a:solidFill>
+        <a:effectLst/>
+      </p:bgPr>
+    </p:bg>
+    <p:spTree>
+      <p:nvGrpSpPr>
+        <p:cNvPr id="1" name=""/>
+        <p:cNvGrpSpPr/>
+        <p:nvPr/>
+      </p:nvGrpSpPr>
+      <p:grpSpPr>
+        <a:xfrm>
+          <a:off x="0" y="0"/>
+          <a:ext cx="0" cy="0"/>
+          <a:chOff x="0" y="0"/>
+          <a:chExt cx="0" cy="0"/>
+        </a:xfrm>
+      </p:grpSpPr>
+      <p:cxnSp>
+        <p:nvCxnSpPr>
+          <p:cNvPr id="10" name="Straight Connector 9">
+            <a:extLst>
+              <a:ext uri="{FF2B5EF4-FFF2-40B4-BE49-F238E27FC236}">
+                <a16:creationId xmlns:a16="http://schemas.microsoft.com/office/drawing/2014/main" id="{F64F9B95-9045-48D2-B9F3-2927E98F54AA}"/>
+              </a:ext>
+              <a:ext uri="{C183D7F6-B498-43B3-948B-1728B52AA6E4}">
+                <adec:decorative xmlns:adec="http://schemas.microsoft.com/office/drawing/2017/decorative" val="1"/>
+              </a:ext>
+            </a:extLst>
+          </p:cNvPr>
+          <p:cNvCxnSpPr>
+            <a:cxnSpLocks noGrp="1" noRot="1" noChangeAspect="1" noMove="1" noResize="1" noEditPoints="1" noAdjustHandles="1" noChangeArrowheads="1" noChangeShapeType="1"/>
+          </p:cNvCxnSpPr>
+          <p:nvPr>
+            <p:extLst>
+              <p:ext uri="{386F3935-93C4-4BCD-93E2-E3B085C9AB24}">
+                <p16:designElem xmlns:p16="http://schemas.microsoft.com/office/powerpoint/2015/main" val="1"/>
+              </p:ext>
+            </p:extLst>
+          </p:nvPr>
+        </p:nvCxnSpPr>
+        <p:spPr>
+          <a:xfrm>
+            <a:off x="800100" y="723900"/>
+            <a:ext cx="10591800" cy="0"/>
+          </a:xfrm>
+          <a:prstGeom prst="line">
+            <a:avLst/>
+          </a:prstGeom>
+          <a:ln w="44450">
+            <a:solidFill>
+              <a:schemeClr val="tx1"/>
+            </a:solidFill>
+          </a:ln>
+        </p:spPr>
+        <p:style>
+          <a:lnRef idx="1">
+            <a:schemeClr val="accent1"/>
+          </a:lnRef>
+          <a:fillRef idx="0">
+            <a:schemeClr val="accent1"/>
+          </a:fillRef>
+          <a:effectRef idx="0">
+            <a:schemeClr val="accent1"/>
+          </a:effectRef>
+          <a:fontRef idx="minor">
+            <a:schemeClr val="tx1"/>
+          </a:fontRef>
+        </p:style>
+      </p:cxnSp>
+      <p:cxnSp>
+        <p:nvCxnSpPr>
+          <p:cNvPr id="12" name="Straight Connector 11">
+            <a:extLst>
+              <a:ext uri="{FF2B5EF4-FFF2-40B4-BE49-F238E27FC236}">
+                <a16:creationId xmlns:a16="http://schemas.microsoft.com/office/drawing/2014/main" id="{085AA86F-6A4D-4BCB-A045-D992CDC2959B}"/>
+              </a:ext>
+              <a:ext uri="{C183D7F6-B498-43B3-948B-1728B52AA6E4}">
+                <adec:decorative xmlns:adec="http://schemas.microsoft.com/office/drawing/2017/decorative" val="1"/>
+              </a:ext>
+            </a:extLst>
+          </p:cNvPr>
+          <p:cNvCxnSpPr>
+            <a:cxnSpLocks noGrp="1" noRot="1" noChangeAspect="1" noMove="1" noResize="1" noEditPoints="1" noAdjustHandles="1" noChangeArrowheads="1" noChangeShapeType="1"/>
+          </p:cNvCxnSpPr>
+          <p:nvPr>
+            <p:extLst>
+              <p:ext uri="{386F3935-93C4-4BCD-93E2-E3B085C9AB24}">
+                <p16:designElem xmlns:p16="http://schemas.microsoft.com/office/powerpoint/2015/main" val="1"/>
+              </p:ext>
+            </p:extLst>
+          </p:nvPr>
+        </p:nvCxnSpPr>
+        <p:spPr>
+          <a:xfrm>
+            <a:off x="800100" y="6142781"/>
+            <a:ext cx="10591800" cy="0"/>
+          </a:xfrm>
+          <a:prstGeom prst="line">
+            <a:avLst/>
+          </a:prstGeom>
+          <a:ln w="12700">
+            <a:solidFill>
+              <a:schemeClr val="tx1"/>
+            </a:solidFill>
+          </a:ln>
+        </p:spPr>
+        <p:style>
+          <a:lnRef idx="1">
+            <a:schemeClr val="accent1"/>
+          </a:lnRef>
+          <a:fillRef idx="0">
+            <a:schemeClr val="accent1"/>
+          </a:fillRef>
+          <a:effectRef idx="0">
+            <a:schemeClr val="accent1"/>
+          </a:effectRef>
+          <a:fontRef idx="minor">
+            <a:schemeClr val="tx1"/>
+          </a:fontRef>
+        </p:style>
+      </p:cxnSp>
+      <p:sp useBgFill="1">
+        <p:nvSpPr>
+          <p:cNvPr id="14" name="Rectangle 13">
+            <a:extLst>
+              <a:ext uri="{FF2B5EF4-FFF2-40B4-BE49-F238E27FC236}">
+                <a16:creationId xmlns:a16="http://schemas.microsoft.com/office/drawing/2014/main" id="{33E93247-6229-44AB-A550-739E971E690B}"/>
+              </a:ext>
+              <a:ext uri="{C183D7F6-B498-43B3-948B-1728B52AA6E4}">
+                <adec:decorative xmlns:adec="http://schemas.microsoft.com/office/drawing/2017/decorative" val="1"/>
+              </a:ext>
+            </a:extLst>
+          </p:cNvPr>
+          <p:cNvSpPr>
+            <a:spLocks noGrp="1" noRot="1" noChangeAspect="1" noMove="1" noResize="1" noEditPoints="1" noAdjustHandles="1" noChangeArrowheads="1" noChangeShapeType="1" noTextEdit="1"/>
+          </p:cNvSpPr>
+          <p:nvPr>
+            <p:extLst>
+              <p:ext uri="{386F3935-93C4-4BCD-93E2-E3B085C9AB24}">
+                <p16:designElem xmlns:p16="http://schemas.microsoft.com/office/powerpoint/2015/main" val="1"/>
+              </p:ext>
+            </p:extLst>
+          </p:nvPr>
+        </p:nvSpPr>
+        <p:spPr>
+          <a:xfrm>
+            <a:off x="0" y="0"/>
+            <a:ext cx="12192000" cy="6858000"/>
+          </a:xfrm>
+          <a:prstGeom prst="rect">
+            <a:avLst/>
+          </a:prstGeom>
+          <a:ln w="12700" cap="flat" cmpd="sng" algn="ctr">
+            <a:noFill/>
+            <a:prstDash val="solid"/>
+            <a:miter lim="800000"/>
+          </a:ln>
+          <a:effectLst/>
+          <a:extLst>
+            <a:ext uri="{91240B29-F687-4F45-9708-019B960494DF}">
+              <a14:hiddenLine xmlns:a14="http://schemas.microsoft.com/office/drawing/2010/main" w="12700" cap="flat" cmpd="sng" algn="ctr">
+                <a:solidFill>
+                  <a:schemeClr val="accent1">
+                    <a:shade val="50000"/>
+                  </a:schemeClr>
+                </a:solidFill>
+                <a:prstDash val="solid"/>
+                <a:miter lim="800000"/>
+              </a14:hiddenLine>
+            </a:ext>
+          </a:extLst>
+        </p:spPr>
+        <p:style>
+          <a:lnRef idx="2">
+            <a:schemeClr val="accent1">
+              <a:shade val="50000"/>
+            </a:schemeClr>
+          </a:lnRef>
+          <a:fillRef idx="1">
+            <a:schemeClr val="accent1"/>
+          </a:fillRef>
+          <a:effectRef idx="0">
+            <a:schemeClr val="accent1"/>
+          </a:effectRef>
+          <a:fontRef idx="minor">
+            <a:schemeClr val="lt1"/>
+          </a:fontRef>
+        </p:style>
+        <p:txBody>
+          <a:bodyPr rtlCol="0" anchor="ctr"/>
+          <a:lstStyle/>
+          <a:p>
+            <a:pPr algn="ctr"/>
+            <a:endParaRPr lang="en-US"/>
+          </a:p>
+        </p:txBody>
+      </p:sp>
+      <p:sp>
+        <p:nvSpPr>
+          <p:cNvPr id="2" name="Título 1">
+            <a:extLst>
+              <a:ext uri="{FF2B5EF4-FFF2-40B4-BE49-F238E27FC236}">
+                <a16:creationId xmlns:a16="http://schemas.microsoft.com/office/drawing/2014/main" id="{72FFF8EE-A697-233B-FDA7-3FCAF65B1C96}"/>
+              </a:ext>
+            </a:extLst>
+          </p:cNvPr>
+          <p:cNvSpPr>
+            <a:spLocks noGrp="1"/>
+          </p:cNvSpPr>
+          <p:nvPr>
+            <p:ph type="title"/>
+          </p:nvPr>
+        </p:nvSpPr>
+        <p:spPr>
+          <a:xfrm>
+            <a:off x="685800" y="899024"/>
+            <a:ext cx="3076032" cy="3914947"/>
+          </a:xfrm>
+        </p:spPr>
+        <p:txBody>
+          <a:bodyPr vert="horz" lIns="91440" tIns="45720" rIns="91440" bIns="45720" rtlCol="0" anchor="t">
+            <a:normAutofit/>
+          </a:bodyPr>
+          <a:lstStyle/>
+          <a:p>
+            <a:r>
+              <a:rPr lang="en-US"/>
+              <a:t>Template</a:t>
+            </a:r>
+          </a:p>
+        </p:txBody>
+      </p:sp>
+      <p:sp>
+        <p:nvSpPr>
+          <p:cNvPr id="3" name="Marcador de Posição de Conteúdo 2">
+            <a:extLst>
+              <a:ext uri="{FF2B5EF4-FFF2-40B4-BE49-F238E27FC236}">
+                <a16:creationId xmlns:a16="http://schemas.microsoft.com/office/drawing/2014/main" id="{6956C471-229C-0860-1EDD-8983E220546A}"/>
+              </a:ext>
+            </a:extLst>
+          </p:cNvPr>
+          <p:cNvSpPr>
+            <a:spLocks noGrp="1"/>
+          </p:cNvSpPr>
+          <p:nvPr>
+            <p:ph idx="1"/>
+          </p:nvPr>
+        </p:nvSpPr>
+        <p:spPr>
+          <a:xfrm>
+            <a:off x="729624" y="4914199"/>
+            <a:ext cx="2703583" cy="965440"/>
+          </a:xfrm>
+        </p:spPr>
+        <p:txBody>
+          <a:bodyPr vert="horz" lIns="91440" tIns="45720" rIns="91440" bIns="45720" rtlCol="0" anchor="b">
+            <a:normAutofit/>
+          </a:bodyPr>
+          <a:lstStyle/>
+          <a:p>
+            <a:pPr marL="0" indent="0">
+              <a:buNone/>
+            </a:pPr>
+            <a:r>
+              <a:rPr lang="en-US" sz="1800" dirty="0"/>
+              <a:t>Top nav:</a:t>
+            </a:r>
+          </a:p>
+        </p:txBody>
+      </p:sp>
+      <p:cxnSp>
+        <p:nvCxnSpPr>
+          <p:cNvPr id="16" name="Straight Connector 15">
+            <a:extLst>
+              <a:ext uri="{FF2B5EF4-FFF2-40B4-BE49-F238E27FC236}">
+                <a16:creationId xmlns:a16="http://schemas.microsoft.com/office/drawing/2014/main" id="{EE2E603F-4A95-4FE8-BB06-211DFD75DBEF}"/>
+              </a:ext>
+              <a:ext uri="{C183D7F6-B498-43B3-948B-1728B52AA6E4}">
+                <adec:decorative xmlns:adec="http://schemas.microsoft.com/office/drawing/2017/decorative" val="1"/>
+              </a:ext>
+            </a:extLst>
+          </p:cNvPr>
+          <p:cNvCxnSpPr>
+            <a:cxnSpLocks noGrp="1" noRot="1" noChangeAspect="1" noMove="1" noResize="1" noEditPoints="1" noAdjustHandles="1" noChangeArrowheads="1" noChangeShapeType="1"/>
+          </p:cNvCxnSpPr>
+          <p:nvPr>
+            <p:extLst>
+              <p:ext uri="{386F3935-93C4-4BCD-93E2-E3B085C9AB24}">
+                <p16:designElem xmlns:p16="http://schemas.microsoft.com/office/powerpoint/2015/main" val="1"/>
+              </p:ext>
+            </p:extLst>
+          </p:nvPr>
+        </p:nvCxnSpPr>
+        <p:spPr>
+          <a:xfrm>
+            <a:off x="800100" y="723900"/>
+            <a:ext cx="1371600" cy="0"/>
+          </a:xfrm>
+          <a:prstGeom prst="line">
+            <a:avLst/>
+          </a:prstGeom>
+          <a:ln w="44450">
+            <a:solidFill>
+              <a:schemeClr val="tx1"/>
+            </a:solidFill>
+          </a:ln>
+        </p:spPr>
+        <p:style>
+          <a:lnRef idx="1">
+            <a:schemeClr val="accent1"/>
+          </a:lnRef>
+          <a:fillRef idx="0">
+            <a:schemeClr val="accent1"/>
+          </a:fillRef>
+          <a:effectRef idx="0">
+            <a:schemeClr val="accent1"/>
+          </a:effectRef>
+          <a:fontRef idx="minor">
+            <a:schemeClr val="tx1"/>
+          </a:fontRef>
+        </p:style>
+      </p:cxnSp>
+      <p:pic>
+        <p:nvPicPr>
+          <p:cNvPr id="5" name="Imagem 4">
+            <a:extLst>
+              <a:ext uri="{FF2B5EF4-FFF2-40B4-BE49-F238E27FC236}">
+                <a16:creationId xmlns:a16="http://schemas.microsoft.com/office/drawing/2014/main" id="{60BA3573-BF2B-AF70-3913-CA4F9B124144}"/>
+              </a:ext>
+            </a:extLst>
+          </p:cNvPr>
+          <p:cNvPicPr>
+            <a:picLocks noChangeAspect="1"/>
+          </p:cNvPicPr>
+          <p:nvPr/>
+        </p:nvPicPr>
+        <p:blipFill>
+          <a:blip r:embed="rId2"/>
+          <a:stretch>
+            <a:fillRect/>
+          </a:stretch>
+        </p:blipFill>
+        <p:spPr>
+          <a:xfrm>
+            <a:off x="4038600" y="772623"/>
+            <a:ext cx="7353299" cy="5312756"/>
+          </a:xfrm>
+          <a:prstGeom prst="rect">
+            <a:avLst/>
+          </a:prstGeom>
+        </p:spPr>
+      </p:pic>
+    </p:spTree>
+    <p:extLst>
+      <p:ext uri="{BB962C8B-B14F-4D97-AF65-F5344CB8AC3E}">
+        <p14:creationId xmlns:p14="http://schemas.microsoft.com/office/powerpoint/2010/main" val="2027987548"/>
+      </p:ext>
+    </p:extLst>
+  </p:cSld>
+  <p:clrMapOvr>
+    <a:masterClrMapping/>
+  </p:clrMapOvr>
+</p:sld>
+</file>
+
+<file path=ppt/slides/slide16.xml><?xml version="1.0" encoding="utf-8"?>
+<p:sld xmlns:a="http://schemas.openxmlformats.org/drawingml/2006/main" xmlns:r="http://schemas.openxmlformats.org/officeDocument/2006/relationships" xmlns:p="http://schemas.openxmlformats.org/presentationml/2006/main">
+  <p:cSld>
+    <p:bg>
+      <p:bgPr>
+        <a:solidFill>
+          <a:schemeClr val="bg1"/>
+        </a:solidFill>
+        <a:effectLst/>
+      </p:bgPr>
+    </p:bg>
+    <p:spTree>
+      <p:nvGrpSpPr>
+        <p:cNvPr id="1" name=""/>
+        <p:cNvGrpSpPr/>
+        <p:nvPr/>
+      </p:nvGrpSpPr>
+      <p:grpSpPr>
+        <a:xfrm>
+          <a:off x="0" y="0"/>
+          <a:ext cx="0" cy="0"/>
+          <a:chOff x="0" y="0"/>
+          <a:chExt cx="0" cy="0"/>
+        </a:xfrm>
+      </p:grpSpPr>
+      <p:sp useBgFill="1">
+        <p:nvSpPr>
+          <p:cNvPr id="9" name="Rectangle 8">
+            <a:extLst>
+              <a:ext uri="{FF2B5EF4-FFF2-40B4-BE49-F238E27FC236}">
+                <a16:creationId xmlns:a16="http://schemas.microsoft.com/office/drawing/2014/main" id="{F68B2C62-7648-4430-90D5-AE0F252AF113}"/>
+              </a:ext>
+              <a:ext uri="{C183D7F6-B498-43B3-948B-1728B52AA6E4}">
+                <adec:decorative xmlns:adec="http://schemas.microsoft.com/office/drawing/2017/decorative" val="1"/>
+              </a:ext>
+            </a:extLst>
+          </p:cNvPr>
+          <p:cNvSpPr>
+            <a:spLocks noGrp="1" noRot="1" noChangeAspect="1" noMove="1" noResize="1" noEditPoints="1" noAdjustHandles="1" noChangeArrowheads="1" noChangeShapeType="1" noTextEdit="1"/>
+          </p:cNvSpPr>
+          <p:nvPr>
+            <p:extLst>
+              <p:ext uri="{386F3935-93C4-4BCD-93E2-E3B085C9AB24}">
+                <p16:designElem xmlns:p16="http://schemas.microsoft.com/office/powerpoint/2015/main" val="1"/>
+              </p:ext>
+            </p:extLst>
+          </p:nvPr>
+        </p:nvSpPr>
+        <p:spPr>
+          <a:xfrm>
+            <a:off x="0" y="0"/>
+            <a:ext cx="12192000" cy="6858000"/>
+          </a:xfrm>
+          <a:prstGeom prst="rect">
+            <a:avLst/>
+          </a:prstGeom>
+          <a:ln w="12700" cap="flat" cmpd="sng" algn="ctr">
+            <a:noFill/>
+            <a:prstDash val="solid"/>
+            <a:miter lim="800000"/>
+          </a:ln>
+          <a:effectLst/>
+          <a:extLst>
+            <a:ext uri="{91240B29-F687-4F45-9708-019B960494DF}">
+              <a14:hiddenLine xmlns:a14="http://schemas.microsoft.com/office/drawing/2010/main" w="12700" cap="flat" cmpd="sng" algn="ctr">
+                <a:solidFill>
+                  <a:schemeClr val="accent1">
+                    <a:shade val="50000"/>
+                  </a:schemeClr>
+                </a:solidFill>
+                <a:prstDash val="solid"/>
+                <a:miter lim="800000"/>
+              </a14:hiddenLine>
+            </a:ext>
+          </a:extLst>
+        </p:spPr>
+        <p:style>
+          <a:lnRef idx="2">
+            <a:schemeClr val="accent1">
+              <a:shade val="50000"/>
+            </a:schemeClr>
+          </a:lnRef>
+          <a:fillRef idx="1">
+            <a:schemeClr val="accent1"/>
+          </a:fillRef>
+          <a:effectRef idx="0">
+            <a:schemeClr val="accent1"/>
+          </a:effectRef>
+          <a:fontRef idx="minor">
+            <a:schemeClr val="lt1"/>
+          </a:fontRef>
+        </p:style>
+        <p:txBody>
+          <a:bodyPr rtlCol="0" anchor="ctr"/>
+          <a:lstStyle/>
+          <a:p>
+            <a:pPr algn="ctr"/>
+            <a:endParaRPr lang="en-US"/>
+          </a:p>
+        </p:txBody>
+      </p:sp>
+      <p:sp>
+        <p:nvSpPr>
+          <p:cNvPr id="2" name="Título 1">
+            <a:extLst>
+              <a:ext uri="{FF2B5EF4-FFF2-40B4-BE49-F238E27FC236}">
+                <a16:creationId xmlns:a16="http://schemas.microsoft.com/office/drawing/2014/main" id="{A8C98591-BE88-21DE-AEB4-0BF0FBEBE950}"/>
+              </a:ext>
+            </a:extLst>
+          </p:cNvPr>
+          <p:cNvSpPr>
+            <a:spLocks noGrp="1"/>
+          </p:cNvSpPr>
+          <p:nvPr>
+            <p:ph type="title"/>
+          </p:nvPr>
+        </p:nvSpPr>
+        <p:spPr>
+          <a:xfrm>
+            <a:off x="700087" y="909638"/>
+            <a:ext cx="10691813" cy="1155618"/>
+          </a:xfrm>
+        </p:spPr>
+        <p:txBody>
+          <a:bodyPr>
+            <a:normAutofit/>
+          </a:bodyPr>
+          <a:lstStyle/>
+          <a:p>
+            <a:r>
+              <a:rPr lang="pt-PT" dirty="0" err="1"/>
+              <a:t>Documentation</a:t>
+            </a:r>
+            <a:endParaRPr lang="pt-PT" dirty="0"/>
+          </a:p>
+        </p:txBody>
+      </p:sp>
+      <p:cxnSp>
+        <p:nvCxnSpPr>
+          <p:cNvPr id="11" name="Straight Connector 10">
+            <a:extLst>
+              <a:ext uri="{FF2B5EF4-FFF2-40B4-BE49-F238E27FC236}">
+                <a16:creationId xmlns:a16="http://schemas.microsoft.com/office/drawing/2014/main" id="{AAD0195E-7F27-4D06-9427-0C121D721A14}"/>
+              </a:ext>
+              <a:ext uri="{C183D7F6-B498-43B3-948B-1728B52AA6E4}">
+                <adec:decorative xmlns:adec="http://schemas.microsoft.com/office/drawing/2017/decorative" val="1"/>
+              </a:ext>
+            </a:extLst>
+          </p:cNvPr>
+          <p:cNvCxnSpPr>
+            <a:cxnSpLocks noGrp="1" noRot="1" noChangeAspect="1" noMove="1" noResize="1" noEditPoints="1" noAdjustHandles="1" noChangeArrowheads="1" noChangeShapeType="1"/>
+          </p:cNvCxnSpPr>
+          <p:nvPr>
+            <p:extLst>
+              <p:ext uri="{386F3935-93C4-4BCD-93E2-E3B085C9AB24}">
+                <p16:designElem xmlns:p16="http://schemas.microsoft.com/office/powerpoint/2015/main" val="1"/>
+              </p:ext>
+            </p:extLst>
+          </p:nvPr>
+        </p:nvCxnSpPr>
+        <p:spPr>
+          <a:xfrm>
+            <a:off x="800100" y="723900"/>
+            <a:ext cx="10591800" cy="0"/>
+          </a:xfrm>
+          <a:prstGeom prst="line">
+            <a:avLst/>
+          </a:prstGeom>
+          <a:ln w="44450">
+            <a:solidFill>
+              <a:schemeClr val="tx1"/>
+            </a:solidFill>
+          </a:ln>
+        </p:spPr>
+        <p:style>
+          <a:lnRef idx="1">
+            <a:schemeClr val="accent1"/>
+          </a:lnRef>
+          <a:fillRef idx="0">
+            <a:schemeClr val="accent1"/>
+          </a:fillRef>
+          <a:effectRef idx="0">
+            <a:schemeClr val="accent1"/>
+          </a:effectRef>
+          <a:fontRef idx="minor">
+            <a:schemeClr val="tx1"/>
+          </a:fontRef>
+        </p:style>
+      </p:cxnSp>
+      <p:cxnSp>
+        <p:nvCxnSpPr>
+          <p:cNvPr id="13" name="Straight Connector 12">
+            <a:extLst>
+              <a:ext uri="{FF2B5EF4-FFF2-40B4-BE49-F238E27FC236}">
+                <a16:creationId xmlns:a16="http://schemas.microsoft.com/office/drawing/2014/main" id="{9D74C2FC-3228-4FC1-B97B-87AD35508D91}"/>
+              </a:ext>
+              <a:ext uri="{C183D7F6-B498-43B3-948B-1728B52AA6E4}">
+                <adec:decorative xmlns:adec="http://schemas.microsoft.com/office/drawing/2017/decorative" val="1"/>
+              </a:ext>
+            </a:extLst>
+          </p:cNvPr>
+          <p:cNvCxnSpPr>
+            <a:cxnSpLocks noGrp="1" noRot="1" noChangeAspect="1" noMove="1" noResize="1" noEditPoints="1" noAdjustHandles="1" noChangeArrowheads="1" noChangeShapeType="1"/>
+          </p:cNvCxnSpPr>
+          <p:nvPr>
+            <p:extLst>
+              <p:ext uri="{386F3935-93C4-4BCD-93E2-E3B085C9AB24}">
+                <p16:designElem xmlns:p16="http://schemas.microsoft.com/office/powerpoint/2015/main" val="1"/>
+              </p:ext>
+            </p:extLst>
+          </p:nvPr>
+        </p:nvCxnSpPr>
+        <p:spPr>
+          <a:xfrm>
+            <a:off x="800100" y="6142781"/>
+            <a:ext cx="10591800" cy="0"/>
+          </a:xfrm>
+          <a:prstGeom prst="line">
+            <a:avLst/>
+          </a:prstGeom>
+          <a:ln w="12700">
+            <a:solidFill>
+              <a:schemeClr val="tx1"/>
+            </a:solidFill>
+          </a:ln>
+        </p:spPr>
+        <p:style>
+          <a:lnRef idx="1">
+            <a:schemeClr val="accent1"/>
+          </a:lnRef>
+          <a:fillRef idx="0">
+            <a:schemeClr val="accent1"/>
+          </a:fillRef>
+          <a:effectRef idx="0">
+            <a:schemeClr val="accent1"/>
+          </a:effectRef>
+          <a:fontRef idx="minor">
+            <a:schemeClr val="tx1"/>
+          </a:fontRef>
+        </p:style>
+      </p:cxnSp>
+      <p:graphicFrame>
+        <p:nvGraphicFramePr>
+          <p:cNvPr id="5" name="Marcador de Posição de Conteúdo 2">
+            <a:extLst>
+              <a:ext uri="{FF2B5EF4-FFF2-40B4-BE49-F238E27FC236}">
+                <a16:creationId xmlns:a16="http://schemas.microsoft.com/office/drawing/2014/main" id="{96C82AFA-7349-DC5E-3D6D-00150156A40F}"/>
+              </a:ext>
+            </a:extLst>
+          </p:cNvPr>
+          <p:cNvGraphicFramePr>
+            <a:graphicFrameLocks noGrp="1"/>
+          </p:cNvGraphicFramePr>
+          <p:nvPr>
+            <p:ph idx="1"/>
+            <p:extLst>
+              <p:ext uri="{D42A27DB-BD31-4B8C-83A1-F6EECF244321}">
+                <p14:modId xmlns:p14="http://schemas.microsoft.com/office/powerpoint/2010/main" val="3132719132"/>
+              </p:ext>
+            </p:extLst>
+          </p:nvPr>
+        </p:nvGraphicFramePr>
+        <p:xfrm>
+          <a:off x="700088" y="2222500"/>
+          <a:ext cx="10691812" cy="3740150"/>
+        </p:xfrm>
+        <a:graphic>
+          <a:graphicData uri="http://schemas.openxmlformats.org/drawingml/2006/diagram">
+            <dgm:relIds xmlns:dgm="http://schemas.openxmlformats.org/drawingml/2006/diagram" xmlns:r="http://schemas.openxmlformats.org/officeDocument/2006/relationships" r:dm="rId2" r:lo="rId3" r:qs="rId4" r:cs="rId5"/>
+          </a:graphicData>
+        </a:graphic>
+      </p:graphicFrame>
+    </p:spTree>
+    <p:extLst>
+      <p:ext uri="{BB962C8B-B14F-4D97-AF65-F5344CB8AC3E}">
+        <p14:creationId xmlns:p14="http://schemas.microsoft.com/office/powerpoint/2010/main" val="655374669"/>
+      </p:ext>
+    </p:extLst>
+  </p:cSld>
+  <p:clrMapOvr>
+    <a:masterClrMapping/>
+  </p:clrMapOvr>
+</p:sld>
+</file>
+
+<file path=ppt/slides/slide17.xml><?xml version="1.0" encoding="utf-8"?>
+<p:sld xmlns:a="http://schemas.openxmlformats.org/drawingml/2006/main" xmlns:r="http://schemas.openxmlformats.org/officeDocument/2006/relationships" xmlns:p="http://schemas.openxmlformats.org/presentationml/2006/main">
+  <p:cSld>
+    <p:bg>
+      <p:bgPr>
+        <a:solidFill>
+          <a:schemeClr val="bg1"/>
+        </a:solidFill>
+        <a:effectLst/>
+      </p:bgPr>
+    </p:bg>
+    <p:spTree>
+      <p:nvGrpSpPr>
+        <p:cNvPr id="1" name=""/>
+        <p:cNvGrpSpPr/>
+        <p:nvPr/>
+      </p:nvGrpSpPr>
+      <p:grpSpPr>
+        <a:xfrm>
+          <a:off x="0" y="0"/>
+          <a:ext cx="0" cy="0"/>
+          <a:chOff x="0" y="0"/>
+          <a:chExt cx="0" cy="0"/>
+        </a:xfrm>
+      </p:grpSpPr>
       <p:sp useBgFill="1">
         <p:nvSpPr>
           <p:cNvPr id="9" name="Rectangle 8">
@@ -10987,8 +14517,13 @@
           <a:p>
             <a:r>
               <a:rPr lang="pt-PT" dirty="0"/>
-              <a:t>Conclusões finais</a:t>
-            </a:r>
+              <a:t>Final </a:t>
+            </a:r>
+            <a:r>
+              <a:rPr lang="pt-PT" dirty="0" err="1"/>
+              <a:t>conclusions</a:t>
+            </a:r>
+            <a:endParaRPr lang="pt-PT" dirty="0"/>
           </a:p>
         </p:txBody>
       </p:sp>
@@ -11105,7 +14640,167 @@
           <a:p>
             <a:r>
               <a:rPr lang="pt-PT" dirty="0"/>
-              <a:t>Tive as minhas dificuldades, consegui ultrapassar, consegui ter uma noção melhor de como se trabalha num projeto real e como pode ser vantajoso o </a:t>
+              <a:t>I </a:t>
+            </a:r>
+            <a:r>
+              <a:rPr lang="pt-PT" dirty="0" err="1"/>
+              <a:t>ran</a:t>
+            </a:r>
+            <a:r>
+              <a:rPr lang="pt-PT" dirty="0"/>
+              <a:t> </a:t>
+            </a:r>
+            <a:r>
+              <a:rPr lang="pt-PT" dirty="0" err="1"/>
+              <a:t>into</a:t>
+            </a:r>
+            <a:r>
+              <a:rPr lang="pt-PT" dirty="0"/>
+              <a:t> some </a:t>
+            </a:r>
+            <a:r>
+              <a:rPr lang="pt-PT" dirty="0" err="1"/>
+              <a:t>challenges</a:t>
+            </a:r>
+            <a:r>
+              <a:rPr lang="pt-PT" dirty="0"/>
+              <a:t>, </a:t>
+            </a:r>
+            <a:r>
+              <a:rPr lang="pt-PT" dirty="0" err="1"/>
+              <a:t>but</a:t>
+            </a:r>
+            <a:r>
+              <a:rPr lang="pt-PT" dirty="0"/>
+              <a:t> I </a:t>
+            </a:r>
+            <a:r>
+              <a:rPr lang="pt-PT" dirty="0" err="1"/>
+              <a:t>managed</a:t>
+            </a:r>
+            <a:r>
+              <a:rPr lang="pt-PT" dirty="0"/>
+              <a:t> to </a:t>
+            </a:r>
+            <a:r>
+              <a:rPr lang="pt-PT" dirty="0" err="1"/>
+              <a:t>overcome</a:t>
+            </a:r>
+            <a:r>
+              <a:rPr lang="pt-PT" dirty="0"/>
+              <a:t> </a:t>
+            </a:r>
+            <a:r>
+              <a:rPr lang="pt-PT" dirty="0" err="1"/>
+              <a:t>them</a:t>
+            </a:r>
+            <a:r>
+              <a:rPr lang="pt-PT" dirty="0"/>
+              <a:t>. I </a:t>
+            </a:r>
+            <a:r>
+              <a:rPr lang="pt-PT" dirty="0" err="1"/>
+              <a:t>gained</a:t>
+            </a:r>
+            <a:r>
+              <a:rPr lang="pt-PT" dirty="0"/>
+              <a:t> a </a:t>
+            </a:r>
+            <a:r>
+              <a:rPr lang="pt-PT" dirty="0" err="1"/>
+              <a:t>better</a:t>
+            </a:r>
+            <a:r>
+              <a:rPr lang="pt-PT" dirty="0"/>
+              <a:t> </a:t>
+            </a:r>
+            <a:r>
+              <a:rPr lang="pt-PT" dirty="0" err="1"/>
+              <a:t>understanding</a:t>
+            </a:r>
+            <a:r>
+              <a:rPr lang="pt-PT" dirty="0"/>
+              <a:t> </a:t>
+            </a:r>
+            <a:r>
+              <a:rPr lang="pt-PT" dirty="0" err="1"/>
+              <a:t>of</a:t>
+            </a:r>
+            <a:r>
+              <a:rPr lang="pt-PT" dirty="0"/>
+              <a:t> </a:t>
+            </a:r>
+            <a:r>
+              <a:rPr lang="pt-PT" dirty="0" err="1"/>
+              <a:t>how</a:t>
+            </a:r>
+            <a:r>
+              <a:rPr lang="pt-PT" dirty="0"/>
+              <a:t> to </a:t>
+            </a:r>
+            <a:r>
+              <a:rPr lang="pt-PT" dirty="0" err="1"/>
+              <a:t>work</a:t>
+            </a:r>
+            <a:r>
+              <a:rPr lang="pt-PT" dirty="0"/>
+              <a:t> </a:t>
+            </a:r>
+            <a:r>
+              <a:rPr lang="pt-PT" dirty="0" err="1"/>
+              <a:t>on</a:t>
+            </a:r>
+            <a:r>
+              <a:rPr lang="pt-PT" dirty="0"/>
+              <a:t> a real-</a:t>
+            </a:r>
+            <a:r>
+              <a:rPr lang="pt-PT" dirty="0" err="1"/>
+              <a:t>world</a:t>
+            </a:r>
+            <a:r>
+              <a:rPr lang="pt-PT" dirty="0"/>
+              <a:t> </a:t>
+            </a:r>
+            <a:r>
+              <a:rPr lang="pt-PT" dirty="0" err="1"/>
+              <a:t>project</a:t>
+            </a:r>
+            <a:r>
+              <a:rPr lang="pt-PT" dirty="0"/>
+              <a:t> </a:t>
+            </a:r>
+            <a:r>
+              <a:rPr lang="pt-PT" dirty="0" err="1"/>
+              <a:t>and</a:t>
+            </a:r>
+            <a:r>
+              <a:rPr lang="pt-PT" dirty="0"/>
+              <a:t> </a:t>
+            </a:r>
+            <a:r>
+              <a:rPr lang="pt-PT" dirty="0" err="1"/>
+              <a:t>how</a:t>
+            </a:r>
+            <a:r>
+              <a:rPr lang="pt-PT" dirty="0"/>
+              <a:t> </a:t>
+            </a:r>
+            <a:r>
+              <a:rPr lang="pt-PT" dirty="0" err="1"/>
+              <a:t>both</a:t>
+            </a:r>
+            <a:r>
+              <a:rPr lang="pt-PT" dirty="0"/>
+              <a:t> </a:t>
+            </a:r>
+            <a:r>
+              <a:rPr lang="pt-PT" dirty="0" err="1"/>
+              <a:t>Rocket’s</a:t>
+            </a:r>
+            <a:r>
+              <a:rPr lang="pt-PT" dirty="0"/>
+              <a:t> </a:t>
             </a:r>
             <a:r>
               <a:rPr lang="pt-PT" dirty="0" err="1"/>
@@ -11121,15 +14816,223 @@
             </a:r>
             <a:r>
               <a:rPr lang="pt-PT" dirty="0"/>
-              <a:t> do Rocket e o nosso de maneira a que só tenhamos de fazer as coisas uma vez e de que maneira  o projeto fica mais </a:t>
-            </a:r>
-            <a:r>
-              <a:rPr lang="pt-PT"/>
-              <a:t>limpo e escalável </a:t>
-            </a:r>
-            <a:r>
-              <a:rPr lang="pt-PT" dirty="0"/>
-              <a:t>caso o cliente queira trocar alguma coisa mínima.</a:t>
+              <a:t> </a:t>
+            </a:r>
+            <a:r>
+              <a:rPr lang="pt-PT" dirty="0" err="1"/>
+              <a:t>and</a:t>
+            </a:r>
+            <a:r>
+              <a:rPr lang="pt-PT" dirty="0"/>
+              <a:t> </a:t>
+            </a:r>
+            <a:r>
+              <a:rPr lang="pt-PT" dirty="0" err="1"/>
+              <a:t>our</a:t>
+            </a:r>
+            <a:r>
+              <a:rPr lang="pt-PT" dirty="0"/>
+              <a:t> </a:t>
+            </a:r>
+            <a:r>
+              <a:rPr lang="pt-PT" dirty="0" err="1"/>
+              <a:t>own</a:t>
+            </a:r>
+            <a:r>
+              <a:rPr lang="pt-PT" dirty="0"/>
+              <a:t> can </a:t>
+            </a:r>
+            <a:r>
+              <a:rPr lang="pt-PT" dirty="0" err="1"/>
+              <a:t>be</a:t>
+            </a:r>
+            <a:r>
+              <a:rPr lang="pt-PT" dirty="0"/>
+              <a:t> beneficial—</a:t>
+            </a:r>
+            <a:r>
+              <a:rPr lang="pt-PT" dirty="0" err="1"/>
+              <a:t>so</a:t>
+            </a:r>
+            <a:r>
+              <a:rPr lang="pt-PT" dirty="0"/>
+              <a:t> </a:t>
+            </a:r>
+            <a:r>
+              <a:rPr lang="pt-PT" dirty="0" err="1"/>
+              <a:t>that</a:t>
+            </a:r>
+            <a:r>
+              <a:rPr lang="pt-PT" dirty="0"/>
+              <a:t> </a:t>
+            </a:r>
+            <a:r>
+              <a:rPr lang="pt-PT" dirty="0" err="1"/>
+              <a:t>we</a:t>
+            </a:r>
+            <a:r>
+              <a:rPr lang="pt-PT" dirty="0"/>
+              <a:t> </a:t>
+            </a:r>
+            <a:r>
+              <a:rPr lang="pt-PT" dirty="0" err="1"/>
+              <a:t>only</a:t>
+            </a:r>
+            <a:r>
+              <a:rPr lang="pt-PT" dirty="0"/>
+              <a:t> </a:t>
+            </a:r>
+            <a:r>
+              <a:rPr lang="pt-PT" dirty="0" err="1"/>
+              <a:t>have</a:t>
+            </a:r>
+            <a:r>
+              <a:rPr lang="pt-PT" dirty="0"/>
+              <a:t> to do </a:t>
+            </a:r>
+            <a:r>
+              <a:rPr lang="pt-PT" dirty="0" err="1"/>
+              <a:t>things</a:t>
+            </a:r>
+            <a:r>
+              <a:rPr lang="pt-PT" dirty="0"/>
+              <a:t> </a:t>
+            </a:r>
+            <a:r>
+              <a:rPr lang="pt-PT" dirty="0" err="1"/>
+              <a:t>once</a:t>
+            </a:r>
+            <a:r>
+              <a:rPr lang="pt-PT" dirty="0"/>
+              <a:t>, </a:t>
+            </a:r>
+            <a:r>
+              <a:rPr lang="pt-PT" dirty="0" err="1"/>
+              <a:t>and</a:t>
+            </a:r>
+            <a:r>
+              <a:rPr lang="pt-PT" dirty="0"/>
+              <a:t> </a:t>
+            </a:r>
+            <a:r>
+              <a:rPr lang="pt-PT" dirty="0" err="1"/>
+              <a:t>so</a:t>
+            </a:r>
+            <a:r>
+              <a:rPr lang="pt-PT" dirty="0"/>
+              <a:t> </a:t>
+            </a:r>
+            <a:r>
+              <a:rPr lang="pt-PT" dirty="0" err="1"/>
+              <a:t>that</a:t>
+            </a:r>
+            <a:r>
+              <a:rPr lang="pt-PT" dirty="0"/>
+              <a:t> </a:t>
+            </a:r>
+            <a:r>
+              <a:rPr lang="pt-PT" dirty="0" err="1"/>
+              <a:t>the</a:t>
+            </a:r>
+            <a:r>
+              <a:rPr lang="pt-PT" dirty="0"/>
+              <a:t> </a:t>
+            </a:r>
+            <a:r>
+              <a:rPr lang="pt-PT" dirty="0" err="1"/>
+              <a:t>project</a:t>
+            </a:r>
+            <a:r>
+              <a:rPr lang="pt-PT" dirty="0"/>
+              <a:t> </a:t>
+            </a:r>
+            <a:r>
+              <a:rPr lang="pt-PT" dirty="0" err="1"/>
+              <a:t>remains</a:t>
+            </a:r>
+            <a:r>
+              <a:rPr lang="pt-PT" dirty="0"/>
+              <a:t> </a:t>
+            </a:r>
+            <a:r>
+              <a:rPr lang="pt-PT" dirty="0" err="1"/>
+              <a:t>cleaner</a:t>
+            </a:r>
+            <a:r>
+              <a:rPr lang="pt-PT" dirty="0"/>
+              <a:t> </a:t>
+            </a:r>
+            <a:r>
+              <a:rPr lang="pt-PT" dirty="0" err="1"/>
+              <a:t>and</a:t>
+            </a:r>
+            <a:r>
+              <a:rPr lang="pt-PT" dirty="0"/>
+              <a:t> more </a:t>
+            </a:r>
+            <a:r>
+              <a:rPr lang="pt-PT" dirty="0" err="1"/>
+              <a:t>scalable</a:t>
+            </a:r>
+            <a:r>
+              <a:rPr lang="pt-PT" dirty="0"/>
+              <a:t> in case </a:t>
+            </a:r>
+            <a:r>
+              <a:rPr lang="pt-PT" dirty="0" err="1"/>
+              <a:t>the</a:t>
+            </a:r>
+            <a:r>
+              <a:rPr lang="pt-PT" dirty="0"/>
+              <a:t> </a:t>
+            </a:r>
+            <a:r>
+              <a:rPr lang="pt-PT" dirty="0" err="1"/>
+              <a:t>client</a:t>
+            </a:r>
+            <a:r>
+              <a:rPr lang="pt-PT" dirty="0"/>
+              <a:t> </a:t>
+            </a:r>
+            <a:r>
+              <a:rPr lang="pt-PT" dirty="0" err="1"/>
+              <a:t>wants</a:t>
+            </a:r>
+            <a:r>
+              <a:rPr lang="pt-PT" dirty="0"/>
+              <a:t> to </a:t>
+            </a:r>
+            <a:r>
+              <a:rPr lang="pt-PT" dirty="0" err="1"/>
+              <a:t>make</a:t>
+            </a:r>
+            <a:r>
+              <a:rPr lang="pt-PT" dirty="0"/>
+              <a:t> </a:t>
+            </a:r>
+            <a:r>
+              <a:rPr lang="pt-PT" dirty="0" err="1"/>
+              <a:t>even</a:t>
+            </a:r>
+            <a:r>
+              <a:rPr lang="pt-PT" dirty="0"/>
+              <a:t> a </a:t>
+            </a:r>
+            <a:r>
+              <a:rPr lang="pt-PT" dirty="0" err="1"/>
+              <a:t>minor</a:t>
+            </a:r>
+            <a:r>
+              <a:rPr lang="pt-PT" dirty="0"/>
+              <a:t> </a:t>
+            </a:r>
+            <a:r>
+              <a:rPr lang="pt-PT" dirty="0" err="1"/>
+              <a:t>change</a:t>
+            </a:r>
+            <a:r>
+              <a:rPr lang="pt-PT" dirty="0"/>
+              <a:t>.</a:t>
             </a:r>
           </a:p>
         </p:txBody>
@@ -11277,9 +15180,10 @@
           <a:lstStyle/>
           <a:p>
             <a:r>
-              <a:rPr lang="pt-PT" dirty="0"/>
-              <a:t>Introdução</a:t>
-            </a:r>
+              <a:rPr lang="pt-PT" dirty="0" err="1"/>
+              <a:t>Introduction</a:t>
+            </a:r>
+            <a:endParaRPr lang="pt-PT" dirty="0"/>
           </a:p>
         </p:txBody>
       </p:sp>
@@ -11403,8 +15307,76 @@
           <a:lstStyle/>
           <a:p>
             <a:r>
-              <a:rPr lang="pt-PT" dirty="0"/>
-              <a:t>Este projeto teve como objetivo a criação de um </a:t>
+              <a:rPr lang="pt-PT" dirty="0" err="1"/>
+              <a:t>The</a:t>
+            </a:r>
+            <a:r>
+              <a:rPr lang="pt-PT" dirty="0"/>
+              <a:t> </a:t>
+            </a:r>
+            <a:r>
+              <a:rPr lang="pt-PT" dirty="0" err="1"/>
+              <a:t>goal</a:t>
+            </a:r>
+            <a:r>
+              <a:rPr lang="pt-PT" dirty="0"/>
+              <a:t> </a:t>
+            </a:r>
+            <a:r>
+              <a:rPr lang="pt-PT" dirty="0" err="1"/>
+              <a:t>of</a:t>
+            </a:r>
+            <a:r>
+              <a:rPr lang="pt-PT" dirty="0"/>
+              <a:t> </a:t>
+            </a:r>
+            <a:r>
+              <a:rPr lang="pt-PT" dirty="0" err="1"/>
+              <a:t>this</a:t>
+            </a:r>
+            <a:r>
+              <a:rPr lang="pt-PT" dirty="0"/>
+              <a:t> </a:t>
+            </a:r>
+            <a:r>
+              <a:rPr lang="pt-PT" dirty="0" err="1"/>
+              <a:t>project</a:t>
+            </a:r>
+            <a:r>
+              <a:rPr lang="pt-PT" dirty="0"/>
+              <a:t> </a:t>
+            </a:r>
+            <a:r>
+              <a:rPr lang="pt-PT" dirty="0" err="1"/>
+              <a:t>was</a:t>
+            </a:r>
+            <a:r>
+              <a:rPr lang="pt-PT" dirty="0"/>
+              <a:t> to </a:t>
+            </a:r>
+            <a:r>
+              <a:rPr lang="pt-PT" dirty="0" err="1"/>
+              <a:t>create</a:t>
+            </a:r>
+            <a:r>
+              <a:rPr lang="pt-PT" dirty="0"/>
+              <a:t> </a:t>
+            </a:r>
+            <a:r>
+              <a:rPr lang="pt-PT" dirty="0" err="1"/>
+              <a:t>an</a:t>
+            </a:r>
+            <a:r>
+              <a:rPr lang="pt-PT" dirty="0"/>
+              <a:t> </a:t>
+            </a:r>
+            <a:r>
+              <a:rPr lang="pt-PT" dirty="0" err="1"/>
+              <a:t>OutSystems</a:t>
+            </a:r>
+            <a:r>
+              <a:rPr lang="pt-PT" dirty="0"/>
+              <a:t> </a:t>
             </a:r>
             <a:r>
               <a:rPr lang="pt-PT" dirty="0" err="1"/>
@@ -11412,7 +15384,39 @@
             </a:r>
             <a:r>
               <a:rPr lang="pt-PT" dirty="0"/>
-              <a:t> Guide em </a:t>
+              <a:t> Guide for a </a:t>
+            </a:r>
+            <a:r>
+              <a:rPr lang="pt-PT" dirty="0" err="1"/>
+              <a:t>new</a:t>
+            </a:r>
+            <a:r>
+              <a:rPr lang="pt-PT" dirty="0"/>
+              <a:t> </a:t>
+            </a:r>
+            <a:r>
+              <a:rPr lang="pt-PT" dirty="0" err="1"/>
+              <a:t>client</a:t>
+            </a:r>
+            <a:r>
+              <a:rPr lang="pt-PT" dirty="0"/>
+              <a:t>, </a:t>
+            </a:r>
+            <a:r>
+              <a:rPr lang="pt-PT" dirty="0" err="1"/>
+              <a:t>MediaWeb</a:t>
+            </a:r>
+            <a:r>
+              <a:rPr lang="pt-PT" dirty="0"/>
+              <a:t>, </a:t>
+            </a:r>
+            <a:r>
+              <a:rPr lang="pt-PT" dirty="0" err="1"/>
+              <a:t>using</a:t>
+            </a:r>
+            <a:r>
+              <a:rPr lang="pt-PT" dirty="0"/>
+              <a:t> Rocket UI, </a:t>
             </a:r>
             <a:r>
               <a:rPr lang="pt-PT" dirty="0" err="1"/>
@@ -11420,23 +15424,71 @@
             </a:r>
             <a:r>
               <a:rPr lang="pt-PT" dirty="0"/>
-              <a:t> para um novo cliente no caso a </a:t>
-            </a:r>
-            <a:r>
-              <a:rPr lang="pt-PT" dirty="0" err="1"/>
-              <a:t>MediaWeb</a:t>
-            </a:r>
-            <a:r>
-              <a:rPr lang="pt-PT" dirty="0"/>
-              <a:t> , utilizando Rocket UI, o próprio </a:t>
-            </a:r>
-            <a:r>
-              <a:rPr lang="pt-PT" dirty="0" err="1"/>
-              <a:t>OutSystems</a:t>
-            </a:r>
-            <a:r>
-              <a:rPr lang="pt-PT" dirty="0"/>
-              <a:t> , SCSS e boas práticas de arquitetura, com base num design definido em </a:t>
+              <a:t> </a:t>
+            </a:r>
+            <a:r>
+              <a:rPr lang="pt-PT" dirty="0" err="1"/>
+              <a:t>itself</a:t>
+            </a:r>
+            <a:r>
+              <a:rPr lang="pt-PT" dirty="0"/>
+              <a:t>, SCSS, </a:t>
+            </a:r>
+            <a:r>
+              <a:rPr lang="pt-PT" dirty="0" err="1"/>
+              <a:t>and</a:t>
+            </a:r>
+            <a:r>
+              <a:rPr lang="pt-PT" dirty="0"/>
+              <a:t> </a:t>
+            </a:r>
+            <a:r>
+              <a:rPr lang="pt-PT" dirty="0" err="1"/>
+              <a:t>architectural</a:t>
+            </a:r>
+            <a:r>
+              <a:rPr lang="pt-PT" dirty="0"/>
+              <a:t> </a:t>
+            </a:r>
+            <a:r>
+              <a:rPr lang="pt-PT" dirty="0" err="1"/>
+              <a:t>best</a:t>
+            </a:r>
+            <a:r>
+              <a:rPr lang="pt-PT" dirty="0"/>
+              <a:t> </a:t>
+            </a:r>
+            <a:r>
+              <a:rPr lang="pt-PT" dirty="0" err="1"/>
+              <a:t>practices</a:t>
+            </a:r>
+            <a:r>
+              <a:rPr lang="pt-PT" dirty="0"/>
+              <a:t>, </a:t>
+            </a:r>
+            <a:r>
+              <a:rPr lang="pt-PT" dirty="0" err="1"/>
+              <a:t>based</a:t>
+            </a:r>
+            <a:r>
+              <a:rPr lang="pt-PT" dirty="0"/>
+              <a:t> </a:t>
+            </a:r>
+            <a:r>
+              <a:rPr lang="pt-PT" dirty="0" err="1"/>
+              <a:t>on</a:t>
+            </a:r>
+            <a:r>
+              <a:rPr lang="pt-PT" dirty="0"/>
+              <a:t> a design </a:t>
+            </a:r>
+            <a:r>
+              <a:rPr lang="pt-PT" dirty="0" err="1"/>
+              <a:t>created</a:t>
+            </a:r>
+            <a:r>
+              <a:rPr lang="pt-PT" dirty="0"/>
+              <a:t> in </a:t>
             </a:r>
             <a:r>
               <a:rPr lang="pt-PT" dirty="0" err="1"/>
@@ -11444,16 +15496,79 @@
             </a:r>
             <a:r>
               <a:rPr lang="pt-PT" dirty="0"/>
-              <a:t>, colocando em pratica tudo o que aprendi no </a:t>
-            </a:r>
-            <a:r>
-              <a:rPr lang="pt-PT" dirty="0" err="1"/>
-              <a:t>Ramp-up</a:t>
+              <a:t>, </a:t>
+            </a:r>
+            <a:r>
+              <a:rPr lang="pt-PT" dirty="0" err="1"/>
+              <a:t>putting</a:t>
+            </a:r>
+            <a:r>
+              <a:rPr lang="pt-PT" dirty="0"/>
+              <a:t> </a:t>
+            </a:r>
+            <a:r>
+              <a:rPr lang="pt-PT" dirty="0" err="1"/>
+              <a:t>into</a:t>
+            </a:r>
+            <a:r>
+              <a:rPr lang="pt-PT" dirty="0"/>
+              <a:t> </a:t>
+            </a:r>
+            <a:r>
+              <a:rPr lang="pt-PT" dirty="0" err="1"/>
+              <a:t>practice</a:t>
+            </a:r>
+            <a:r>
+              <a:rPr lang="pt-PT" dirty="0"/>
+              <a:t> </a:t>
+            </a:r>
+            <a:r>
+              <a:rPr lang="pt-PT" dirty="0" err="1"/>
+              <a:t>everything</a:t>
+            </a:r>
+            <a:r>
+              <a:rPr lang="pt-PT" dirty="0"/>
+              <a:t> I </a:t>
+            </a:r>
+            <a:r>
+              <a:rPr lang="pt-PT" dirty="0" err="1"/>
+              <a:t>learned</a:t>
+            </a:r>
+            <a:r>
+              <a:rPr lang="pt-PT" dirty="0"/>
+              <a:t> </a:t>
+            </a:r>
+            <a:r>
+              <a:rPr lang="pt-PT" dirty="0" err="1"/>
+              <a:t>during</a:t>
+            </a:r>
+            <a:r>
+              <a:rPr lang="pt-PT" dirty="0"/>
+              <a:t> </a:t>
+            </a:r>
+            <a:r>
+              <a:rPr lang="pt-PT" dirty="0" err="1"/>
+              <a:t>the</a:t>
+            </a:r>
+            <a:r>
+              <a:rPr lang="pt-PT" dirty="0"/>
+              <a:t> </a:t>
+            </a:r>
+            <a:r>
+              <a:rPr lang="pt-PT" dirty="0" err="1"/>
+              <a:t>ramp-up</a:t>
             </a:r>
             <a:r>
               <a:rPr lang="pt-PT" dirty="0"/>
               <a:t>.</a:t>
             </a:r>
+            <a:br>
+              <a:rPr lang="pt-PT" dirty="0"/>
+            </a:br>
+            <a:endParaRPr lang="pt-PT" dirty="0"/>
+          </a:p>
+          <a:p>
+            <a:endParaRPr lang="pt-PT" dirty="0"/>
           </a:p>
         </p:txBody>
       </p:sp>
@@ -11600,13 +15715,20 @@
           <a:lstStyle/>
           <a:p>
             <a:r>
-              <a:rPr lang="pt-PT" dirty="0"/>
-              <a:t>Instalação Do </a:t>
-            </a:r>
-            <a:r>
-              <a:rPr lang="pt-PT" dirty="0" err="1"/>
-              <a:t>RocketUi</a:t>
-            </a:r>
+              <a:rPr lang="pt-PT" dirty="0" err="1"/>
+              <a:t>Installing</a:t>
+            </a:r>
+            <a:r>
+              <a:rPr lang="pt-PT" dirty="0"/>
+              <a:t> </a:t>
+            </a:r>
+            <a:r>
+              <a:rPr lang="pt-PT" dirty="0" err="1"/>
+              <a:t>RocketUI</a:t>
+            </a:r>
+            <a:br>
+              <a:rPr lang="pt-PT" dirty="0"/>
+            </a:br>
             <a:endParaRPr lang="pt-PT" dirty="0"/>
           </a:p>
         </p:txBody>
@@ -11726,59 +15848,217 @@
         </p:spPr>
         <p:txBody>
           <a:bodyPr>
-            <a:normAutofit/>
+            <a:normAutofit fontScale="92500"/>
           </a:bodyPr>
           <a:lstStyle/>
           <a:p>
-            <a:pPr marL="0" indent="0">
-              <a:lnSpc>
-                <a:spcPct val="100000"/>
-              </a:lnSpc>
-              <a:buNone/>
-            </a:pPr>
-            <a:r>
-              <a:rPr lang="pt-PT" dirty="0"/>
-              <a:t>Começamos por ir a </a:t>
-            </a:r>
-            <a:r>
-              <a:rPr lang="pt-PT" dirty="0" err="1"/>
-              <a:t>forge</a:t>
-            </a:r>
-            <a:r>
-              <a:rPr lang="pt-PT" dirty="0"/>
-              <a:t> do ”OS” baixar o </a:t>
-            </a:r>
-            <a:r>
-              <a:rPr lang="pt-PT" dirty="0" err="1"/>
-              <a:t>Rocketui</a:t>
-            </a:r>
-            <a:r>
-              <a:rPr lang="pt-PT" dirty="0"/>
-              <a:t> e o seu </a:t>
-            </a:r>
-            <a:r>
-              <a:rPr lang="pt-PT" dirty="0" err="1"/>
-              <a:t>styleguide</a:t>
-            </a:r>
-            <a:r>
-              <a:rPr lang="pt-PT" dirty="0"/>
-              <a:t>, depois criamos o nosso tema e ligamos o nosso tema ao </a:t>
-            </a:r>
-            <a:r>
-              <a:rPr lang="pt-PT" dirty="0" err="1"/>
-              <a:t>styleguide</a:t>
-            </a:r>
-            <a:r>
-              <a:rPr lang="pt-PT" dirty="0"/>
-              <a:t> do rocket, porque vamos utilizar o </a:t>
-            </a:r>
-            <a:r>
-              <a:rPr lang="pt-PT" dirty="0" err="1"/>
-              <a:t>styleguide</a:t>
-            </a:r>
-            <a:r>
-              <a:rPr lang="pt-PT" dirty="0"/>
-              <a:t> do </a:t>
+            <a:r>
+              <a:rPr lang="pt-PT" dirty="0" err="1"/>
+              <a:t>We</a:t>
+            </a:r>
+            <a:r>
+              <a:rPr lang="pt-PT" dirty="0"/>
+              <a:t> </a:t>
+            </a:r>
+            <a:r>
+              <a:rPr lang="pt-PT" dirty="0" err="1"/>
+              <a:t>start</a:t>
+            </a:r>
+            <a:r>
+              <a:rPr lang="pt-PT" dirty="0"/>
+              <a:t> </a:t>
+            </a:r>
+            <a:r>
+              <a:rPr lang="pt-PT" dirty="0" err="1"/>
+              <a:t>by</a:t>
+            </a:r>
+            <a:r>
+              <a:rPr lang="pt-PT" dirty="0"/>
+              <a:t> </a:t>
+            </a:r>
+            <a:r>
+              <a:rPr lang="pt-PT" dirty="0" err="1"/>
+              <a:t>going</a:t>
+            </a:r>
+            <a:r>
+              <a:rPr lang="pt-PT" dirty="0"/>
+              <a:t> to </a:t>
+            </a:r>
+            <a:r>
+              <a:rPr lang="pt-PT" dirty="0" err="1"/>
+              <a:t>the</a:t>
+            </a:r>
+            <a:r>
+              <a:rPr lang="pt-PT" dirty="0"/>
+              <a:t> “OS” </a:t>
+            </a:r>
+            <a:r>
+              <a:rPr lang="pt-PT" dirty="0" err="1"/>
+              <a:t>Forge</a:t>
+            </a:r>
+            <a:r>
+              <a:rPr lang="pt-PT" dirty="0"/>
+              <a:t> to download </a:t>
+            </a:r>
+            <a:r>
+              <a:rPr lang="pt-PT" dirty="0" err="1"/>
+              <a:t>RocketUI</a:t>
+            </a:r>
+            <a:r>
+              <a:rPr lang="pt-PT" dirty="0"/>
+              <a:t> </a:t>
+            </a:r>
+            <a:r>
+              <a:rPr lang="pt-PT" dirty="0" err="1"/>
+              <a:t>and</a:t>
+            </a:r>
+            <a:r>
+              <a:rPr lang="pt-PT" dirty="0"/>
+              <a:t> </a:t>
+            </a:r>
+            <a:r>
+              <a:rPr lang="pt-PT" dirty="0" err="1"/>
+              <a:t>its</a:t>
+            </a:r>
+            <a:r>
+              <a:rPr lang="pt-PT" dirty="0"/>
+              <a:t> </a:t>
+            </a:r>
+            <a:r>
+              <a:rPr lang="pt-PT" dirty="0" err="1"/>
+              <a:t>style</a:t>
+            </a:r>
+            <a:r>
+              <a:rPr lang="pt-PT" dirty="0"/>
+              <a:t> </a:t>
+            </a:r>
+            <a:r>
+              <a:rPr lang="pt-PT" dirty="0" err="1"/>
+              <a:t>guide</a:t>
+            </a:r>
+            <a:r>
+              <a:rPr lang="pt-PT" dirty="0"/>
+              <a:t>, </a:t>
+            </a:r>
+            <a:r>
+              <a:rPr lang="pt-PT" dirty="0" err="1"/>
+              <a:t>then</a:t>
+            </a:r>
+            <a:r>
+              <a:rPr lang="pt-PT" dirty="0"/>
+              <a:t> </a:t>
+            </a:r>
+            <a:r>
+              <a:rPr lang="pt-PT" dirty="0" err="1"/>
+              <a:t>we</a:t>
+            </a:r>
+            <a:r>
+              <a:rPr lang="pt-PT" dirty="0"/>
+              <a:t> </a:t>
+            </a:r>
+            <a:r>
+              <a:rPr lang="pt-PT" dirty="0" err="1"/>
+              <a:t>create</a:t>
+            </a:r>
+            <a:r>
+              <a:rPr lang="pt-PT" dirty="0"/>
+              <a:t> </a:t>
+            </a:r>
+            <a:r>
+              <a:rPr lang="pt-PT" dirty="0" err="1"/>
+              <a:t>our</a:t>
+            </a:r>
+            <a:r>
+              <a:rPr lang="pt-PT" dirty="0"/>
+              <a:t> </a:t>
+            </a:r>
+            <a:r>
+              <a:rPr lang="pt-PT" dirty="0" err="1"/>
+              <a:t>theme</a:t>
+            </a:r>
+            <a:r>
+              <a:rPr lang="pt-PT" dirty="0"/>
+              <a:t> </a:t>
+            </a:r>
+            <a:r>
+              <a:rPr lang="pt-PT" dirty="0" err="1"/>
+              <a:t>and</a:t>
+            </a:r>
+            <a:r>
+              <a:rPr lang="pt-PT" dirty="0"/>
+              <a:t> link </a:t>
+            </a:r>
+            <a:r>
+              <a:rPr lang="pt-PT" dirty="0" err="1"/>
+              <a:t>it</a:t>
+            </a:r>
+            <a:r>
+              <a:rPr lang="pt-PT" dirty="0"/>
+              <a:t> to </a:t>
+            </a:r>
+            <a:r>
+              <a:rPr lang="pt-PT" dirty="0" err="1"/>
+              <a:t>the</a:t>
+            </a:r>
+            <a:r>
+              <a:rPr lang="pt-PT" dirty="0"/>
+              <a:t> </a:t>
+            </a:r>
+            <a:r>
+              <a:rPr lang="pt-PT" dirty="0" err="1"/>
+              <a:t>RocketUI</a:t>
+            </a:r>
+            <a:r>
+              <a:rPr lang="pt-PT" dirty="0"/>
+              <a:t> </a:t>
+            </a:r>
+            <a:r>
+              <a:rPr lang="pt-PT" dirty="0" err="1"/>
+              <a:t>style</a:t>
+            </a:r>
+            <a:r>
+              <a:rPr lang="pt-PT" dirty="0"/>
+              <a:t> </a:t>
+            </a:r>
+            <a:r>
+              <a:rPr lang="pt-PT" dirty="0" err="1"/>
+              <a:t>guide</a:t>
+            </a:r>
+            <a:r>
+              <a:rPr lang="pt-PT" dirty="0"/>
+              <a:t>, </a:t>
+            </a:r>
+            <a:r>
+              <a:rPr lang="pt-PT" dirty="0" err="1"/>
+              <a:t>because</a:t>
+            </a:r>
+            <a:r>
+              <a:rPr lang="pt-PT" dirty="0"/>
+              <a:t> </a:t>
+            </a:r>
+            <a:r>
+              <a:rPr lang="pt-PT" dirty="0" err="1"/>
+              <a:t>we’re</a:t>
+            </a:r>
+            <a:r>
+              <a:rPr lang="pt-PT" dirty="0"/>
+              <a:t> </a:t>
+            </a:r>
+            <a:r>
+              <a:rPr lang="pt-PT" dirty="0" err="1"/>
+              <a:t>going</a:t>
+            </a:r>
+            <a:r>
+              <a:rPr lang="pt-PT" dirty="0"/>
+              <a:t> to use </a:t>
+            </a:r>
+            <a:r>
+              <a:rPr lang="pt-PT" dirty="0" err="1"/>
+              <a:t>the</a:t>
+            </a:r>
+            <a:r>
+              <a:rPr lang="pt-PT" dirty="0"/>
+              <a:t> </a:t>
             </a:r>
             <a:r>
               <a:rPr lang="pt-PT" dirty="0" err="1"/>
@@ -11786,15 +16066,159 @@
             </a:r>
             <a:r>
               <a:rPr lang="pt-PT" dirty="0"/>
-              <a:t>, que já foi em algumas partes alterado pelo </a:t>
-            </a:r>
-            <a:r>
-              <a:rPr lang="pt-PT" dirty="0" err="1"/>
-              <a:t>RocketUi</a:t>
-            </a:r>
-            <a:r>
-              <a:rPr lang="pt-PT" dirty="0"/>
-              <a:t> e por cima dele ainda vamos colocar as nossas alterações seja em layouts, </a:t>
+              <a:t> </a:t>
+            </a:r>
+            <a:r>
+              <a:rPr lang="pt-PT" dirty="0" err="1"/>
+              <a:t>style</a:t>
+            </a:r>
+            <a:r>
+              <a:rPr lang="pt-PT" dirty="0"/>
+              <a:t> </a:t>
+            </a:r>
+            <a:r>
+              <a:rPr lang="pt-PT" dirty="0" err="1"/>
+              <a:t>guide</a:t>
+            </a:r>
+            <a:r>
+              <a:rPr lang="pt-PT" dirty="0"/>
+              <a:t>—</a:t>
+            </a:r>
+            <a:r>
+              <a:rPr lang="pt-PT" dirty="0" err="1"/>
+              <a:t>which</a:t>
+            </a:r>
+            <a:r>
+              <a:rPr lang="pt-PT" dirty="0"/>
+              <a:t> </a:t>
+            </a:r>
+            <a:r>
+              <a:rPr lang="pt-PT" dirty="0" err="1"/>
+              <a:t>has</a:t>
+            </a:r>
+            <a:r>
+              <a:rPr lang="pt-PT" dirty="0"/>
+              <a:t> </a:t>
+            </a:r>
+            <a:r>
+              <a:rPr lang="pt-PT" dirty="0" err="1"/>
+              <a:t>already</a:t>
+            </a:r>
+            <a:r>
+              <a:rPr lang="pt-PT" dirty="0"/>
+              <a:t> </a:t>
+            </a:r>
+            <a:r>
+              <a:rPr lang="pt-PT" dirty="0" err="1"/>
+              <a:t>been</a:t>
+            </a:r>
+            <a:r>
+              <a:rPr lang="pt-PT" dirty="0"/>
+              <a:t> </a:t>
+            </a:r>
+            <a:r>
+              <a:rPr lang="pt-PT" dirty="0" err="1"/>
+              <a:t>modified</a:t>
+            </a:r>
+            <a:r>
+              <a:rPr lang="pt-PT" dirty="0"/>
+              <a:t> in some </a:t>
+            </a:r>
+            <a:r>
+              <a:rPr lang="pt-PT" dirty="0" err="1"/>
+              <a:t>parts</a:t>
+            </a:r>
+            <a:r>
+              <a:rPr lang="pt-PT" dirty="0"/>
+              <a:t> </a:t>
+            </a:r>
+            <a:r>
+              <a:rPr lang="pt-PT" dirty="0" err="1"/>
+              <a:t>by</a:t>
+            </a:r>
+            <a:r>
+              <a:rPr lang="pt-PT" dirty="0"/>
+              <a:t> </a:t>
+            </a:r>
+            <a:r>
+              <a:rPr lang="pt-PT" dirty="0" err="1"/>
+              <a:t>RocketUI</a:t>
+            </a:r>
+            <a:r>
+              <a:rPr lang="pt-PT" dirty="0"/>
+              <a:t>—</a:t>
+            </a:r>
+            <a:r>
+              <a:rPr lang="pt-PT" dirty="0" err="1"/>
+              <a:t>and</a:t>
+            </a:r>
+            <a:r>
+              <a:rPr lang="pt-PT" dirty="0"/>
+              <a:t> </a:t>
+            </a:r>
+            <a:r>
+              <a:rPr lang="pt-PT" dirty="0" err="1"/>
+              <a:t>on</a:t>
+            </a:r>
+            <a:r>
+              <a:rPr lang="pt-PT" dirty="0"/>
+              <a:t> top </a:t>
+            </a:r>
+            <a:r>
+              <a:rPr lang="pt-PT" dirty="0" err="1"/>
+              <a:t>of</a:t>
+            </a:r>
+            <a:r>
+              <a:rPr lang="pt-PT" dirty="0"/>
+              <a:t> </a:t>
+            </a:r>
+            <a:r>
+              <a:rPr lang="pt-PT" dirty="0" err="1"/>
+              <a:t>that</a:t>
+            </a:r>
+            <a:r>
+              <a:rPr lang="pt-PT" dirty="0"/>
+              <a:t>, </a:t>
+            </a:r>
+            <a:r>
+              <a:rPr lang="pt-PT" dirty="0" err="1"/>
+              <a:t>we’ll</a:t>
+            </a:r>
+            <a:r>
+              <a:rPr lang="pt-PT" dirty="0"/>
+              <a:t> </a:t>
+            </a:r>
+            <a:r>
+              <a:rPr lang="pt-PT" dirty="0" err="1"/>
+              <a:t>apply</a:t>
+            </a:r>
+            <a:r>
+              <a:rPr lang="pt-PT" dirty="0"/>
+              <a:t> </a:t>
+            </a:r>
+            <a:r>
+              <a:rPr lang="pt-PT" dirty="0" err="1"/>
+              <a:t>our</a:t>
+            </a:r>
+            <a:r>
+              <a:rPr lang="pt-PT" dirty="0"/>
+              <a:t> </a:t>
+            </a:r>
+            <a:r>
+              <a:rPr lang="pt-PT" dirty="0" err="1"/>
+              <a:t>own</a:t>
+            </a:r>
+            <a:r>
+              <a:rPr lang="pt-PT" dirty="0"/>
+              <a:t> </a:t>
+            </a:r>
+            <a:r>
+              <a:rPr lang="pt-PT" dirty="0" err="1"/>
+              <a:t>changes</a:t>
+            </a:r>
+            <a:r>
+              <a:rPr lang="pt-PT" dirty="0"/>
+              <a:t> to layouts, </a:t>
             </a:r>
             <a:r>
               <a:rPr lang="pt-PT" dirty="0" err="1"/>
@@ -11806,38 +16230,347 @@
             </a:r>
             <a:r>
               <a:rPr lang="pt-PT" dirty="0" err="1"/>
+              <a:t>and</a:t>
+            </a:r>
+            <a:r>
+              <a:rPr lang="pt-PT" dirty="0"/>
+              <a:t> </a:t>
+            </a:r>
+            <a:r>
+              <a:rPr lang="pt-PT" dirty="0" err="1"/>
               <a:t>widgets</a:t>
             </a:r>
             <a:r>
               <a:rPr lang="pt-PT" dirty="0"/>
-              <a:t> podemos alterar tudo.</a:t>
-            </a:r>
-            <a:br>
-              <a:rPr lang="pt-PT" dirty="0"/>
-            </a:br>
-            <a:br>
-              <a:rPr lang="pt-PT" dirty="0"/>
-            </a:br>
-            <a:br>
-              <a:rPr lang="pt-PT" dirty="0"/>
-            </a:br>
-            <a:br>
-              <a:rPr lang="pt-PT" dirty="0"/>
-            </a:br>
-            <a:br>
-              <a:rPr lang="pt-PT" dirty="0"/>
-            </a:br>
-            <a:r>
-              <a:rPr lang="pt-PT" dirty="0"/>
-              <a:t>Pode ser um erro de principiante, mas passei uma dificuldade em relação as dependências porque achava que ao instalar na </a:t>
-            </a:r>
-            <a:r>
-              <a:rPr lang="pt-PT" dirty="0" err="1"/>
-              <a:t>forge</a:t>
-            </a:r>
-            <a:r>
-              <a:rPr lang="pt-PT" dirty="0"/>
-              <a:t> as dependências que eram precisos, vinha tudo atras, mas não temos de instalar 1 por 1.</a:t>
+              <a:t>; </a:t>
+            </a:r>
+            <a:r>
+              <a:rPr lang="pt-PT" dirty="0" err="1"/>
+              <a:t>we</a:t>
+            </a:r>
+            <a:r>
+              <a:rPr lang="pt-PT" dirty="0"/>
+              <a:t> can </a:t>
+            </a:r>
+            <a:r>
+              <a:rPr lang="pt-PT" dirty="0" err="1"/>
+              <a:t>modify</a:t>
+            </a:r>
+            <a:r>
+              <a:rPr lang="pt-PT" dirty="0"/>
+              <a:t> </a:t>
+            </a:r>
+            <a:r>
+              <a:rPr lang="pt-PT" dirty="0" err="1"/>
+              <a:t>everything</a:t>
+            </a:r>
+            <a:r>
+              <a:rPr lang="pt-PT" dirty="0"/>
+              <a:t>.</a:t>
+            </a:r>
+          </a:p>
+          <a:p>
+            <a:endParaRPr lang="pt-PT" dirty="0"/>
+          </a:p>
+          <a:p>
+            <a:endParaRPr lang="pt-PT" dirty="0"/>
+          </a:p>
+          <a:p>
+            <a:r>
+              <a:rPr lang="pt-PT" dirty="0" err="1"/>
+              <a:t>It</a:t>
+            </a:r>
+            <a:r>
+              <a:rPr lang="pt-PT" dirty="0"/>
+              <a:t> </a:t>
+            </a:r>
+            <a:r>
+              <a:rPr lang="pt-PT" dirty="0" err="1"/>
+              <a:t>might</a:t>
+            </a:r>
+            <a:r>
+              <a:rPr lang="pt-PT" dirty="0"/>
+              <a:t> </a:t>
+            </a:r>
+            <a:r>
+              <a:rPr lang="pt-PT" dirty="0" err="1"/>
+              <a:t>be</a:t>
+            </a:r>
+            <a:r>
+              <a:rPr lang="pt-PT" dirty="0"/>
+              <a:t> a </a:t>
+            </a:r>
+            <a:r>
+              <a:rPr lang="pt-PT" dirty="0" err="1"/>
+              <a:t>beginner’s</a:t>
+            </a:r>
+            <a:r>
+              <a:rPr lang="pt-PT" dirty="0"/>
+              <a:t> </a:t>
+            </a:r>
+            <a:r>
+              <a:rPr lang="pt-PT" dirty="0" err="1"/>
+              <a:t>mistake</a:t>
+            </a:r>
+            <a:r>
+              <a:rPr lang="pt-PT" dirty="0"/>
+              <a:t>, </a:t>
+            </a:r>
+            <a:r>
+              <a:rPr lang="pt-PT" dirty="0" err="1"/>
+              <a:t>but</a:t>
+            </a:r>
+            <a:r>
+              <a:rPr lang="pt-PT" dirty="0"/>
+              <a:t> I </a:t>
+            </a:r>
+            <a:r>
+              <a:rPr lang="pt-PT" dirty="0" err="1"/>
+              <a:t>ran</a:t>
+            </a:r>
+            <a:r>
+              <a:rPr lang="pt-PT" dirty="0"/>
+              <a:t> </a:t>
+            </a:r>
+            <a:r>
+              <a:rPr lang="pt-PT" dirty="0" err="1"/>
+              <a:t>into</a:t>
+            </a:r>
+            <a:r>
+              <a:rPr lang="pt-PT" dirty="0"/>
+              <a:t> some </a:t>
+            </a:r>
+            <a:r>
+              <a:rPr lang="pt-PT" dirty="0" err="1"/>
+              <a:t>trouble</a:t>
+            </a:r>
+            <a:r>
+              <a:rPr lang="pt-PT" dirty="0"/>
+              <a:t> </a:t>
+            </a:r>
+            <a:r>
+              <a:rPr lang="pt-PT" dirty="0" err="1"/>
+              <a:t>with</a:t>
+            </a:r>
+            <a:r>
+              <a:rPr lang="pt-PT" dirty="0"/>
+              <a:t> </a:t>
+            </a:r>
+            <a:r>
+              <a:rPr lang="pt-PT" dirty="0" err="1"/>
+              <a:t>the</a:t>
+            </a:r>
+            <a:r>
+              <a:rPr lang="pt-PT" dirty="0"/>
+              <a:t> </a:t>
+            </a:r>
+            <a:r>
+              <a:rPr lang="pt-PT" dirty="0" err="1"/>
+              <a:t>dependencies</a:t>
+            </a:r>
+            <a:r>
+              <a:rPr lang="pt-PT" dirty="0"/>
+              <a:t> </a:t>
+            </a:r>
+            <a:r>
+              <a:rPr lang="pt-PT" dirty="0" err="1"/>
+              <a:t>because</a:t>
+            </a:r>
+            <a:r>
+              <a:rPr lang="pt-PT" dirty="0"/>
+              <a:t> I </a:t>
+            </a:r>
+            <a:r>
+              <a:rPr lang="pt-PT" dirty="0" err="1"/>
+              <a:t>thought</a:t>
+            </a:r>
+            <a:r>
+              <a:rPr lang="pt-PT" dirty="0"/>
+              <a:t> </a:t>
+            </a:r>
+            <a:r>
+              <a:rPr lang="pt-PT" dirty="0" err="1"/>
+              <a:t>that</a:t>
+            </a:r>
+            <a:r>
+              <a:rPr lang="pt-PT" dirty="0"/>
+              <a:t> </a:t>
+            </a:r>
+            <a:r>
+              <a:rPr lang="pt-PT" dirty="0" err="1"/>
+              <a:t>when</a:t>
+            </a:r>
+            <a:r>
+              <a:rPr lang="pt-PT" dirty="0"/>
+              <a:t> </a:t>
+            </a:r>
+            <a:r>
+              <a:rPr lang="pt-PT" dirty="0" err="1"/>
+              <a:t>installing</a:t>
+            </a:r>
+            <a:r>
+              <a:rPr lang="pt-PT" dirty="0"/>
+              <a:t> </a:t>
+            </a:r>
+            <a:r>
+              <a:rPr lang="pt-PT" dirty="0" err="1"/>
+              <a:t>the</a:t>
+            </a:r>
+            <a:r>
+              <a:rPr lang="pt-PT" dirty="0"/>
+              <a:t> </a:t>
+            </a:r>
+            <a:r>
+              <a:rPr lang="pt-PT" dirty="0" err="1"/>
+              <a:t>necessary</a:t>
+            </a:r>
+            <a:r>
+              <a:rPr lang="pt-PT" dirty="0"/>
+              <a:t> </a:t>
+            </a:r>
+            <a:r>
+              <a:rPr lang="pt-PT" dirty="0" err="1"/>
+              <a:t>dependencies</a:t>
+            </a:r>
+            <a:r>
+              <a:rPr lang="pt-PT" dirty="0"/>
+              <a:t> </a:t>
+            </a:r>
+            <a:r>
+              <a:rPr lang="pt-PT" dirty="0" err="1"/>
+              <a:t>on</a:t>
+            </a:r>
+            <a:r>
+              <a:rPr lang="pt-PT" dirty="0"/>
+              <a:t> </a:t>
+            </a:r>
+            <a:r>
+              <a:rPr lang="pt-PT" dirty="0" err="1"/>
+              <a:t>the</a:t>
+            </a:r>
+            <a:r>
+              <a:rPr lang="pt-PT" dirty="0"/>
+              <a:t> </a:t>
+            </a:r>
+            <a:r>
+              <a:rPr lang="pt-PT" dirty="0" err="1"/>
+              <a:t>Forge</a:t>
+            </a:r>
+            <a:r>
+              <a:rPr lang="pt-PT" dirty="0"/>
+              <a:t>, </a:t>
+            </a:r>
+            <a:r>
+              <a:rPr lang="pt-PT" dirty="0" err="1"/>
+              <a:t>everything</a:t>
+            </a:r>
+            <a:r>
+              <a:rPr lang="pt-PT" dirty="0"/>
+              <a:t> </a:t>
+            </a:r>
+            <a:r>
+              <a:rPr lang="pt-PT" dirty="0" err="1"/>
+              <a:t>would</a:t>
+            </a:r>
+            <a:r>
+              <a:rPr lang="pt-PT" dirty="0"/>
+              <a:t> come </a:t>
+            </a:r>
+            <a:r>
+              <a:rPr lang="pt-PT" dirty="0" err="1"/>
+              <a:t>along</a:t>
+            </a:r>
+            <a:r>
+              <a:rPr lang="pt-PT" dirty="0"/>
+              <a:t> </a:t>
+            </a:r>
+            <a:r>
+              <a:rPr lang="pt-PT" dirty="0" err="1"/>
+              <a:t>with</a:t>
+            </a:r>
+            <a:r>
+              <a:rPr lang="pt-PT" dirty="0"/>
+              <a:t> </a:t>
+            </a:r>
+            <a:r>
+              <a:rPr lang="pt-PT" dirty="0" err="1"/>
+              <a:t>it</a:t>
+            </a:r>
+            <a:r>
+              <a:rPr lang="pt-PT" dirty="0"/>
+              <a:t>, </a:t>
+            </a:r>
+            <a:r>
+              <a:rPr lang="pt-PT" dirty="0" err="1"/>
+              <a:t>but</a:t>
+            </a:r>
+            <a:r>
+              <a:rPr lang="pt-PT" dirty="0"/>
+              <a:t> </a:t>
+            </a:r>
+            <a:r>
+              <a:rPr lang="pt-PT" dirty="0" err="1"/>
+              <a:t>we</a:t>
+            </a:r>
+            <a:r>
+              <a:rPr lang="pt-PT" dirty="0"/>
+              <a:t> </a:t>
+            </a:r>
+            <a:r>
+              <a:rPr lang="pt-PT" dirty="0" err="1"/>
+              <a:t>don’t</a:t>
+            </a:r>
+            <a:r>
+              <a:rPr lang="pt-PT" dirty="0"/>
+              <a:t> </a:t>
+            </a:r>
+            <a:r>
+              <a:rPr lang="pt-PT" dirty="0" err="1"/>
+              <a:t>have</a:t>
+            </a:r>
+            <a:r>
+              <a:rPr lang="pt-PT" dirty="0"/>
+              <a:t> to </a:t>
+            </a:r>
+            <a:r>
+              <a:rPr lang="pt-PT" dirty="0" err="1"/>
+              <a:t>install</a:t>
+            </a:r>
+            <a:r>
+              <a:rPr lang="pt-PT" dirty="0"/>
+              <a:t> </a:t>
+            </a:r>
+            <a:r>
+              <a:rPr lang="pt-PT" dirty="0" err="1"/>
+              <a:t>them</a:t>
+            </a:r>
+            <a:r>
+              <a:rPr lang="pt-PT" dirty="0"/>
+              <a:t> </a:t>
+            </a:r>
+            <a:r>
+              <a:rPr lang="pt-PT" dirty="0" err="1"/>
+              <a:t>one</a:t>
+            </a:r>
+            <a:r>
+              <a:rPr lang="pt-PT" dirty="0"/>
+              <a:t> </a:t>
+            </a:r>
+            <a:r>
+              <a:rPr lang="pt-PT" dirty="0" err="1"/>
+              <a:t>by</a:t>
+            </a:r>
+            <a:r>
+              <a:rPr lang="pt-PT" dirty="0"/>
+              <a:t> </a:t>
+            </a:r>
+            <a:r>
+              <a:rPr lang="pt-PT" dirty="0" err="1"/>
+              <a:t>one</a:t>
+            </a:r>
+            <a:r>
+              <a:rPr lang="pt-PT" dirty="0"/>
+              <a:t>.</a:t>
             </a:r>
           </a:p>
         </p:txBody>
@@ -12038,8 +16771,13 @@
           <a:p>
             <a:r>
               <a:rPr lang="pt-PT" dirty="0"/>
-              <a:t>Organização do projeto</a:t>
-            </a:r>
+              <a:t>Project </a:t>
+            </a:r>
+            <a:r>
+              <a:rPr lang="pt-PT" dirty="0" err="1"/>
+              <a:t>Organization</a:t>
+            </a:r>
+            <a:endParaRPr lang="pt-PT" dirty="0"/>
           </a:p>
         </p:txBody>
       </p:sp>
@@ -12163,157 +16901,411 @@
           <a:lstStyle/>
           <a:p>
             <a:r>
-              <a:rPr lang="pt-PT"/>
-              <a:t>No </a:t>
-            </a:r>
-            <a:r>
-              <a:rPr lang="pt-PT" err="1"/>
+              <a:rPr lang="pt-PT" dirty="0"/>
+              <a:t>In </a:t>
+            </a:r>
+            <a:r>
+              <a:rPr lang="pt-PT" dirty="0" err="1"/>
               <a:t>RocketUI</a:t>
             </a:r>
             <a:r>
-              <a:rPr lang="pt-PT"/>
-              <a:t> os </a:t>
-            </a:r>
-            <a:r>
-              <a:rPr lang="pt-PT" err="1"/>
+              <a:rPr lang="pt-PT" dirty="0"/>
+              <a:t>, </a:t>
+            </a:r>
+            <a:r>
+              <a:rPr lang="pt-PT" dirty="0" err="1"/>
+              <a:t>there</a:t>
+            </a:r>
+            <a:r>
+              <a:rPr lang="pt-PT" dirty="0"/>
+              <a:t> are </a:t>
+            </a:r>
+            <a:r>
+              <a:rPr lang="pt-PT" dirty="0" err="1"/>
               <a:t>patterns</a:t>
             </a:r>
             <a:r>
-              <a:rPr lang="pt-PT"/>
-              <a:t> e o seu </a:t>
-            </a:r>
-            <a:r>
-              <a:rPr lang="pt-PT" err="1"/>
+              <a:rPr lang="pt-PT" dirty="0"/>
+              <a:t> </a:t>
+            </a:r>
+            <a:r>
+              <a:rPr lang="pt-PT" dirty="0" err="1"/>
+              <a:t>and</a:t>
+            </a:r>
+            <a:r>
+              <a:rPr lang="pt-PT" dirty="0"/>
+              <a:t> a </a:t>
+            </a:r>
+            <a:r>
+              <a:rPr lang="pt-PT" dirty="0" err="1"/>
               <a:t>theme</a:t>
             </a:r>
             <a:r>
-              <a:rPr lang="pt-PT"/>
-              <a:t>, no </a:t>
-            </a:r>
-            <a:r>
-              <a:rPr lang="pt-PT" err="1"/>
-              <a:t>pattern</a:t>
-            </a:r>
-            <a:r>
-              <a:rPr lang="pt-PT"/>
-              <a:t> temos os utilizamos dentro dos layouts e no </a:t>
-            </a:r>
-            <a:r>
-              <a:rPr lang="pt-PT" err="1"/>
+              <a:rPr lang="pt-PT" dirty="0"/>
+              <a:t>; </a:t>
+            </a:r>
+            <a:r>
+              <a:rPr lang="pt-PT" dirty="0" err="1"/>
+              <a:t>we</a:t>
+            </a:r>
+            <a:r>
+              <a:rPr lang="pt-PT" dirty="0"/>
+              <a:t> use </a:t>
+            </a:r>
+            <a:r>
+              <a:rPr lang="pt-PT" dirty="0" err="1"/>
+              <a:t>the</a:t>
+            </a:r>
+            <a:r>
+              <a:rPr lang="pt-PT" dirty="0"/>
+              <a:t> </a:t>
+            </a:r>
+            <a:r>
+              <a:rPr lang="pt-PT" dirty="0" err="1"/>
+              <a:t>patterns</a:t>
+            </a:r>
+            <a:r>
+              <a:rPr lang="pt-PT" dirty="0"/>
+              <a:t> </a:t>
+            </a:r>
+            <a:r>
+              <a:rPr lang="pt-PT" dirty="0" err="1"/>
+              <a:t>within</a:t>
+            </a:r>
+            <a:r>
+              <a:rPr lang="pt-PT" dirty="0"/>
+              <a:t> </a:t>
+            </a:r>
+            <a:r>
+              <a:rPr lang="pt-PT" dirty="0" err="1"/>
+              <a:t>the</a:t>
+            </a:r>
+            <a:r>
+              <a:rPr lang="pt-PT" dirty="0"/>
+              <a:t> layouts </a:t>
+            </a:r>
+            <a:r>
+              <a:rPr lang="pt-PT" dirty="0" err="1"/>
+              <a:t>and</a:t>
+            </a:r>
+            <a:r>
+              <a:rPr lang="pt-PT" dirty="0"/>
+              <a:t> in </a:t>
+            </a:r>
+            <a:r>
+              <a:rPr lang="pt-PT" dirty="0" err="1"/>
+              <a:t>the</a:t>
+            </a:r>
+            <a:r>
+              <a:rPr lang="pt-PT" dirty="0"/>
+              <a:t> </a:t>
+            </a:r>
+            <a:r>
+              <a:rPr lang="pt-PT" dirty="0" err="1"/>
               <a:t>theme</a:t>
             </a:r>
             <a:r>
-              <a:rPr lang="pt-PT"/>
+              <a:rPr lang="pt-PT" dirty="0"/>
               <a:t>.</a:t>
             </a:r>
           </a:p>
           <a:p>
             <a:r>
-              <a:rPr lang="pt-PT"/>
-              <a:t>No </a:t>
-            </a:r>
-            <a:r>
-              <a:rPr lang="pt-PT" err="1"/>
-              <a:t>RocketUi</a:t>
-            </a:r>
-            <a:r>
-              <a:rPr lang="pt-PT"/>
-              <a:t> </a:t>
-            </a:r>
-            <a:r>
-              <a:rPr lang="pt-PT" err="1"/>
-              <a:t>styleguide</a:t>
-            </a:r>
-            <a:r>
-              <a:rPr lang="pt-PT"/>
-              <a:t> temos os Templates do rocket, </a:t>
-            </a:r>
-            <a:r>
-              <a:rPr lang="pt-PT" err="1"/>
+              <a:rPr lang="pt-PT" dirty="0"/>
+              <a:t>In </a:t>
+            </a:r>
+            <a:r>
+              <a:rPr lang="pt-PT" dirty="0" err="1"/>
+              <a:t>the</a:t>
+            </a:r>
+            <a:r>
+              <a:rPr lang="pt-PT" dirty="0"/>
+              <a:t> </a:t>
+            </a:r>
+            <a:r>
+              <a:rPr lang="pt-PT" dirty="0" err="1"/>
+              <a:t>RocketUI</a:t>
+            </a:r>
+            <a:r>
+              <a:rPr lang="pt-PT" dirty="0"/>
+              <a:t> </a:t>
+            </a:r>
+            <a:r>
+              <a:rPr lang="pt-PT" dirty="0" err="1"/>
+              <a:t>style</a:t>
+            </a:r>
+            <a:r>
+              <a:rPr lang="pt-PT" dirty="0"/>
+              <a:t> </a:t>
+            </a:r>
+            <a:r>
+              <a:rPr lang="pt-PT" dirty="0" err="1"/>
+              <a:t>guide</a:t>
+            </a:r>
+            <a:r>
+              <a:rPr lang="pt-PT" dirty="0"/>
+              <a:t>, </a:t>
+            </a:r>
+            <a:r>
+              <a:rPr lang="pt-PT" dirty="0" err="1"/>
+              <a:t>we</a:t>
+            </a:r>
+            <a:r>
+              <a:rPr lang="pt-PT" dirty="0"/>
+              <a:t> </a:t>
+            </a:r>
+            <a:r>
+              <a:rPr lang="pt-PT" dirty="0" err="1"/>
+              <a:t>have</a:t>
+            </a:r>
+            <a:r>
+              <a:rPr lang="pt-PT" dirty="0"/>
+              <a:t> Rocket </a:t>
+            </a:r>
+            <a:r>
+              <a:rPr lang="pt-PT" dirty="0" err="1"/>
+              <a:t>templates</a:t>
+            </a:r>
+            <a:r>
+              <a:rPr lang="pt-PT" dirty="0"/>
+              <a:t>, </a:t>
+            </a:r>
+            <a:r>
+              <a:rPr lang="pt-PT" dirty="0" err="1"/>
               <a:t>assets</a:t>
             </a:r>
             <a:r>
-              <a:rPr lang="pt-PT"/>
-              <a:t> do </a:t>
-            </a:r>
-            <a:r>
-              <a:rPr lang="pt-PT" err="1"/>
-              <a:t>outsysteams</a:t>
-            </a:r>
-            <a:r>
-              <a:rPr lang="pt-PT"/>
-              <a:t> e do Rocket, </a:t>
-            </a:r>
-            <a:r>
-              <a:rPr lang="pt-PT" err="1"/>
+              <a:rPr lang="pt-PT" dirty="0"/>
+              <a:t> </a:t>
+            </a:r>
+            <a:r>
+              <a:rPr lang="pt-PT" dirty="0" err="1"/>
+              <a:t>from</a:t>
+            </a:r>
+            <a:r>
+              <a:rPr lang="pt-PT" dirty="0"/>
+              <a:t> </a:t>
+            </a:r>
+            <a:r>
+              <a:rPr lang="pt-PT" dirty="0" err="1"/>
+              <a:t>Outsystems</a:t>
+            </a:r>
+            <a:r>
+              <a:rPr lang="pt-PT" dirty="0"/>
+              <a:t> </a:t>
+            </a:r>
+            <a:r>
+              <a:rPr lang="pt-PT" dirty="0" err="1"/>
+              <a:t>and</a:t>
+            </a:r>
+            <a:r>
+              <a:rPr lang="pt-PT" dirty="0"/>
+              <a:t> Rocket, a </a:t>
+            </a:r>
+            <a:r>
+              <a:rPr lang="pt-PT" dirty="0" err="1"/>
               <a:t>database</a:t>
             </a:r>
             <a:r>
-              <a:rPr lang="pt-PT"/>
-              <a:t> e depois temos a pagina do </a:t>
-            </a:r>
-            <a:r>
-              <a:rPr lang="pt-PT" err="1"/>
-              <a:t>styleguide</a:t>
-            </a:r>
-            <a:r>
-              <a:rPr lang="pt-PT"/>
+              <a:rPr lang="pt-PT" dirty="0"/>
+              <a:t>, </a:t>
+            </a:r>
+            <a:r>
+              <a:rPr lang="pt-PT" dirty="0" err="1"/>
+              <a:t>and</a:t>
+            </a:r>
+            <a:r>
+              <a:rPr lang="pt-PT" dirty="0"/>
+              <a:t> </a:t>
+            </a:r>
+            <a:r>
+              <a:rPr lang="pt-PT" dirty="0" err="1"/>
+              <a:t>the</a:t>
+            </a:r>
+            <a:r>
+              <a:rPr lang="pt-PT" dirty="0"/>
+              <a:t> </a:t>
+            </a:r>
+            <a:r>
+              <a:rPr lang="pt-PT" dirty="0" err="1"/>
+              <a:t>style</a:t>
+            </a:r>
+            <a:r>
+              <a:rPr lang="pt-PT" dirty="0"/>
+              <a:t> </a:t>
+            </a:r>
+            <a:r>
+              <a:rPr lang="pt-PT" dirty="0" err="1"/>
+              <a:t>guide</a:t>
+            </a:r>
+            <a:r>
+              <a:rPr lang="pt-PT" dirty="0"/>
+              <a:t> </a:t>
+            </a:r>
+            <a:r>
+              <a:rPr lang="pt-PT" dirty="0" err="1"/>
+              <a:t>page</a:t>
+            </a:r>
+            <a:r>
+              <a:rPr lang="pt-PT" dirty="0"/>
               <a:t>.</a:t>
             </a:r>
           </a:p>
           <a:p>
             <a:r>
-              <a:rPr lang="pt-PT"/>
-              <a:t>Posteriormente criei o </a:t>
-            </a:r>
-            <a:r>
-              <a:rPr lang="pt-PT" err="1"/>
+              <a:rPr lang="pt-PT" dirty="0"/>
+              <a:t>Later, I </a:t>
+            </a:r>
+            <a:r>
+              <a:rPr lang="pt-PT" dirty="0" err="1"/>
+              <a:t>created</a:t>
+            </a:r>
+            <a:r>
+              <a:rPr lang="pt-PT" dirty="0"/>
+              <a:t> </a:t>
+            </a:r>
+            <a:r>
+              <a:rPr lang="pt-PT" dirty="0" err="1"/>
+              <a:t>the</a:t>
+            </a:r>
+            <a:r>
+              <a:rPr lang="pt-PT" dirty="0"/>
+              <a:t> </a:t>
+            </a:r>
+            <a:r>
+              <a:rPr lang="pt-PT" dirty="0" err="1"/>
               <a:t>Mediaweb</a:t>
             </a:r>
             <a:r>
-              <a:rPr lang="pt-PT"/>
-              <a:t> </a:t>
-            </a:r>
-            <a:r>
-              <a:rPr lang="pt-PT" err="1"/>
+              <a:rPr lang="pt-PT" dirty="0"/>
+              <a:t> </a:t>
+            </a:r>
+            <a:r>
+              <a:rPr lang="pt-PT" dirty="0" err="1"/>
               <a:t>Theme</a:t>
             </a:r>
             <a:r>
-              <a:rPr lang="pt-PT"/>
-              <a:t> que é o meu cliente que consome o </a:t>
-            </a:r>
-            <a:r>
-              <a:rPr lang="pt-PT" err="1"/>
-              <a:t>RocketUi</a:t>
-            </a:r>
-            <a:r>
-              <a:rPr lang="pt-PT"/>
-              <a:t>, no meu </a:t>
-            </a:r>
-            <a:r>
-              <a:rPr lang="pt-PT" err="1"/>
+              <a:rPr lang="pt-PT" dirty="0"/>
+              <a:t>, </a:t>
+            </a:r>
+            <a:r>
+              <a:rPr lang="pt-PT" dirty="0" err="1"/>
+              <a:t>which</a:t>
+            </a:r>
+            <a:r>
+              <a:rPr lang="pt-PT" dirty="0"/>
+              <a:t> </a:t>
+            </a:r>
+            <a:r>
+              <a:rPr lang="pt-PT" dirty="0" err="1"/>
+              <a:t>is</a:t>
+            </a:r>
+            <a:r>
+              <a:rPr lang="pt-PT" dirty="0"/>
+              <a:t> </a:t>
+            </a:r>
+            <a:r>
+              <a:rPr lang="pt-PT" dirty="0" err="1"/>
+              <a:t>my</a:t>
+            </a:r>
+            <a:r>
+              <a:rPr lang="pt-PT" dirty="0"/>
+              <a:t> </a:t>
+            </a:r>
+            <a:r>
+              <a:rPr lang="pt-PT" dirty="0" err="1"/>
+              <a:t>client</a:t>
+            </a:r>
+            <a:r>
+              <a:rPr lang="pt-PT" dirty="0"/>
+              <a:t> </a:t>
+            </a:r>
+            <a:r>
+              <a:rPr lang="pt-PT" dirty="0" err="1"/>
+              <a:t>that</a:t>
+            </a:r>
+            <a:r>
+              <a:rPr lang="pt-PT" dirty="0"/>
+              <a:t> uses </a:t>
+            </a:r>
+            <a:r>
+              <a:rPr lang="pt-PT" dirty="0" err="1"/>
+              <a:t>RocketUI</a:t>
+            </a:r>
+            <a:r>
+              <a:rPr lang="pt-PT" dirty="0"/>
+              <a:t>; in </a:t>
+            </a:r>
+            <a:r>
+              <a:rPr lang="pt-PT" dirty="0" err="1"/>
+              <a:t>my</a:t>
+            </a:r>
+            <a:r>
+              <a:rPr lang="pt-PT" dirty="0"/>
+              <a:t> </a:t>
+            </a:r>
+            <a:r>
+              <a:rPr lang="pt-PT" dirty="0" err="1"/>
               <a:t>theme</a:t>
             </a:r>
             <a:r>
-              <a:rPr lang="pt-PT"/>
-              <a:t>, tenho os meus </a:t>
-            </a:r>
-            <a:r>
-              <a:rPr lang="pt-PT" err="1"/>
+              <a:rPr lang="pt-PT" dirty="0"/>
+              <a:t>, I </a:t>
+            </a:r>
+            <a:r>
+              <a:rPr lang="pt-PT" dirty="0" err="1"/>
+              <a:t>have</a:t>
+            </a:r>
+            <a:r>
+              <a:rPr lang="pt-PT" dirty="0"/>
+              <a:t> </a:t>
+            </a:r>
+            <a:r>
+              <a:rPr lang="pt-PT" dirty="0" err="1"/>
+              <a:t>my</a:t>
+            </a:r>
+            <a:r>
+              <a:rPr lang="pt-PT" dirty="0"/>
+              <a:t> </a:t>
+            </a:r>
+            <a:r>
+              <a:rPr lang="pt-PT" dirty="0" err="1"/>
               <a:t>patterns</a:t>
             </a:r>
             <a:r>
-              <a:rPr lang="pt-PT"/>
+              <a:rPr lang="pt-PT" dirty="0"/>
               <a:t>, </a:t>
             </a:r>
             <a:r>
-              <a:rPr lang="pt-PT" err="1"/>
+              <a:rPr lang="pt-PT" dirty="0" err="1"/>
               <a:t>resources</a:t>
             </a:r>
             <a:r>
-              <a:rPr lang="pt-PT"/>
-              <a:t> e the.me</a:t>
-            </a:r>
+              <a:rPr lang="pt-PT" dirty="0"/>
+              <a:t>, </a:t>
+            </a:r>
+            <a:r>
+              <a:rPr lang="pt-PT" dirty="0" err="1"/>
+              <a:t>and</a:t>
+            </a:r>
+            <a:r>
+              <a:rPr lang="pt-PT" dirty="0"/>
+              <a:t> </a:t>
+            </a:r>
+            <a:r>
+              <a:rPr lang="pt-PT" dirty="0" err="1"/>
+              <a:t>theme</a:t>
+            </a:r>
+            <a:r>
+              <a:rPr lang="pt-PT" dirty="0"/>
+              <a:t>.</a:t>
+            </a:r>
+          </a:p>
+          <a:p>
+            <a:pPr marL="0" indent="0">
+              <a:buNone/>
+            </a:pPr>
+            <a:endParaRPr lang="pt-PT" dirty="0"/>
           </a:p>
         </p:txBody>
       </p:sp>
@@ -12507,14 +17499,18 @@
         </p:spPr>
         <p:txBody>
           <a:bodyPr>
-            <a:normAutofit/>
+            <a:normAutofit fontScale="90000"/>
           </a:bodyPr>
           <a:lstStyle/>
           <a:p>
             <a:r>
-              <a:rPr lang="pt-PT" dirty="0"/>
-              <a:t>Montagem</a:t>
-            </a:r>
+              <a:rPr lang="pt-PT" dirty="0" err="1"/>
+              <a:t>Assembly</a:t>
+            </a:r>
+            <a:br>
+              <a:rPr lang="pt-PT" dirty="0"/>
+            </a:br>
+            <a:endParaRPr lang="pt-PT" dirty="0"/>
           </a:p>
         </p:txBody>
       </p:sp>
@@ -12638,7 +17634,7 @@
             <p:ph idx="1"/>
             <p:extLst>
               <p:ext uri="{D42A27DB-BD31-4B8C-83A1-F6EECF244321}">
-                <p14:modId xmlns:p14="http://schemas.microsoft.com/office/powerpoint/2010/main" val="3255522819"/>
+                <p14:modId xmlns:p14="http://schemas.microsoft.com/office/powerpoint/2010/main" val="332550516"/>
               </p:ext>
             </p:extLst>
           </p:nvPr>
@@ -12796,9 +17792,10 @@
           <a:lstStyle/>
           <a:p>
             <a:r>
-              <a:rPr lang="pt-PT" dirty="0"/>
-              <a:t>Montagem</a:t>
-            </a:r>
+              <a:rPr lang="pt-PT" dirty="0" err="1"/>
+              <a:t>Assembly</a:t>
+            </a:r>
+            <a:endParaRPr lang="pt-PT" dirty="0"/>
           </a:p>
         </p:txBody>
       </p:sp>
@@ -12884,31 +17881,175 @@
           <a:p>
             <a:r>
               <a:rPr lang="pt-PT" dirty="0"/>
-              <a:t>Passei em seguida ao desenvolvimento dos </a:t>
-            </a:r>
-            <a:r>
-              <a:rPr lang="pt-PT" dirty="0" err="1"/>
-              <a:t>Custom</a:t>
-            </a:r>
-            <a:r>
-              <a:rPr lang="pt-PT" dirty="0"/>
-              <a:t> Layouts para o projeto, onde clonei do rocket e alterei de acordo com o </a:t>
-            </a:r>
-            <a:r>
-              <a:rPr lang="pt-PT" dirty="0" err="1"/>
-              <a:t>figma</a:t>
-            </a:r>
-            <a:r>
-              <a:rPr lang="pt-PT" dirty="0"/>
-              <a:t> ,dando estilos ao mesmo, para quando o </a:t>
-            </a:r>
-            <a:r>
-              <a:rPr lang="pt-PT" dirty="0" err="1"/>
-              <a:t>dev</a:t>
-            </a:r>
-            <a:r>
-              <a:rPr lang="pt-PT" dirty="0"/>
-              <a:t> passa-se algum </a:t>
+              <a:t>I </a:t>
+            </a:r>
+            <a:r>
+              <a:rPr lang="pt-PT" dirty="0" err="1"/>
+              <a:t>then</a:t>
+            </a:r>
+            <a:r>
+              <a:rPr lang="pt-PT" dirty="0"/>
+              <a:t> </a:t>
+            </a:r>
+            <a:r>
+              <a:rPr lang="pt-PT" dirty="0" err="1"/>
+              <a:t>moved</a:t>
+            </a:r>
+            <a:r>
+              <a:rPr lang="pt-PT" dirty="0"/>
+              <a:t> </a:t>
+            </a:r>
+            <a:r>
+              <a:rPr lang="pt-PT" dirty="0" err="1"/>
+              <a:t>on</a:t>
+            </a:r>
+            <a:r>
+              <a:rPr lang="pt-PT" dirty="0"/>
+              <a:t> to </a:t>
+            </a:r>
+            <a:r>
+              <a:rPr lang="pt-PT" dirty="0" err="1"/>
+              <a:t>developing</a:t>
+            </a:r>
+            <a:r>
+              <a:rPr lang="pt-PT" dirty="0"/>
+              <a:t> </a:t>
+            </a:r>
+            <a:r>
+              <a:rPr lang="pt-PT" dirty="0" err="1"/>
+              <a:t>custom</a:t>
+            </a:r>
+            <a:r>
+              <a:rPr lang="pt-PT" dirty="0"/>
+              <a:t> layouts for </a:t>
+            </a:r>
+            <a:r>
+              <a:rPr lang="pt-PT" dirty="0" err="1"/>
+              <a:t>the</a:t>
+            </a:r>
+            <a:r>
+              <a:rPr lang="pt-PT" dirty="0"/>
+              <a:t> </a:t>
+            </a:r>
+            <a:r>
+              <a:rPr lang="pt-PT" dirty="0" err="1"/>
+              <a:t>project</a:t>
+            </a:r>
+            <a:r>
+              <a:rPr lang="pt-PT" dirty="0"/>
+              <a:t>, </a:t>
+            </a:r>
+            <a:r>
+              <a:rPr lang="pt-PT" dirty="0" err="1"/>
+              <a:t>where</a:t>
+            </a:r>
+            <a:r>
+              <a:rPr lang="pt-PT" dirty="0"/>
+              <a:t> I </a:t>
+            </a:r>
+            <a:r>
+              <a:rPr lang="pt-PT" dirty="0" err="1"/>
+              <a:t>cloned</a:t>
+            </a:r>
+            <a:r>
+              <a:rPr lang="pt-PT" dirty="0"/>
+              <a:t> </a:t>
+            </a:r>
+            <a:r>
+              <a:rPr lang="pt-PT" dirty="0" err="1"/>
+              <a:t>the</a:t>
+            </a:r>
+            <a:r>
+              <a:rPr lang="pt-PT" dirty="0"/>
+              <a:t> Rocket </a:t>
+            </a:r>
+            <a:r>
+              <a:rPr lang="pt-PT" dirty="0" err="1"/>
+              <a:t>template</a:t>
+            </a:r>
+            <a:r>
+              <a:rPr lang="pt-PT" dirty="0"/>
+              <a:t> </a:t>
+            </a:r>
+            <a:r>
+              <a:rPr lang="pt-PT" dirty="0" err="1"/>
+              <a:t>and</a:t>
+            </a:r>
+            <a:r>
+              <a:rPr lang="pt-PT" dirty="0"/>
+              <a:t> </a:t>
+            </a:r>
+            <a:r>
+              <a:rPr lang="pt-PT" dirty="0" err="1"/>
+              <a:t>modified</a:t>
+            </a:r>
+            <a:r>
+              <a:rPr lang="pt-PT" dirty="0"/>
+              <a:t> </a:t>
+            </a:r>
+            <a:r>
+              <a:rPr lang="pt-PT" dirty="0" err="1"/>
+              <a:t>it</a:t>
+            </a:r>
+            <a:r>
+              <a:rPr lang="pt-PT" dirty="0"/>
+              <a:t> to match </a:t>
+            </a:r>
+            <a:r>
+              <a:rPr lang="pt-PT" dirty="0" err="1"/>
+              <a:t>Figma</a:t>
+            </a:r>
+            <a:r>
+              <a:rPr lang="pt-PT" dirty="0"/>
+              <a:t>, </a:t>
+            </a:r>
+            <a:r>
+              <a:rPr lang="pt-PT" dirty="0" err="1"/>
+              <a:t>applying</a:t>
+            </a:r>
+            <a:r>
+              <a:rPr lang="pt-PT" dirty="0"/>
+              <a:t> </a:t>
+            </a:r>
+            <a:r>
+              <a:rPr lang="pt-PT" dirty="0" err="1"/>
+              <a:t>styles</a:t>
+            </a:r>
+            <a:r>
+              <a:rPr lang="pt-PT" dirty="0"/>
+              <a:t> </a:t>
+            </a:r>
+            <a:r>
+              <a:rPr lang="pt-PT" dirty="0" err="1"/>
+              <a:t>so</a:t>
+            </a:r>
+            <a:r>
+              <a:rPr lang="pt-PT" dirty="0"/>
+              <a:t> </a:t>
+            </a:r>
+            <a:r>
+              <a:rPr lang="pt-PT" dirty="0" err="1"/>
+              <a:t>that</a:t>
+            </a:r>
+            <a:r>
+              <a:rPr lang="pt-PT" dirty="0"/>
+              <a:t> </a:t>
+            </a:r>
+            <a:r>
+              <a:rPr lang="pt-PT" dirty="0" err="1"/>
+              <a:t>when</a:t>
+            </a:r>
+            <a:r>
+              <a:rPr lang="pt-PT" dirty="0"/>
+              <a:t> a </a:t>
+            </a:r>
+            <a:r>
+              <a:rPr lang="pt-PT" dirty="0" err="1"/>
+              <a:t>developer</a:t>
+            </a:r>
+            <a:r>
+              <a:rPr lang="pt-PT" dirty="0"/>
+              <a:t> drags a </a:t>
             </a:r>
             <a:r>
               <a:rPr lang="pt-PT" dirty="0" err="1"/>
@@ -12916,31 +18057,193 @@
             </a:r>
             <a:r>
               <a:rPr lang="pt-PT" dirty="0"/>
-              <a:t> para dentro dele ficasse logo posicionado no sitio certo com os devidos espaçamentos e alinhamentos.</a:t>
-            </a:r>
+              <a:t> </a:t>
+            </a:r>
+            <a:r>
+              <a:rPr lang="pt-PT" dirty="0" err="1"/>
+              <a:t>into</a:t>
+            </a:r>
+            <a:r>
+              <a:rPr lang="pt-PT" dirty="0"/>
+              <a:t> </a:t>
+            </a:r>
+            <a:r>
+              <a:rPr lang="pt-PT" dirty="0" err="1"/>
+              <a:t>it</a:t>
+            </a:r>
+            <a:r>
+              <a:rPr lang="pt-PT" dirty="0"/>
+              <a:t>, </a:t>
+            </a:r>
+            <a:r>
+              <a:rPr lang="pt-PT" dirty="0" err="1"/>
+              <a:t>it</a:t>
+            </a:r>
+            <a:r>
+              <a:rPr lang="pt-PT" dirty="0"/>
+              <a:t> </a:t>
+            </a:r>
+            <a:r>
+              <a:rPr lang="pt-PT" dirty="0" err="1"/>
+              <a:t>would</a:t>
+            </a:r>
+            <a:r>
+              <a:rPr lang="pt-PT" dirty="0"/>
+              <a:t> </a:t>
+            </a:r>
+            <a:r>
+              <a:rPr lang="pt-PT" dirty="0" err="1"/>
+              <a:t>be</a:t>
+            </a:r>
+            <a:r>
+              <a:rPr lang="pt-PT" dirty="0"/>
+              <a:t> </a:t>
+            </a:r>
+            <a:r>
+              <a:rPr lang="pt-PT" dirty="0" err="1"/>
+              <a:t>immediately</a:t>
+            </a:r>
+            <a:r>
+              <a:rPr lang="pt-PT" dirty="0"/>
+              <a:t> </a:t>
+            </a:r>
+            <a:r>
+              <a:rPr lang="pt-PT" dirty="0" err="1"/>
+              <a:t>positioned</a:t>
+            </a:r>
+            <a:r>
+              <a:rPr lang="pt-PT" dirty="0"/>
+              <a:t> in </a:t>
+            </a:r>
+            <a:r>
+              <a:rPr lang="pt-PT" dirty="0" err="1"/>
+              <a:t>the</a:t>
+            </a:r>
+            <a:r>
+              <a:rPr lang="pt-PT" dirty="0"/>
+              <a:t> </a:t>
+            </a:r>
+            <a:r>
+              <a:rPr lang="pt-PT" dirty="0" err="1"/>
+              <a:t>right</a:t>
+            </a:r>
+            <a:r>
+              <a:rPr lang="pt-PT" dirty="0"/>
+              <a:t> </a:t>
+            </a:r>
+            <a:r>
+              <a:rPr lang="pt-PT" dirty="0" err="1"/>
+              <a:t>place</a:t>
+            </a:r>
+            <a:r>
+              <a:rPr lang="pt-PT" dirty="0"/>
+              <a:t> </a:t>
+            </a:r>
+            <a:r>
+              <a:rPr lang="pt-PT" dirty="0" err="1"/>
+              <a:t>with</a:t>
+            </a:r>
+            <a:r>
+              <a:rPr lang="pt-PT" dirty="0"/>
+              <a:t> </a:t>
+            </a:r>
+            <a:r>
+              <a:rPr lang="pt-PT" dirty="0" err="1"/>
+              <a:t>the</a:t>
+            </a:r>
+            <a:r>
+              <a:rPr lang="pt-PT" dirty="0"/>
+              <a:t> </a:t>
+            </a:r>
+            <a:r>
+              <a:rPr lang="pt-PT" dirty="0" err="1"/>
+              <a:t>correct</a:t>
+            </a:r>
+            <a:r>
+              <a:rPr lang="pt-PT" dirty="0"/>
+              <a:t> </a:t>
+            </a:r>
+            <a:r>
+              <a:rPr lang="pt-PT" dirty="0" err="1"/>
+              <a:t>spacing</a:t>
+            </a:r>
+            <a:r>
+              <a:rPr lang="pt-PT" dirty="0"/>
+              <a:t> </a:t>
+            </a:r>
+            <a:r>
+              <a:rPr lang="pt-PT" dirty="0" err="1"/>
+              <a:t>and</a:t>
+            </a:r>
+            <a:r>
+              <a:rPr lang="pt-PT" dirty="0"/>
+              <a:t> </a:t>
+            </a:r>
+            <a:r>
+              <a:rPr lang="pt-PT" dirty="0" err="1"/>
+              <a:t>alignment</a:t>
+            </a:r>
+            <a:r>
+              <a:rPr lang="pt-PT" dirty="0"/>
+              <a:t>. </a:t>
+            </a:r>
+            <a:r>
+              <a:rPr lang="pt-PT" dirty="0" err="1"/>
+              <a:t>Here</a:t>
+            </a:r>
+            <a:r>
+              <a:rPr lang="pt-PT" dirty="0"/>
+              <a:t> are some </a:t>
+            </a:r>
+            <a:r>
+              <a:rPr lang="pt-PT" dirty="0" err="1"/>
+              <a:t>examples</a:t>
+            </a:r>
+            <a:r>
+              <a:rPr lang="pt-PT" dirty="0"/>
+              <a:t> </a:t>
+            </a:r>
+            <a:r>
+              <a:rPr lang="pt-PT" dirty="0" err="1"/>
+              <a:t>of</a:t>
+            </a:r>
+            <a:r>
+              <a:rPr lang="pt-PT" dirty="0"/>
+              <a:t> </a:t>
+            </a:r>
+            <a:r>
+              <a:rPr lang="pt-PT" dirty="0" err="1"/>
+              <a:t>their</a:t>
+            </a:r>
+            <a:r>
+              <a:rPr lang="pt-PT" dirty="0"/>
+              <a:t> </a:t>
+            </a:r>
+            <a:r>
+              <a:rPr lang="pt-PT" dirty="0" err="1"/>
+              <a:t>widget</a:t>
+            </a:r>
+            <a:r>
+              <a:rPr lang="pt-PT" dirty="0"/>
+              <a:t> </a:t>
+            </a:r>
+            <a:r>
+              <a:rPr lang="pt-PT" dirty="0" err="1"/>
+              <a:t>trees</a:t>
+            </a:r>
+            <a:r>
+              <a:rPr lang="pt-PT" dirty="0"/>
+              <a:t>:</a:t>
+            </a:r>
+          </a:p>
+          <a:p>
+            <a:pPr marL="0" indent="0">
+              <a:buNone/>
+            </a:pPr>
             <a:br>
               <a:rPr lang="pt-PT" dirty="0"/>
             </a:br>
-            <a:r>
-              <a:rPr lang="pt-PT" dirty="0"/>
-              <a:t>Tenho aqui o exemplos da </a:t>
-            </a:r>
-            <a:r>
-              <a:rPr lang="pt-PT" dirty="0" err="1"/>
-              <a:t>widget</a:t>
-            </a:r>
-            <a:r>
-              <a:rPr lang="pt-PT" dirty="0"/>
-              <a:t> </a:t>
-            </a:r>
-            <a:r>
-              <a:rPr lang="pt-PT" dirty="0" err="1"/>
-              <a:t>trees</a:t>
-            </a:r>
-            <a:r>
-              <a:rPr lang="pt-PT" dirty="0"/>
-              <a:t> deles:</a:t>
-            </a:r>
+            <a:endParaRPr lang="pt-PT" dirty="0"/>
           </a:p>
         </p:txBody>
       </p:sp>
@@ -13199,9 +18502,10 @@
           <a:lstStyle/>
           <a:p>
             <a:r>
-              <a:rPr lang="pt-PT"/>
-              <a:t>Montagem</a:t>
-            </a:r>
+              <a:rPr lang="pt-PT" dirty="0" err="1"/>
+              <a:t>Assembly</a:t>
+            </a:r>
+            <a:endParaRPr lang="pt-PT" dirty="0"/>
           </a:p>
         </p:txBody>
       </p:sp>
@@ -13235,7 +18539,23 @@
           <a:p>
             <a:r>
               <a:rPr lang="pt-PT" dirty="0"/>
-              <a:t>Para alem dos </a:t>
+              <a:t>In </a:t>
+            </a:r>
+            <a:r>
+              <a:rPr lang="pt-PT" dirty="0" err="1"/>
+              <a:t>addition</a:t>
+            </a:r>
+            <a:r>
+              <a:rPr lang="pt-PT" dirty="0"/>
+              <a:t> to </a:t>
+            </a:r>
+            <a:r>
+              <a:rPr lang="pt-PT" dirty="0" err="1"/>
+              <a:t>the</a:t>
+            </a:r>
+            <a:r>
+              <a:rPr lang="pt-PT" dirty="0"/>
+              <a:t> </a:t>
             </a:r>
             <a:r>
               <a:rPr lang="pt-PT" dirty="0" err="1"/>
@@ -13243,42 +18563,298 @@
             </a:r>
             <a:r>
               <a:rPr lang="pt-PT" dirty="0"/>
-              <a:t> que fiz, ainda existia mais alguns que não estavam no </a:t>
-            </a:r>
-            <a:r>
-              <a:rPr lang="pt-PT" dirty="0" err="1"/>
-              <a:t>styleguide</a:t>
-            </a:r>
-            <a:r>
-              <a:rPr lang="pt-PT" dirty="0"/>
-              <a:t> então tive de acabar por </a:t>
-            </a:r>
-            <a:r>
-              <a:rPr lang="pt-PT" dirty="0" err="1"/>
-              <a:t>estelizar</a:t>
-            </a:r>
-            <a:r>
-              <a:rPr lang="pt-PT" dirty="0"/>
-              <a:t> mais alguns, e testei os layouts para ver se ficava tudo no sitio ou se não ocupavam espaços mesmo vazios.</a:t>
-            </a:r>
+              <a:t> I </a:t>
+            </a:r>
+            <a:r>
+              <a:rPr lang="pt-PT" dirty="0" err="1"/>
+              <a:t>created</a:t>
+            </a:r>
+            <a:r>
+              <a:rPr lang="pt-PT" dirty="0"/>
+              <a:t>, </a:t>
+            </a:r>
+            <a:r>
+              <a:rPr lang="pt-PT" dirty="0" err="1"/>
+              <a:t>there</a:t>
+            </a:r>
+            <a:r>
+              <a:rPr lang="pt-PT" dirty="0"/>
+              <a:t> </a:t>
+            </a:r>
+            <a:r>
+              <a:rPr lang="pt-PT" dirty="0" err="1"/>
+              <a:t>were</a:t>
+            </a:r>
+            <a:r>
+              <a:rPr lang="pt-PT" dirty="0"/>
+              <a:t> a </a:t>
+            </a:r>
+            <a:r>
+              <a:rPr lang="pt-PT" dirty="0" err="1"/>
+              <a:t>few</a:t>
+            </a:r>
+            <a:r>
+              <a:rPr lang="pt-PT" dirty="0"/>
+              <a:t> </a:t>
+            </a:r>
+            <a:r>
+              <a:rPr lang="pt-PT" dirty="0" err="1"/>
+              <a:t>others</a:t>
+            </a:r>
+            <a:r>
+              <a:rPr lang="pt-PT" dirty="0"/>
+              <a:t> </a:t>
+            </a:r>
+            <a:r>
+              <a:rPr lang="pt-PT" dirty="0" err="1"/>
+              <a:t>that</a:t>
+            </a:r>
+            <a:r>
+              <a:rPr lang="pt-PT" dirty="0"/>
+              <a:t> </a:t>
+            </a:r>
+            <a:r>
+              <a:rPr lang="pt-PT" dirty="0" err="1"/>
+              <a:t>weren’t</a:t>
+            </a:r>
+            <a:r>
+              <a:rPr lang="pt-PT" dirty="0"/>
+              <a:t> in </a:t>
+            </a:r>
+            <a:r>
+              <a:rPr lang="pt-PT" dirty="0" err="1"/>
+              <a:t>the</a:t>
+            </a:r>
+            <a:r>
+              <a:rPr lang="pt-PT" dirty="0"/>
+              <a:t> </a:t>
+            </a:r>
+            <a:r>
+              <a:rPr lang="pt-PT" dirty="0" err="1"/>
+              <a:t>style</a:t>
+            </a:r>
+            <a:r>
+              <a:rPr lang="pt-PT" dirty="0"/>
+              <a:t> </a:t>
+            </a:r>
+            <a:r>
+              <a:rPr lang="pt-PT" dirty="0" err="1"/>
+              <a:t>guide</a:t>
+            </a:r>
+            <a:r>
+              <a:rPr lang="pt-PT" dirty="0"/>
+              <a:t>, </a:t>
+            </a:r>
+            <a:r>
+              <a:rPr lang="pt-PT" dirty="0" err="1"/>
+              <a:t>so</a:t>
+            </a:r>
+            <a:r>
+              <a:rPr lang="pt-PT" dirty="0"/>
+              <a:t> I </a:t>
+            </a:r>
+            <a:r>
+              <a:rPr lang="pt-PT" dirty="0" err="1"/>
+              <a:t>ended</a:t>
+            </a:r>
+            <a:r>
+              <a:rPr lang="pt-PT" dirty="0"/>
+              <a:t> </a:t>
+            </a:r>
+            <a:r>
+              <a:rPr lang="pt-PT" dirty="0" err="1"/>
+              <a:t>up</a:t>
+            </a:r>
+            <a:r>
+              <a:rPr lang="pt-PT" dirty="0"/>
+              <a:t> </a:t>
+            </a:r>
+            <a:r>
+              <a:rPr lang="pt-PT" dirty="0" err="1"/>
+              <a:t>having</a:t>
+            </a:r>
+            <a:r>
+              <a:rPr lang="pt-PT" dirty="0"/>
+              <a:t> to </a:t>
+            </a:r>
+            <a:r>
+              <a:rPr lang="pt-PT" dirty="0" err="1"/>
+              <a:t>style</a:t>
+            </a:r>
+            <a:r>
+              <a:rPr lang="pt-PT" dirty="0"/>
+              <a:t> a </a:t>
+            </a:r>
+            <a:r>
+              <a:rPr lang="pt-PT" dirty="0" err="1"/>
+              <a:t>few</a:t>
+            </a:r>
+            <a:r>
+              <a:rPr lang="pt-PT" dirty="0"/>
+              <a:t> more, </a:t>
+            </a:r>
+            <a:r>
+              <a:rPr lang="pt-PT" dirty="0" err="1"/>
+              <a:t>and</a:t>
+            </a:r>
+            <a:r>
+              <a:rPr lang="pt-PT" dirty="0"/>
+              <a:t> I </a:t>
+            </a:r>
+            <a:r>
+              <a:rPr lang="pt-PT" dirty="0" err="1"/>
+              <a:t>tested</a:t>
+            </a:r>
+            <a:r>
+              <a:rPr lang="pt-PT" dirty="0"/>
+              <a:t> </a:t>
+            </a:r>
+            <a:r>
+              <a:rPr lang="pt-PT" dirty="0" err="1"/>
+              <a:t>the</a:t>
+            </a:r>
+            <a:r>
+              <a:rPr lang="pt-PT" dirty="0"/>
+              <a:t> layouts to </a:t>
+            </a:r>
+            <a:r>
+              <a:rPr lang="pt-PT" dirty="0" err="1"/>
+              <a:t>make</a:t>
+            </a:r>
+            <a:r>
+              <a:rPr lang="pt-PT" dirty="0"/>
+              <a:t> </a:t>
+            </a:r>
+            <a:r>
+              <a:rPr lang="pt-PT" dirty="0" err="1"/>
+              <a:t>sure</a:t>
+            </a:r>
+            <a:r>
+              <a:rPr lang="pt-PT" dirty="0"/>
+              <a:t> </a:t>
+            </a:r>
+            <a:r>
+              <a:rPr lang="pt-PT" dirty="0" err="1"/>
+              <a:t>everything</a:t>
+            </a:r>
+            <a:r>
+              <a:rPr lang="pt-PT" dirty="0"/>
+              <a:t> </a:t>
+            </a:r>
+            <a:r>
+              <a:rPr lang="pt-PT" dirty="0" err="1"/>
+              <a:t>fit</a:t>
+            </a:r>
+            <a:r>
+              <a:rPr lang="pt-PT" dirty="0"/>
+              <a:t> </a:t>
+            </a:r>
+            <a:r>
+              <a:rPr lang="pt-PT" dirty="0" err="1"/>
+              <a:t>properly</a:t>
+            </a:r>
+            <a:r>
+              <a:rPr lang="pt-PT" dirty="0"/>
+              <a:t> </a:t>
+            </a:r>
+            <a:r>
+              <a:rPr lang="pt-PT" dirty="0" err="1"/>
+              <a:t>and</a:t>
+            </a:r>
+            <a:r>
+              <a:rPr lang="pt-PT" dirty="0"/>
+              <a:t> </a:t>
+            </a:r>
+            <a:r>
+              <a:rPr lang="pt-PT" dirty="0" err="1"/>
+              <a:t>didn’t</a:t>
+            </a:r>
+            <a:r>
+              <a:rPr lang="pt-PT" dirty="0"/>
+              <a:t> take </a:t>
+            </a:r>
+            <a:r>
+              <a:rPr lang="pt-PT" dirty="0" err="1"/>
+              <a:t>up</a:t>
+            </a:r>
+            <a:r>
+              <a:rPr lang="pt-PT" dirty="0"/>
+              <a:t> </a:t>
+            </a:r>
+            <a:r>
+              <a:rPr lang="pt-PT" dirty="0" err="1"/>
+              <a:t>empty</a:t>
+            </a:r>
+            <a:r>
+              <a:rPr lang="pt-PT" dirty="0"/>
+              <a:t> </a:t>
+            </a:r>
+            <a:r>
+              <a:rPr lang="pt-PT" dirty="0" err="1"/>
+              <a:t>space</a:t>
+            </a:r>
+            <a:r>
+              <a:rPr lang="pt-PT" dirty="0"/>
+              <a:t>. </a:t>
+            </a:r>
+          </a:p>
+          <a:p>
+            <a:r>
+              <a:rPr lang="pt-PT" dirty="0"/>
+              <a:t>For </a:t>
+            </a:r>
+            <a:r>
+              <a:rPr lang="pt-PT" dirty="0" err="1"/>
+              <a:t>example</a:t>
+            </a:r>
+            <a:r>
+              <a:rPr lang="pt-PT" dirty="0"/>
+              <a:t>, some </a:t>
+            </a:r>
+            <a:r>
+              <a:rPr lang="pt-PT" dirty="0" err="1"/>
+              <a:t>buttons</a:t>
+            </a:r>
+            <a:r>
+              <a:rPr lang="pt-PT" dirty="0"/>
+              <a:t> </a:t>
+            </a:r>
+            <a:r>
+              <a:rPr lang="pt-PT" dirty="0" err="1"/>
+              <a:t>and</a:t>
+            </a:r>
+            <a:r>
+              <a:rPr lang="pt-PT" dirty="0"/>
+              <a:t> </a:t>
+            </a:r>
+            <a:r>
+              <a:rPr lang="pt-PT" dirty="0" err="1"/>
+              <a:t>the</a:t>
+            </a:r>
+            <a:r>
+              <a:rPr lang="pt-PT" dirty="0"/>
+              <a:t> </a:t>
+            </a:r>
+            <a:r>
+              <a:rPr lang="pt-PT" dirty="0" err="1"/>
+              <a:t>breadcrumbs</a:t>
+            </a:r>
+            <a:r>
+              <a:rPr lang="pt-PT" dirty="0"/>
+              <a:t>.</a:t>
+            </a:r>
+          </a:p>
+          <a:p>
+            <a:pPr marL="0" indent="0">
+              <a:buNone/>
+            </a:pPr>
             <a:br>
               <a:rPr lang="pt-PT" dirty="0"/>
             </a:br>
-            <a:br>
-              <a:rPr lang="pt-PT" dirty="0"/>
-            </a:br>
-            <a:r>
-              <a:rPr lang="pt-PT" dirty="0"/>
-              <a:t>Como alguns botões, os </a:t>
-            </a:r>
-            <a:r>
-              <a:rPr lang="pt-PT" dirty="0" err="1"/>
-              <a:t>breadcrumbs</a:t>
-            </a:r>
-            <a:r>
-              <a:rPr lang="pt-PT" dirty="0"/>
-              <a:t>.</a:t>
-            </a:r>
+            <a:endParaRPr lang="pt-PT" dirty="0"/>
+          </a:p>
+          <a:p>
+            <a:endParaRPr lang="pt-PT" dirty="0"/>
           </a:p>
         </p:txBody>
       </p:sp>
@@ -13529,9 +19105,10 @@
           <a:lstStyle/>
           <a:p>
             <a:r>
-              <a:rPr lang="pt-PT" dirty="0"/>
-              <a:t>Montagem</a:t>
-            </a:r>
+              <a:rPr lang="pt-PT" dirty="0" err="1"/>
+              <a:t>Assembly</a:t>
+            </a:r>
+            <a:endParaRPr lang="pt-PT" dirty="0"/>
           </a:p>
         </p:txBody>
       </p:sp>
@@ -13611,26 +19188,550 @@
         </p:spPr>
         <p:txBody>
           <a:bodyPr>
-            <a:normAutofit/>
+            <a:normAutofit fontScale="92500"/>
           </a:bodyPr>
           <a:lstStyle/>
+          <a:p>
+            <a:r>
+              <a:rPr lang="pt-PT" sz="1400" dirty="0" err="1"/>
+              <a:t>We</a:t>
+            </a:r>
+            <a:r>
+              <a:rPr lang="pt-PT" sz="1400" dirty="0"/>
+              <a:t> </a:t>
+            </a:r>
+            <a:r>
+              <a:rPr lang="pt-PT" sz="1400" dirty="0" err="1"/>
+              <a:t>moved</a:t>
+            </a:r>
+            <a:r>
+              <a:rPr lang="pt-PT" sz="1400" dirty="0"/>
+              <a:t> </a:t>
+            </a:r>
+            <a:r>
+              <a:rPr lang="pt-PT" sz="1400" dirty="0" err="1"/>
+              <a:t>on</a:t>
+            </a:r>
+            <a:r>
+              <a:rPr lang="pt-PT" sz="1400" dirty="0"/>
+              <a:t> to </a:t>
+            </a:r>
+            <a:r>
+              <a:rPr lang="pt-PT" sz="1400" dirty="0" err="1"/>
+              <a:t>creating</a:t>
+            </a:r>
+            <a:r>
+              <a:rPr lang="pt-PT" sz="1400" dirty="0"/>
+              <a:t> </a:t>
+            </a:r>
+            <a:r>
+              <a:rPr lang="pt-PT" sz="1400" dirty="0" err="1"/>
+              <a:t>the</a:t>
+            </a:r>
+            <a:r>
+              <a:rPr lang="pt-PT" sz="1400" dirty="0"/>
+              <a:t> </a:t>
+            </a:r>
+            <a:r>
+              <a:rPr lang="pt-PT" sz="1400" dirty="0" err="1"/>
+              <a:t>patterns</a:t>
+            </a:r>
+            <a:r>
+              <a:rPr lang="pt-PT" sz="1400" dirty="0"/>
+              <a:t>. </a:t>
+            </a:r>
+            <a:r>
+              <a:rPr lang="pt-PT" sz="1400" dirty="0" err="1"/>
+              <a:t>What</a:t>
+            </a:r>
+            <a:r>
+              <a:rPr lang="pt-PT" sz="1400" dirty="0"/>
+              <a:t> </a:t>
+            </a:r>
+            <a:r>
+              <a:rPr lang="pt-PT" sz="1400" dirty="0" err="1"/>
+              <a:t>gave</a:t>
+            </a:r>
+            <a:r>
+              <a:rPr lang="pt-PT" sz="1400" dirty="0"/>
+              <a:t> me </a:t>
+            </a:r>
+            <a:r>
+              <a:rPr lang="pt-PT" sz="1400" dirty="0" err="1"/>
+              <a:t>the</a:t>
+            </a:r>
+            <a:r>
+              <a:rPr lang="pt-PT" sz="1400" dirty="0"/>
+              <a:t> </a:t>
+            </a:r>
+            <a:r>
+              <a:rPr lang="pt-PT" sz="1400" dirty="0" err="1"/>
+              <a:t>most</a:t>
+            </a:r>
+            <a:r>
+              <a:rPr lang="pt-PT" sz="1400" dirty="0"/>
+              <a:t> </a:t>
+            </a:r>
+            <a:r>
+              <a:rPr lang="pt-PT" sz="1400" dirty="0" err="1"/>
+              <a:t>trouble</a:t>
+            </a:r>
+            <a:r>
+              <a:rPr lang="pt-PT" sz="1400" dirty="0"/>
+              <a:t> </a:t>
+            </a:r>
+            <a:r>
+              <a:rPr lang="pt-PT" sz="1400" dirty="0" err="1"/>
+              <a:t>at</a:t>
+            </a:r>
+            <a:r>
+              <a:rPr lang="pt-PT" sz="1400" dirty="0"/>
+              <a:t> </a:t>
+            </a:r>
+            <a:r>
+              <a:rPr lang="pt-PT" sz="1400" dirty="0" err="1"/>
+              <a:t>the</a:t>
+            </a:r>
+            <a:r>
+              <a:rPr lang="pt-PT" sz="1400" dirty="0"/>
+              <a:t> time </a:t>
+            </a:r>
+            <a:r>
+              <a:rPr lang="pt-PT" sz="1400" dirty="0" err="1"/>
+              <a:t>was</a:t>
+            </a:r>
+            <a:r>
+              <a:rPr lang="pt-PT" sz="1400" dirty="0"/>
+              <a:t> </a:t>
+            </a:r>
+            <a:r>
+              <a:rPr lang="pt-PT" sz="1400" dirty="0" err="1"/>
+              <a:t>the</a:t>
+            </a:r>
+            <a:r>
+              <a:rPr lang="pt-PT" sz="1400" dirty="0"/>
+              <a:t> </a:t>
+            </a:r>
+            <a:r>
+              <a:rPr lang="pt-PT" sz="1400" dirty="0" err="1"/>
+              <a:t>card</a:t>
+            </a:r>
+            <a:r>
+              <a:rPr lang="pt-PT" sz="1400" dirty="0"/>
+              <a:t>, </a:t>
+            </a:r>
+            <a:r>
+              <a:rPr lang="pt-PT" sz="1400" dirty="0" err="1"/>
+              <a:t>because</a:t>
+            </a:r>
+            <a:r>
+              <a:rPr lang="pt-PT" sz="1400" dirty="0"/>
+              <a:t> </a:t>
+            </a:r>
+            <a:r>
+              <a:rPr lang="pt-PT" sz="1400" dirty="0" err="1"/>
+              <a:t>there</a:t>
+            </a:r>
+            <a:r>
+              <a:rPr lang="pt-PT" sz="1400" dirty="0"/>
+              <a:t> are </a:t>
+            </a:r>
+            <a:r>
+              <a:rPr lang="pt-PT" sz="1400" dirty="0" err="1"/>
+              <a:t>two</a:t>
+            </a:r>
+            <a:r>
+              <a:rPr lang="pt-PT" sz="1400" dirty="0"/>
+              <a:t> </a:t>
+            </a:r>
+            <a:r>
+              <a:rPr lang="pt-PT" sz="1400" dirty="0" err="1"/>
+              <a:t>cards</a:t>
+            </a:r>
+            <a:r>
+              <a:rPr lang="pt-PT" sz="1400" dirty="0"/>
+              <a:t> in </a:t>
+            </a:r>
+            <a:r>
+              <a:rPr lang="pt-PT" sz="1400" dirty="0" err="1"/>
+              <a:t>the</a:t>
+            </a:r>
+            <a:r>
+              <a:rPr lang="pt-PT" sz="1400" dirty="0"/>
+              <a:t> </a:t>
+            </a:r>
+            <a:r>
+              <a:rPr lang="pt-PT" sz="1400" dirty="0" err="1"/>
+              <a:t>project</a:t>
+            </a:r>
+            <a:r>
+              <a:rPr lang="pt-PT" sz="1400" dirty="0"/>
+              <a:t>, </a:t>
+            </a:r>
+            <a:r>
+              <a:rPr lang="pt-PT" sz="1400" dirty="0" err="1"/>
+              <a:t>and</a:t>
+            </a:r>
+            <a:r>
+              <a:rPr lang="pt-PT" sz="1400" dirty="0"/>
+              <a:t> </a:t>
+            </a:r>
+            <a:r>
+              <a:rPr lang="pt-PT" sz="1400" dirty="0" err="1"/>
+              <a:t>with</a:t>
+            </a:r>
+            <a:r>
+              <a:rPr lang="pt-PT" sz="1400" dirty="0"/>
+              <a:t> </a:t>
+            </a:r>
+            <a:r>
+              <a:rPr lang="pt-PT" sz="1400" dirty="0" err="1"/>
+              <a:t>only</a:t>
+            </a:r>
+            <a:r>
+              <a:rPr lang="pt-PT" sz="1400" dirty="0"/>
+              <a:t> </a:t>
+            </a:r>
+            <a:r>
+              <a:rPr lang="pt-PT" sz="1400" dirty="0" err="1"/>
+              <a:t>three</a:t>
+            </a:r>
+            <a:r>
+              <a:rPr lang="pt-PT" sz="1400" dirty="0"/>
+              <a:t> </a:t>
+            </a:r>
+            <a:r>
+              <a:rPr lang="pt-PT" sz="1400" dirty="0" err="1"/>
+              <a:t>placeholders</a:t>
+            </a:r>
+            <a:r>
+              <a:rPr lang="pt-PT" sz="1400" dirty="0"/>
+              <a:t>, I </a:t>
+            </a:r>
+            <a:r>
+              <a:rPr lang="pt-PT" sz="1400" dirty="0" err="1"/>
+              <a:t>wanted</a:t>
+            </a:r>
+            <a:r>
+              <a:rPr lang="pt-PT" sz="1400" dirty="0"/>
+              <a:t> to </a:t>
+            </a:r>
+            <a:r>
+              <a:rPr lang="pt-PT" sz="1400" dirty="0" err="1"/>
+              <a:t>make</a:t>
+            </a:r>
+            <a:r>
+              <a:rPr lang="pt-PT" sz="1400" dirty="0"/>
+              <a:t> a single </a:t>
+            </a:r>
+            <a:r>
+              <a:rPr lang="pt-PT" sz="1400" dirty="0" err="1"/>
+              <a:t>pattern</a:t>
+            </a:r>
+            <a:r>
+              <a:rPr lang="pt-PT" sz="1400" dirty="0"/>
+              <a:t> </a:t>
+            </a:r>
+            <a:r>
+              <a:rPr lang="pt-PT" sz="1400" dirty="0" err="1"/>
+              <a:t>work</a:t>
+            </a:r>
+            <a:r>
+              <a:rPr lang="pt-PT" sz="1400" dirty="0"/>
+              <a:t> for </a:t>
+            </a:r>
+            <a:r>
+              <a:rPr lang="pt-PT" sz="1400" dirty="0" err="1"/>
+              <a:t>both</a:t>
+            </a:r>
+            <a:r>
+              <a:rPr lang="pt-PT" sz="1400" dirty="0"/>
+              <a:t> </a:t>
+            </a:r>
+            <a:r>
+              <a:rPr lang="pt-PT" sz="1400" dirty="0" err="1"/>
+              <a:t>cards</a:t>
+            </a:r>
+            <a:r>
+              <a:rPr lang="pt-PT" sz="1400" dirty="0"/>
+              <a:t>—</a:t>
+            </a:r>
+            <a:r>
+              <a:rPr lang="pt-PT" sz="1400" dirty="0" err="1"/>
+              <a:t>which</a:t>
+            </a:r>
+            <a:r>
+              <a:rPr lang="pt-PT" sz="1400" dirty="0"/>
+              <a:t> </a:t>
+            </a:r>
+            <a:r>
+              <a:rPr lang="pt-PT" sz="1400" dirty="0" err="1"/>
+              <a:t>was</a:t>
+            </a:r>
+            <a:r>
+              <a:rPr lang="pt-PT" sz="1400" dirty="0"/>
+              <a:t> </a:t>
+            </a:r>
+            <a:r>
+              <a:rPr lang="pt-PT" sz="1400" dirty="0" err="1"/>
+              <a:t>going</a:t>
+            </a:r>
+            <a:r>
+              <a:rPr lang="pt-PT" sz="1400" dirty="0"/>
+              <a:t> to </a:t>
+            </a:r>
+            <a:r>
+              <a:rPr lang="pt-PT" sz="1400" dirty="0" err="1"/>
+              <a:t>be</a:t>
+            </a:r>
+            <a:r>
+              <a:rPr lang="pt-PT" sz="1400" dirty="0"/>
+              <a:t> </a:t>
+            </a:r>
+            <a:r>
+              <a:rPr lang="pt-PT" sz="1400" dirty="0" err="1"/>
+              <a:t>very</a:t>
+            </a:r>
+            <a:r>
+              <a:rPr lang="pt-PT" sz="1400" dirty="0"/>
+              <a:t> </a:t>
+            </a:r>
+            <a:r>
+              <a:rPr lang="pt-PT" sz="1400" dirty="0" err="1"/>
+              <a:t>difficult</a:t>
+            </a:r>
+            <a:r>
+              <a:rPr lang="pt-PT" sz="1400" dirty="0"/>
+              <a:t>. </a:t>
+            </a:r>
+            <a:r>
+              <a:rPr lang="pt-PT" sz="1400" dirty="0" err="1"/>
+              <a:t>It</a:t>
+            </a:r>
+            <a:r>
+              <a:rPr lang="pt-PT" sz="1400" dirty="0"/>
+              <a:t> </a:t>
+            </a:r>
+            <a:r>
+              <a:rPr lang="pt-PT" sz="1400" dirty="0" err="1"/>
+              <a:t>actually</a:t>
+            </a:r>
+            <a:r>
+              <a:rPr lang="pt-PT" sz="1400" dirty="0"/>
+              <a:t> </a:t>
+            </a:r>
+            <a:r>
+              <a:rPr lang="pt-PT" sz="1400" dirty="0" err="1"/>
+              <a:t>worked</a:t>
+            </a:r>
+            <a:r>
+              <a:rPr lang="pt-PT" sz="1400" dirty="0"/>
+              <a:t>, </a:t>
+            </a:r>
+            <a:r>
+              <a:rPr lang="pt-PT" sz="1400" dirty="0" err="1"/>
+              <a:t>but</a:t>
+            </a:r>
+            <a:r>
+              <a:rPr lang="pt-PT" sz="1400" dirty="0"/>
+              <a:t> </a:t>
+            </a:r>
+            <a:r>
+              <a:rPr lang="pt-PT" sz="1400" dirty="0" err="1"/>
+              <a:t>the</a:t>
+            </a:r>
+            <a:r>
+              <a:rPr lang="pt-PT" sz="1400" dirty="0"/>
+              <a:t> </a:t>
+            </a:r>
+            <a:r>
+              <a:rPr lang="pt-PT" sz="1400" dirty="0" err="1"/>
+              <a:t>content</a:t>
+            </a:r>
+            <a:r>
+              <a:rPr lang="pt-PT" sz="1400" dirty="0"/>
+              <a:t> </a:t>
+            </a:r>
+            <a:r>
+              <a:rPr lang="pt-PT" sz="1400" dirty="0" err="1"/>
+              <a:t>didn’t</a:t>
+            </a:r>
+            <a:r>
+              <a:rPr lang="pt-PT" sz="1400" dirty="0"/>
+              <a:t> </a:t>
+            </a:r>
+            <a:r>
+              <a:rPr lang="pt-PT" sz="1400" dirty="0" err="1"/>
+              <a:t>end</a:t>
+            </a:r>
+            <a:r>
+              <a:rPr lang="pt-PT" sz="1400" dirty="0"/>
+              <a:t> </a:t>
+            </a:r>
+            <a:r>
+              <a:rPr lang="pt-PT" sz="1400" dirty="0" err="1"/>
+              <a:t>up</a:t>
+            </a:r>
+            <a:r>
+              <a:rPr lang="pt-PT" sz="1400" dirty="0"/>
+              <a:t> in </a:t>
+            </a:r>
+            <a:r>
+              <a:rPr lang="pt-PT" sz="1400" dirty="0" err="1"/>
+              <a:t>the</a:t>
+            </a:r>
+            <a:r>
+              <a:rPr lang="pt-PT" sz="1400" dirty="0"/>
+              <a:t> </a:t>
+            </a:r>
+            <a:r>
+              <a:rPr lang="pt-PT" sz="1400" dirty="0" err="1"/>
+              <a:t>right</a:t>
+            </a:r>
+            <a:r>
+              <a:rPr lang="pt-PT" sz="1400" dirty="0"/>
+              <a:t> </a:t>
+            </a:r>
+            <a:r>
+              <a:rPr lang="pt-PT" sz="1400" dirty="0" err="1"/>
+              <a:t>place</a:t>
+            </a:r>
+            <a:r>
+              <a:rPr lang="pt-PT" sz="1400" dirty="0"/>
+              <a:t>. I </a:t>
+            </a:r>
+            <a:r>
+              <a:rPr lang="pt-PT" sz="1400" dirty="0" err="1"/>
+              <a:t>ended</a:t>
+            </a:r>
+            <a:r>
+              <a:rPr lang="pt-PT" sz="1400" dirty="0"/>
+              <a:t> </a:t>
+            </a:r>
+            <a:r>
+              <a:rPr lang="pt-PT" sz="1400" dirty="0" err="1"/>
+              <a:t>up</a:t>
+            </a:r>
+            <a:r>
+              <a:rPr lang="pt-PT" sz="1400" dirty="0"/>
+              <a:t> </a:t>
+            </a:r>
+            <a:r>
+              <a:rPr lang="pt-PT" sz="1400" dirty="0" err="1"/>
+              <a:t>creating</a:t>
+            </a:r>
+            <a:r>
+              <a:rPr lang="pt-PT" sz="1400" dirty="0"/>
+              <a:t> more </a:t>
+            </a:r>
+            <a:r>
+              <a:rPr lang="pt-PT" sz="1400" dirty="0" err="1"/>
+              <a:t>placeholders</a:t>
+            </a:r>
+            <a:r>
+              <a:rPr lang="pt-PT" sz="1400" dirty="0"/>
+              <a:t>, as </a:t>
+            </a:r>
+            <a:r>
+              <a:rPr lang="pt-PT" sz="1400" dirty="0" err="1"/>
+              <a:t>expected</a:t>
+            </a:r>
+            <a:r>
+              <a:rPr lang="pt-PT" sz="1400" dirty="0"/>
+              <a:t>, </a:t>
+            </a:r>
+            <a:r>
+              <a:rPr lang="pt-PT" sz="1400" dirty="0" err="1"/>
+              <a:t>styled</a:t>
+            </a:r>
+            <a:r>
+              <a:rPr lang="pt-PT" sz="1400" dirty="0"/>
+              <a:t> </a:t>
+            </a:r>
+            <a:r>
+              <a:rPr lang="pt-PT" sz="1400" dirty="0" err="1"/>
+              <a:t>them</a:t>
+            </a:r>
+            <a:r>
+              <a:rPr lang="pt-PT" sz="1400" dirty="0"/>
+              <a:t>, </a:t>
+            </a:r>
+            <a:r>
+              <a:rPr lang="pt-PT" sz="1400" dirty="0" err="1"/>
+              <a:t>and</a:t>
+            </a:r>
+            <a:r>
+              <a:rPr lang="pt-PT" sz="1400" dirty="0"/>
+              <a:t> </a:t>
+            </a:r>
+            <a:r>
+              <a:rPr lang="pt-PT" sz="1400" dirty="0" err="1"/>
+              <a:t>eventually</a:t>
+            </a:r>
+            <a:r>
+              <a:rPr lang="pt-PT" sz="1400" dirty="0"/>
+              <a:t> </a:t>
+            </a:r>
+            <a:r>
+              <a:rPr lang="pt-PT" sz="1400" dirty="0" err="1"/>
+              <a:t>created</a:t>
+            </a:r>
+            <a:r>
+              <a:rPr lang="pt-PT" sz="1400" dirty="0"/>
+              <a:t> input </a:t>
+            </a:r>
+            <a:r>
+              <a:rPr lang="pt-PT" sz="1400" dirty="0" err="1"/>
+              <a:t>parameters</a:t>
+            </a:r>
+            <a:r>
+              <a:rPr lang="pt-PT" sz="1400" dirty="0"/>
+              <a:t> </a:t>
+            </a:r>
+            <a:r>
+              <a:rPr lang="pt-PT" sz="1400" dirty="0" err="1"/>
+              <a:t>that</a:t>
+            </a:r>
+            <a:r>
+              <a:rPr lang="pt-PT" sz="1400" dirty="0"/>
+              <a:t> </a:t>
+            </a:r>
+            <a:r>
+              <a:rPr lang="pt-PT" sz="1400" dirty="0" err="1"/>
+              <a:t>specify</a:t>
+            </a:r>
+            <a:r>
+              <a:rPr lang="pt-PT" sz="1400" dirty="0"/>
+              <a:t> </a:t>
+            </a:r>
+            <a:r>
+              <a:rPr lang="pt-PT" sz="1400" dirty="0" err="1"/>
+              <a:t>which</a:t>
+            </a:r>
+            <a:r>
+              <a:rPr lang="pt-PT" sz="1400" dirty="0"/>
+              <a:t> </a:t>
+            </a:r>
+            <a:r>
+              <a:rPr lang="pt-PT" sz="1400" dirty="0" err="1"/>
+              <a:t>card</a:t>
+            </a:r>
+            <a:r>
+              <a:rPr lang="pt-PT" sz="1400" dirty="0"/>
+              <a:t> to use.</a:t>
+            </a:r>
+            <a:br>
+              <a:rPr lang="pt-PT" sz="1400" dirty="0"/>
+            </a:br>
+            <a:endParaRPr lang="pt-PT" sz="1400" dirty="0"/>
+          </a:p>
           <a:p>
             <a:pPr>
               <a:lnSpc>
                 <a:spcPct val="100000"/>
               </a:lnSpc>
             </a:pPr>
-            <a:r>
-              <a:rPr lang="pt-PT" sz="1400"/>
-              <a:t>Passamos a criação do patterns, o que me deu mais problemas na altura foi o card, porque existem 2 cards no projeto e eu só com 3 placeholder queria fazer com que 1 pattern desse para os 2 cards o que ia ser muito difícil, até funcionou, contudo o conteúdo não ficava no sitio certo.</a:t>
-            </a:r>
-            <a:br>
-              <a:rPr lang="pt-PT" sz="1400"/>
-            </a:br>
-            <a:r>
-              <a:rPr lang="pt-PT" sz="1400"/>
-              <a:t>Acabei por criar mais placeholders como era espectável, estelizei e acabei por criar input parameters que alteram qual dos cards quer.</a:t>
-            </a:r>
+            <a:endParaRPr lang="pt-PT" sz="1400" dirty="0"/>
           </a:p>
         </p:txBody>
       </p:sp>
@@ -13787,10 +19888,10 @@
       </p:grpSpPr>
       <p:sp useBgFill="1">
         <p:nvSpPr>
-          <p:cNvPr id="9" name="Rectangle 8">
+          <p:cNvPr id="24" name="Rectangle 23">
             <a:extLst>
               <a:ext uri="{FF2B5EF4-FFF2-40B4-BE49-F238E27FC236}">
-                <a16:creationId xmlns:a16="http://schemas.microsoft.com/office/drawing/2014/main" id="{F68B2C62-7648-4430-90D5-AE0F252AF113}"/>
+                <a16:creationId xmlns:a16="http://schemas.microsoft.com/office/drawing/2014/main" id="{E49D7415-2F11-44C2-B6AA-13A25B6814B9}"/>
               </a:ext>
               <a:ext uri="{C183D7F6-B498-43B3-948B-1728B52AA6E4}">
                 <adec:decorative xmlns:adec="http://schemas.microsoft.com/office/drawing/2017/decorative" val="1"/>
@@ -13857,7 +19958,7 @@
           <a:lstStyle/>
           <a:p>
             <a:pPr algn="ctr"/>
-            <a:endParaRPr lang="en-US"/>
+            <a:endParaRPr lang="en-US" dirty="0"/>
           </a:p>
         </p:txBody>
       </p:sp>
@@ -13866,7 +19967,7 @@
           <p:cNvPr id="2" name="Título 1">
             <a:extLst>
               <a:ext uri="{FF2B5EF4-FFF2-40B4-BE49-F238E27FC236}">
-                <a16:creationId xmlns:a16="http://schemas.microsoft.com/office/drawing/2014/main" id="{A8C98591-BE88-21DE-AEB4-0BF0FBEBE950}"/>
+                <a16:creationId xmlns:a16="http://schemas.microsoft.com/office/drawing/2014/main" id="{A8F364CA-1B4B-25FC-30F0-B8359C7C4B6E}"/>
               </a:ext>
             </a:extLst>
           </p:cNvPr>
@@ -13879,8 +19980,8 @@
         </p:nvSpPr>
         <p:spPr>
           <a:xfrm>
-            <a:off x="700087" y="909638"/>
-            <a:ext cx="10691813" cy="1155618"/>
+            <a:off x="704088" y="914400"/>
+            <a:ext cx="4041648" cy="1928741"/>
           </a:xfrm>
         </p:spPr>
         <p:txBody>
@@ -13890,18 +19991,18 @@
           <a:lstStyle/>
           <a:p>
             <a:r>
-              <a:rPr lang="pt-PT" dirty="0"/>
-              <a:t>Documentação</a:t>
+              <a:rPr lang="en-US" dirty="0"/>
+              <a:t>Assembly</a:t>
             </a:r>
           </a:p>
         </p:txBody>
       </p:sp>
       <p:cxnSp>
         <p:nvCxnSpPr>
-          <p:cNvPr id="11" name="Straight Connector 10">
+          <p:cNvPr id="26" name="Straight Connector 25">
             <a:extLst>
               <a:ext uri="{FF2B5EF4-FFF2-40B4-BE49-F238E27FC236}">
-                <a16:creationId xmlns:a16="http://schemas.microsoft.com/office/drawing/2014/main" id="{AAD0195E-7F27-4D06-9427-0C121D721A14}"/>
+                <a16:creationId xmlns:a16="http://schemas.microsoft.com/office/drawing/2014/main" id="{D2E57F3D-33BE-4306-87E6-245763719516}"/>
               </a:ext>
               <a:ext uri="{C183D7F6-B498-43B3-948B-1728B52AA6E4}">
                 <adec:decorative xmlns:adec="http://schemas.microsoft.com/office/drawing/2017/decorative" val="1"/>
@@ -13921,8 +20022,8 @@
         </p:nvCxnSpPr>
         <p:spPr>
           <a:xfrm>
-            <a:off x="800100" y="723900"/>
-            <a:ext cx="10591800" cy="0"/>
+            <a:off x="804672" y="723900"/>
+            <a:ext cx="10588752" cy="0"/>
           </a:xfrm>
           <a:prstGeom prst="line">
             <a:avLst/>
@@ -13948,12 +20049,98 @@
           </a:fontRef>
         </p:style>
       </p:cxnSp>
+      <p:pic>
+        <p:nvPicPr>
+          <p:cNvPr id="5" name="Gráfico 4" descr="Monitor destaque">
+            <a:extLst>
+              <a:ext uri="{FF2B5EF4-FFF2-40B4-BE49-F238E27FC236}">
+                <a16:creationId xmlns:a16="http://schemas.microsoft.com/office/drawing/2014/main" id="{FECE3D91-741E-FD33-0E2E-A36755B14CB3}"/>
+              </a:ext>
+            </a:extLst>
+          </p:cNvPr>
+          <p:cNvPicPr>
+            <a:picLocks noChangeAspect="1"/>
+          </p:cNvPicPr>
+          <p:nvPr/>
+        </p:nvPicPr>
+        <p:blipFill>
+          <a:blip>
+            <a:extLst>
+              <a:ext uri="{96DAC541-7B7A-43D3-8B79-37D633B846F1}">
+                <asvg:svgBlip xmlns:asvg="http://schemas.microsoft.com/office/drawing/2016/SVG/main" r:embed="rId2"/>
+              </a:ext>
+            </a:extLst>
+          </a:blip>
+          <a:stretch>
+            <a:fillRect/>
+          </a:stretch>
+        </p:blipFill>
+        <p:spPr>
+          <a:xfrm>
+            <a:off x="804671" y="1714702"/>
+            <a:ext cx="3471493" cy="3471493"/>
+          </a:xfrm>
+          <a:prstGeom prst="rect">
+            <a:avLst/>
+          </a:prstGeom>
+        </p:spPr>
+      </p:pic>
+      <p:sp>
+        <p:nvSpPr>
+          <p:cNvPr id="3" name="Marcador de Posição de Conteúdo 2">
+            <a:extLst>
+              <a:ext uri="{FF2B5EF4-FFF2-40B4-BE49-F238E27FC236}">
+                <a16:creationId xmlns:a16="http://schemas.microsoft.com/office/drawing/2014/main" id="{C3B07181-2836-00FB-4FCE-0D11796F36B5}"/>
+              </a:ext>
+            </a:extLst>
+          </p:cNvPr>
+          <p:cNvSpPr>
+            <a:spLocks noGrp="1"/>
+          </p:cNvSpPr>
+          <p:nvPr>
+            <p:ph idx="1"/>
+          </p:nvPr>
+        </p:nvSpPr>
+        <p:spPr>
+          <a:xfrm>
+            <a:off x="5330952" y="968377"/>
+            <a:ext cx="6144768" cy="5010912"/>
+          </a:xfrm>
+        </p:spPr>
+        <p:txBody>
+          <a:bodyPr>
+            <a:normAutofit/>
+          </a:bodyPr>
+          <a:lstStyle/>
+          <a:p>
+            <a:endParaRPr lang="en-US" dirty="0"/>
+          </a:p>
+          <a:p>
+            <a:r>
+              <a:rPr lang="en-US" dirty="0"/>
+              <a:t>As I was putting the screens together here, I added the components I had developed and ended up finding some issues with certain components that I had to fix. In other words, I ended up not only assembling the screens but also correcting or adding styles to things I had done previously. </a:t>
+            </a:r>
+          </a:p>
+          <a:p>
+            <a:endParaRPr lang="en-US" dirty="0"/>
+          </a:p>
+          <a:p>
+            <a:r>
+              <a:rPr lang="en-US" dirty="0"/>
+              <a:t>I’ll show you some examples in the following slides:</a:t>
+            </a:r>
+          </a:p>
+          <a:p>
+            <a:endParaRPr lang="en-US" dirty="0"/>
+          </a:p>
+        </p:txBody>
+      </p:sp>
       <p:cxnSp>
         <p:nvCxnSpPr>
-          <p:cNvPr id="13" name="Straight Connector 12">
+          <p:cNvPr id="28" name="Straight Connector 27">
             <a:extLst>
               <a:ext uri="{FF2B5EF4-FFF2-40B4-BE49-F238E27FC236}">
-                <a16:creationId xmlns:a16="http://schemas.microsoft.com/office/drawing/2014/main" id="{9D74C2FC-3228-4FC1-B97B-87AD35508D91}"/>
+                <a16:creationId xmlns:a16="http://schemas.microsoft.com/office/drawing/2014/main" id="{8E0104E4-99BC-494F-8342-F250828E574F}"/>
               </a:ext>
               <a:ext uri="{C183D7F6-B498-43B3-948B-1728B52AA6E4}">
                 <adec:decorative xmlns:adec="http://schemas.microsoft.com/office/drawing/2017/decorative" val="1"/>
@@ -13973,8 +20160,8 @@
         </p:nvCxnSpPr>
         <p:spPr>
           <a:xfrm>
-            <a:off x="800100" y="6142781"/>
-            <a:ext cx="10591800" cy="0"/>
+            <a:off x="809065" y="6145599"/>
+            <a:ext cx="10582835" cy="0"/>
           </a:xfrm>
           <a:prstGeom prst="line">
             <a:avLst/>
@@ -14000,41 +20187,10 @@
           </a:fontRef>
         </p:style>
       </p:cxnSp>
-      <p:graphicFrame>
-        <p:nvGraphicFramePr>
-          <p:cNvPr id="5" name="Marcador de Posição de Conteúdo 2">
-            <a:extLst>
-              <a:ext uri="{FF2B5EF4-FFF2-40B4-BE49-F238E27FC236}">
-                <a16:creationId xmlns:a16="http://schemas.microsoft.com/office/drawing/2014/main" id="{96C82AFA-7349-DC5E-3D6D-00150156A40F}"/>
-              </a:ext>
-            </a:extLst>
-          </p:cNvPr>
-          <p:cNvGraphicFramePr>
-            <a:graphicFrameLocks noGrp="1"/>
-          </p:cNvGraphicFramePr>
-          <p:nvPr>
-            <p:ph idx="1"/>
-            <p:extLst>
-              <p:ext uri="{D42A27DB-BD31-4B8C-83A1-F6EECF244321}">
-                <p14:modId xmlns:p14="http://schemas.microsoft.com/office/powerpoint/2010/main" val="3389797283"/>
-              </p:ext>
-            </p:extLst>
-          </p:nvPr>
-        </p:nvGraphicFramePr>
-        <p:xfrm>
-          <a:off x="700088" y="2222500"/>
-          <a:ext cx="10691812" cy="3740150"/>
-        </p:xfrm>
-        <a:graphic>
-          <a:graphicData uri="http://schemas.openxmlformats.org/drawingml/2006/diagram">
-            <dgm:relIds xmlns:dgm="http://schemas.openxmlformats.org/drawingml/2006/diagram" xmlns:r="http://schemas.openxmlformats.org/officeDocument/2006/relationships" r:dm="rId2" r:lo="rId3" r:qs="rId4" r:cs="rId5"/>
-          </a:graphicData>
-        </a:graphic>
-      </p:graphicFrame>
     </p:spTree>
     <p:extLst>
       <p:ext uri="{BB962C8B-B14F-4D97-AF65-F5344CB8AC3E}">
-        <p14:creationId xmlns:p14="http://schemas.microsoft.com/office/powerpoint/2010/main" val="655374669"/>
+        <p14:creationId xmlns:p14="http://schemas.microsoft.com/office/powerpoint/2010/main" val="1863257131"/>
       </p:ext>
     </p:extLst>
   </p:cSld>
